--- a/Muster_MSOffice2016/muster_poster_A0_hoch - Copy.pptx
+++ b/Muster_MSOffice2016/muster_poster_A0_hoch - Copy.pptx
@@ -6,6 +6,7 @@
   </p:sldMasterIdLst>
   <p:sldIdLst>
     <p:sldId id="256" r:id="rId2"/>
+    <p:sldId id="257" r:id="rId3"/>
   </p:sldIdLst>
   <p:sldSz cx="30275213" cy="42803763"/>
   <p:notesSz cx="6858000" cy="9144000"/>
@@ -178,6 +179,78 @@
 </p:presentation>
 </file>
 
+<file path=ppt/authors.xml><?xml version="1.0" encoding="utf-8"?>
+<p188:authorLst xmlns:a="http://schemas.openxmlformats.org/drawingml/2006/main" xmlns:r="http://schemas.openxmlformats.org/officeDocument/2006/relationships" xmlns:p188="http://schemas.microsoft.com/office/powerpoint/2018/8/main">
+  <p188:author id="{883C701C-0B02-F39B-CF72-564DBC6FBC27}" name="Duc Hai Nguyen" initials="DN" userId="b80d323cb1f4b6bf" providerId="Windows Live"/>
+</p188:authorLst>
+</file>
+
+<file path=ppt/comments/modernComment_100_C6949F35.xml><?xml version="1.0" encoding="utf-8"?>
+<p188:cmLst xmlns:a="http://schemas.openxmlformats.org/drawingml/2006/main" xmlns:r="http://schemas.openxmlformats.org/officeDocument/2006/relationships" xmlns:p188="http://schemas.microsoft.com/office/powerpoint/2018/8/main">
+  <p188:cm id="{285DD2BB-3183-4DE9-9893-598A65EDDE99}" authorId="{883C701C-0B02-F39B-CF72-564DBC6FBC27}" created="2026-07-11T18:32:58.373">
+    <ac:txMkLst xmlns:ac="http://schemas.microsoft.com/office/drawing/2013/main/command">
+      <pc:docMk xmlns:pc="http://schemas.microsoft.com/office/powerpoint/2013/main/command"/>
+      <pc:sldMk xmlns:pc="http://schemas.microsoft.com/office/powerpoint/2013/main/command" cId="3331628853" sldId="256"/>
+      <ac:spMk id="42" creationId="{93CD316B-FC80-4188-968B-2D1ECE913012}"/>
+      <ac:txMk cp="281" len="666">
+        <ac:context len="949" hash="1653845312"/>
+      </ac:txMk>
+    </ac:txMkLst>
+    <p188:pos x="8543925" y="1284673"/>
+    <p188:txBody>
+      <a:bodyPr/>
+      <a:lstStyle/>
+      <a:p>
+        <a:r>
+          <a:rPr lang="en-DE"/>
+          <a:t>Später Weglöschen</a:t>
+        </a:r>
+      </a:p>
+    </p188:txBody>
+  </p188:cm>
+  <p188:cm id="{B1BF582B-577E-4EE5-9CDE-F08F13FE9580}" authorId="{883C701C-0B02-F39B-CF72-564DBC6FBC27}" created="2026-07-11T18:40:26.657">
+    <ac:deMkLst xmlns:ac="http://schemas.microsoft.com/office/drawing/2013/main/command">
+      <pc:docMk xmlns:pc="http://schemas.microsoft.com/office/powerpoint/2013/main/command"/>
+      <pc:sldMk xmlns:pc="http://schemas.microsoft.com/office/powerpoint/2013/main/command" cId="3331628853" sldId="256"/>
+      <ac:spMk id="40" creationId="{485B190A-D15B-403F-995A-1487C63CCEB7}"/>
+    </ac:deMkLst>
+    <p188:txBody>
+      <a:bodyPr/>
+      <a:lstStyle/>
+      <a:p>
+        <a:r>
+          <a:rPr lang="en-DE"/>
+          <a:t>Warum funktioniert es? [TA2 Kernfrage]
+	• Hierarchische Merkmalsextraktion: frühe Schichten lernen Kanten &amp; Konturen, tiefe Schichten abstrakte Körperteil-Repräsentationen
+	• Multi-Skalen-Fusion im Neck: kombiniert feine räumliche Details (P3) mit semantisch starken Merkmalen (P5) → Personen aller Größen erkennbar
+	• Attention (C2PSA): gewichtet Bildbereiche kontextabhängig → relevante Körperregionen werden verstärkt
+	• Gemeinsames Training von Detektion + Keypoints: Box liefert räumlichen Anker, Keypoints werden relativ dazu regressiert
+NMS-Ersatz durch Training: One-to-One-Zuordnung wird gelernt statt nachträglich gefiltert → durchgängig differenzierbare End-to-End-Kette</a:t>
+        </a:r>
+      </a:p>
+    </p188:txBody>
+  </p188:cm>
+  <p188:cm id="{701E0792-E67E-4332-BAD2-1990A3C471D6}" authorId="{883C701C-0B02-F39B-CF72-564DBC6FBC27}" created="2026-07-11T19:56:42.203">
+    <ac:deMkLst xmlns:ac="http://schemas.microsoft.com/office/drawing/2013/main/command">
+      <pc:docMk xmlns:pc="http://schemas.microsoft.com/office/powerpoint/2013/main/command"/>
+      <pc:sldMk xmlns:pc="http://schemas.microsoft.com/office/powerpoint/2013/main/command" cId="3331628853" sldId="256"/>
+      <ac:spMk id="35" creationId="{503456D7-DDF4-4275-B7AD-C952118E96B6}"/>
+    </ac:deMkLst>
+    <p188:txBody>
+      <a:bodyPr/>
+      <a:lstStyle/>
+      <a:p>
+        <a:r>
+          <a:rPr lang="en-DE"/>
+          <a:t>Richard’s Aufgaben
+Lösch einfach die Texte, die du nicht brauchst</a:t>
+        </a:r>
+      </a:p>
+    </p188:txBody>
+  </p188:cm>
+</p188:cmLst>
+</file>
+
 <file path=ppt/slideLayouts/slideLayout1.xml><?xml version="1.0" encoding="utf-8"?>
 <p:sldLayout xmlns:a="http://schemas.openxmlformats.org/drawingml/2006/main" xmlns:r="http://schemas.openxmlformats.org/officeDocument/2006/relationships" xmlns:p="http://schemas.openxmlformats.org/presentationml/2006/main" preserve="1" userDrawn="1">
   <p:cSld name="6 columns">
@@ -425,10 +498,10 @@
           <p:nvPr userDrawn="1"/>
         </p:nvPicPr>
         <p:blipFill>
-          <a:blip r:embed="rId2">
+          <a:blip>
             <a:extLst>
               <a:ext uri="{96DAC541-7B7A-43D3-8B79-37D633B846F1}">
-                <asvg:svgBlip xmlns:asvg="http://schemas.microsoft.com/office/drawing/2016/SVG/main" r:embed="rId3"/>
+                <asvg:svgBlip xmlns:asvg="http://schemas.microsoft.com/office/drawing/2016/SVG/main" r:embed="rId2"/>
               </a:ext>
             </a:extLst>
           </a:blip>
@@ -1883,10 +1956,10 @@
           <p:nvPr userDrawn="1"/>
         </p:nvPicPr>
         <p:blipFill>
-          <a:blip r:embed="rId2">
+          <a:blip>
             <a:extLst>
               <a:ext uri="{96DAC541-7B7A-43D3-8B79-37D633B846F1}">
-                <asvg:svgBlip xmlns:asvg="http://schemas.microsoft.com/office/drawing/2016/SVG/main" r:embed="rId3"/>
+                <asvg:svgBlip xmlns:asvg="http://schemas.microsoft.com/office/drawing/2016/SVG/main" r:embed="rId2"/>
               </a:ext>
             </a:extLst>
           </a:blip>
@@ -2945,10 +3018,10 @@
           <p:nvPr userDrawn="1"/>
         </p:nvPicPr>
         <p:blipFill>
-          <a:blip r:embed="rId2">
+          <a:blip>
             <a:extLst>
               <a:ext uri="{96DAC541-7B7A-43D3-8B79-37D633B846F1}">
-                <asvg:svgBlip xmlns:asvg="http://schemas.microsoft.com/office/drawing/2016/SVG/main" r:embed="rId3"/>
+                <asvg:svgBlip xmlns:asvg="http://schemas.microsoft.com/office/drawing/2016/SVG/main" r:embed="rId2"/>
               </a:ext>
             </a:extLst>
           </a:blip>
@@ -3875,10 +3948,10 @@
           <p:nvPr userDrawn="1"/>
         </p:nvPicPr>
         <p:blipFill>
-          <a:blip r:embed="rId2">
+          <a:blip>
             <a:extLst>
               <a:ext uri="{96DAC541-7B7A-43D3-8B79-37D633B846F1}">
-                <asvg:svgBlip xmlns:asvg="http://schemas.microsoft.com/office/drawing/2016/SVG/main" r:embed="rId3"/>
+                <asvg:svgBlip xmlns:asvg="http://schemas.microsoft.com/office/drawing/2016/SVG/main" r:embed="rId2"/>
               </a:ext>
             </a:extLst>
           </a:blip>
@@ -4558,10 +4631,10 @@
           <p:nvPr userDrawn="1"/>
         </p:nvPicPr>
         <p:blipFill>
-          <a:blip r:embed="rId6">
+          <a:blip>
             <a:extLst>
               <a:ext uri="{96DAC541-7B7A-43D3-8B79-37D633B846F1}">
-                <asvg:svgBlip xmlns:asvg="http://schemas.microsoft.com/office/drawing/2016/SVG/main" r:embed="rId7"/>
+                <asvg:svgBlip xmlns:asvg="http://schemas.microsoft.com/office/drawing/2016/SVG/main" r:embed="rId6"/>
               </a:ext>
             </a:extLst>
           </a:blip>
@@ -5019,14 +5092,35 @@
           <a:lstStyle/>
           <a:p>
             <a:r>
-              <a:rPr lang="de-DE" sz="6600" dirty="0"/>
-              <a:t>Teilthema Ihrer Gruppe</a:t>
-            </a:r>
-          </a:p>
-          <a:p>
-            <a:r>
-              <a:rPr lang="de-DE" dirty="0"/>
-              <a:t>Name, Vorname; Name, Vorname</a:t>
+              <a:rPr lang="en-DE" sz="6600" dirty="0"/>
+              <a:t>YOLO26: </a:t>
+            </a:r>
+            <a:r>
+              <a:rPr lang="en-DE" sz="6600" dirty="0" err="1"/>
+              <a:t>Bestimmung</a:t>
+            </a:r>
+            <a:r>
+              <a:rPr lang="en-DE" sz="6600" dirty="0"/>
+              <a:t> von </a:t>
+            </a:r>
+            <a:r>
+              <a:rPr lang="en-DE" sz="6600" dirty="0" err="1"/>
+              <a:t>Objekt</a:t>
+            </a:r>
+            <a:r>
+              <a:rPr lang="en-DE" sz="6600" dirty="0"/>
+              <a:t>-Posen in </a:t>
+            </a:r>
+            <a:r>
+              <a:rPr lang="en-DE" sz="6600" dirty="0" err="1"/>
+              <a:t>Bildern</a:t>
+            </a:r>
+            <a:endParaRPr lang="en-US" sz="6600" dirty="0"/>
+          </a:p>
+          <a:p>
+            <a:r>
+              <a:rPr lang="de-DE" dirty="0"/>
+              <a:t>Nguyen, Duc Hai; Loewe, Richard</a:t>
             </a:r>
           </a:p>
         </p:txBody>
@@ -5047,190 +5141,1895 @@
             <p:ph type="body" sz="quarter" idx="26"/>
           </p:nvPr>
         </p:nvSpPr>
+        <p:spPr>
+          <a:xfrm>
+            <a:off x="1527176" y="22019770"/>
+            <a:ext cx="8472488" cy="6726680"/>
+          </a:xfrm>
+        </p:spPr>
+        <p:txBody>
+          <a:bodyPr/>
+          <a:lstStyle/>
+          <a:p>
+            <a:r>
+              <a:rPr lang="en-DE" b="1" dirty="0" err="1">
+                <a:highlight>
+                  <a:srgbClr val="00FFFF"/>
+                </a:highlight>
+              </a:rPr>
+              <a:t>Eingangsdaten</a:t>
+            </a:r>
+            <a:r>
+              <a:rPr lang="en-DE" b="1" dirty="0">
+                <a:highlight>
+                  <a:srgbClr val="00FFFF"/>
+                </a:highlight>
+              </a:rPr>
+              <a:t> des </a:t>
+            </a:r>
+            <a:r>
+              <a:rPr lang="en-DE" b="1" dirty="0" err="1">
+                <a:highlight>
+                  <a:srgbClr val="00FFFF"/>
+                </a:highlight>
+              </a:rPr>
+              <a:t>Netzes</a:t>
+            </a:r>
+            <a:r>
+              <a:rPr lang="en-DE" b="1" dirty="0">
+                <a:highlight>
+                  <a:srgbClr val="00FFFF"/>
+                </a:highlight>
+              </a:rPr>
+              <a:t> [F2]</a:t>
+            </a:r>
+          </a:p>
+          <a:p>
+            <a:pPr algn="ctr"/>
+            <a:r>
+              <a:rPr lang="en-DE" b="1" dirty="0">
+                <a:highlight>
+                  <a:srgbClr val="00FFFF"/>
+                </a:highlight>
+              </a:rPr>
+              <a:t>float32 [640, 640, 3]</a:t>
+            </a:r>
+            <a:r>
+              <a:rPr lang="en-DE" dirty="0">
+                <a:highlight>
+                  <a:srgbClr val="00FFFF"/>
+                </a:highlight>
+              </a:rPr>
+              <a:t> </a:t>
+            </a:r>
+            <a:endParaRPr lang="en-US" dirty="0">
+              <a:highlight>
+                <a:srgbClr val="00FFFF"/>
+              </a:highlight>
+            </a:endParaRPr>
+          </a:p>
+          <a:p>
+            <a:pPr algn="ctr"/>
+            <a:r>
+              <a:rPr lang="en-DE" dirty="0" err="1">
+                <a:highlight>
+                  <a:srgbClr val="00FFFF"/>
+                </a:highlight>
+              </a:rPr>
+              <a:t>Höhe</a:t>
+            </a:r>
+            <a:r>
+              <a:rPr lang="en-DE" dirty="0">
+                <a:highlight>
+                  <a:srgbClr val="00FFFF"/>
+                </a:highlight>
+              </a:rPr>
+              <a:t> × Breite × RGB-</a:t>
+            </a:r>
+            <a:r>
+              <a:rPr lang="en-DE" dirty="0" err="1">
+                <a:highlight>
+                  <a:srgbClr val="00FFFF"/>
+                </a:highlight>
+              </a:rPr>
+              <a:t>Farbkanäle</a:t>
+            </a:r>
+            <a:endParaRPr lang="en-DE" dirty="0">
+              <a:highlight>
+                <a:srgbClr val="00FFFF"/>
+              </a:highlight>
+            </a:endParaRPr>
+          </a:p>
+          <a:p>
+            <a:r>
+              <a:rPr lang="en-DE" b="1" dirty="0" err="1">
+                <a:highlight>
+                  <a:srgbClr val="00FFFF"/>
+                </a:highlight>
+              </a:rPr>
+              <a:t>Vorverarbeitung</a:t>
+            </a:r>
+            <a:r>
+              <a:rPr lang="en-DE" b="1" dirty="0">
+                <a:highlight>
+                  <a:srgbClr val="00FFFF"/>
+                </a:highlight>
+              </a:rPr>
+              <a:t>:</a:t>
+            </a:r>
+            <a:endParaRPr lang="en-DE" dirty="0">
+              <a:highlight>
+                <a:srgbClr val="00FFFF"/>
+              </a:highlight>
+            </a:endParaRPr>
+          </a:p>
+          <a:p>
+            <a:r>
+              <a:rPr lang="en-DE" dirty="0" err="1">
+                <a:highlight>
+                  <a:srgbClr val="00FFFF"/>
+                </a:highlight>
+              </a:rPr>
+              <a:t>Skalierung</a:t>
+            </a:r>
+            <a:r>
+              <a:rPr lang="en-DE" dirty="0">
+                <a:highlight>
+                  <a:srgbClr val="00FFFF"/>
+                </a:highlight>
+              </a:rPr>
+              <a:t> </a:t>
+            </a:r>
+            <a:r>
+              <a:rPr lang="en-DE" dirty="0" err="1">
+                <a:highlight>
+                  <a:srgbClr val="00FFFF"/>
+                </a:highlight>
+              </a:rPr>
+              <a:t>unter</a:t>
+            </a:r>
+            <a:r>
+              <a:rPr lang="en-DE" dirty="0">
+                <a:highlight>
+                  <a:srgbClr val="00FFFF"/>
+                </a:highlight>
+              </a:rPr>
+              <a:t> </a:t>
+            </a:r>
+            <a:r>
+              <a:rPr lang="en-DE" dirty="0" err="1">
+                <a:highlight>
+                  <a:srgbClr val="00FFFF"/>
+                </a:highlight>
+              </a:rPr>
+              <a:t>Beibehaltung</a:t>
+            </a:r>
+            <a:r>
+              <a:rPr lang="en-DE" dirty="0">
+                <a:highlight>
+                  <a:srgbClr val="00FFFF"/>
+                </a:highlight>
+              </a:rPr>
+              <a:t> des </a:t>
+            </a:r>
+            <a:r>
+              <a:rPr lang="en-DE" dirty="0" err="1">
+                <a:highlight>
+                  <a:srgbClr val="00FFFF"/>
+                </a:highlight>
+              </a:rPr>
+              <a:t>Seitenverhältnisses</a:t>
+            </a:r>
+            <a:r>
+              <a:rPr lang="en-DE" dirty="0">
+                <a:highlight>
+                  <a:srgbClr val="00FFFF"/>
+                </a:highlight>
+              </a:rPr>
+              <a:t> → </a:t>
+            </a:r>
+            <a:r>
+              <a:rPr lang="en-DE" dirty="0" err="1">
+                <a:highlight>
+                  <a:srgbClr val="00FFFF"/>
+                </a:highlight>
+              </a:rPr>
+              <a:t>längere</a:t>
+            </a:r>
+            <a:r>
+              <a:rPr lang="en-DE" dirty="0">
+                <a:highlight>
+                  <a:srgbClr val="00FFFF"/>
+                </a:highlight>
+              </a:rPr>
+              <a:t> </a:t>
+            </a:r>
+            <a:r>
+              <a:rPr lang="en-DE" dirty="0" err="1">
+                <a:highlight>
+                  <a:srgbClr val="00FFFF"/>
+                </a:highlight>
+              </a:rPr>
+              <a:t>Seite</a:t>
+            </a:r>
+            <a:r>
+              <a:rPr lang="en-DE" dirty="0">
+                <a:highlight>
+                  <a:srgbClr val="00FFFF"/>
+                </a:highlight>
+              </a:rPr>
+              <a:t> = 640 </a:t>
+            </a:r>
+            <a:r>
+              <a:rPr lang="en-DE" dirty="0" err="1">
+                <a:highlight>
+                  <a:srgbClr val="00FFFF"/>
+                </a:highlight>
+              </a:rPr>
+              <a:t>px</a:t>
+            </a:r>
+            <a:endParaRPr lang="en-DE" dirty="0">
+              <a:highlight>
+                <a:srgbClr val="00FFFF"/>
+              </a:highlight>
+            </a:endParaRPr>
+          </a:p>
+          <a:p>
+            <a:r>
+              <a:rPr lang="en-DE" dirty="0">
+                <a:highlight>
+                  <a:srgbClr val="00FFFF"/>
+                </a:highlight>
+              </a:rPr>
+              <a:t>Padding der </a:t>
+            </a:r>
+            <a:r>
+              <a:rPr lang="en-DE" dirty="0" err="1">
+                <a:highlight>
+                  <a:srgbClr val="00FFFF"/>
+                </a:highlight>
+              </a:rPr>
+              <a:t>Randbereiche</a:t>
+            </a:r>
+            <a:r>
+              <a:rPr lang="en-DE" dirty="0">
+                <a:highlight>
+                  <a:srgbClr val="00FFFF"/>
+                </a:highlight>
+              </a:rPr>
+              <a:t> </a:t>
+            </a:r>
+            <a:r>
+              <a:rPr lang="en-DE" dirty="0" err="1">
+                <a:highlight>
+                  <a:srgbClr val="00FFFF"/>
+                </a:highlight>
+              </a:rPr>
+              <a:t>mit</a:t>
+            </a:r>
+            <a:r>
+              <a:rPr lang="en-DE" dirty="0">
+                <a:highlight>
+                  <a:srgbClr val="00FFFF"/>
+                </a:highlight>
+              </a:rPr>
+              <a:t> </a:t>
+            </a:r>
+            <a:r>
+              <a:rPr lang="en-DE" dirty="0" err="1">
+                <a:highlight>
+                  <a:srgbClr val="00FFFF"/>
+                </a:highlight>
+              </a:rPr>
+              <a:t>Nullwerten</a:t>
+            </a:r>
+            <a:r>
+              <a:rPr lang="en-DE" dirty="0">
+                <a:highlight>
+                  <a:srgbClr val="00FFFF"/>
+                </a:highlight>
+              </a:rPr>
+              <a:t> (schwarz) → </a:t>
+            </a:r>
+            <a:r>
+              <a:rPr lang="en-DE" dirty="0" err="1">
+                <a:highlight>
+                  <a:srgbClr val="00FFFF"/>
+                </a:highlight>
+              </a:rPr>
+              <a:t>quadratisches</a:t>
+            </a:r>
+            <a:r>
+              <a:rPr lang="en-DE" dirty="0">
+                <a:highlight>
+                  <a:srgbClr val="00FFFF"/>
+                </a:highlight>
+              </a:rPr>
+              <a:t> Format</a:t>
+            </a:r>
+          </a:p>
+          <a:p>
+            <a:r>
+              <a:rPr lang="en-DE" dirty="0" err="1">
+                <a:highlight>
+                  <a:srgbClr val="00FFFF"/>
+                </a:highlight>
+              </a:rPr>
+              <a:t>Normierung</a:t>
+            </a:r>
+            <a:r>
+              <a:rPr lang="en-DE" dirty="0">
+                <a:highlight>
+                  <a:srgbClr val="00FFFF"/>
+                </a:highlight>
+              </a:rPr>
+              <a:t> der </a:t>
+            </a:r>
+            <a:r>
+              <a:rPr lang="en-DE" dirty="0" err="1">
+                <a:highlight>
+                  <a:srgbClr val="00FFFF"/>
+                </a:highlight>
+              </a:rPr>
+              <a:t>Pixelwerte</a:t>
+            </a:r>
+            <a:r>
+              <a:rPr lang="en-DE" dirty="0">
+                <a:highlight>
+                  <a:srgbClr val="00FFFF"/>
+                </a:highlight>
+              </a:rPr>
+              <a:t> auf float32</a:t>
+            </a:r>
+          </a:p>
+        </p:txBody>
+      </p:sp>
+      <p:sp>
+        <p:nvSpPr>
+          <p:cNvPr id="35" name="Bildplatzhalter 34">
+            <a:extLst>
+              <a:ext uri="{FF2B5EF4-FFF2-40B4-BE49-F238E27FC236}">
+                <a16:creationId xmlns:a16="http://schemas.microsoft.com/office/drawing/2014/main" id="{503456D7-DDF4-4275-B7AD-C952118E96B6}"/>
+              </a:ext>
+            </a:extLst>
+          </p:cNvPr>
+          <p:cNvSpPr>
+            <a:spLocks noGrp="1"/>
+          </p:cNvSpPr>
+          <p:nvPr>
+            <p:ph type="pic" sz="quarter" idx="33"/>
+          </p:nvPr>
+        </p:nvSpPr>
+        <p:spPr>
+          <a:xfrm>
+            <a:off x="1527176" y="12241212"/>
+            <a:ext cx="8472488" cy="9160669"/>
+          </a:xfrm>
+        </p:spPr>
+        <p:txBody>
+          <a:bodyPr/>
+          <a:lstStyle/>
+          <a:p>
+            <a:r>
+              <a:rPr lang="en-US" b="1" dirty="0">
+                <a:highlight>
+                  <a:srgbClr val="00FFFF"/>
+                </a:highlight>
+              </a:rPr>
+              <a:t>Motivation &amp; </a:t>
+            </a:r>
+            <a:r>
+              <a:rPr lang="en-US" b="1" dirty="0" err="1">
+                <a:highlight>
+                  <a:srgbClr val="00FFFF"/>
+                </a:highlight>
+              </a:rPr>
+              <a:t>Einordnung</a:t>
+            </a:r>
+            <a:endParaRPr lang="en-US" b="1" dirty="0">
+              <a:highlight>
+                <a:srgbClr val="00FFFF"/>
+              </a:highlight>
+            </a:endParaRPr>
+          </a:p>
+          <a:p>
+            <a:r>
+              <a:rPr lang="en-DE" b="1" dirty="0" err="1">
+                <a:highlight>
+                  <a:srgbClr val="00FFFF"/>
+                </a:highlight>
+              </a:rPr>
+              <a:t>Posenbestimmung</a:t>
+            </a:r>
+            <a:r>
+              <a:rPr lang="en-DE" b="1" dirty="0">
+                <a:highlight>
+                  <a:srgbClr val="00FFFF"/>
+                </a:highlight>
+              </a:rPr>
+              <a:t> in der Navigation </a:t>
+            </a:r>
+            <a:r>
+              <a:rPr lang="en-DE" b="1" dirty="0" err="1">
+                <a:highlight>
+                  <a:srgbClr val="00FFFF"/>
+                </a:highlight>
+              </a:rPr>
+              <a:t>mobiler</a:t>
+            </a:r>
+            <a:r>
+              <a:rPr lang="en-DE" b="1" dirty="0">
+                <a:highlight>
+                  <a:srgbClr val="00FFFF"/>
+                </a:highlight>
+              </a:rPr>
+              <a:t> </a:t>
+            </a:r>
+            <a:r>
+              <a:rPr lang="en-DE" b="1" dirty="0" err="1">
+                <a:highlight>
+                  <a:srgbClr val="00FFFF"/>
+                </a:highlight>
+              </a:rPr>
+              <a:t>Roboter</a:t>
+            </a:r>
+            <a:endParaRPr lang="en-DE" dirty="0">
+              <a:highlight>
+                <a:srgbClr val="00FFFF"/>
+              </a:highlight>
+            </a:endParaRPr>
+          </a:p>
+          <a:p>
+            <a:r>
+              <a:rPr lang="en-DE" dirty="0">
+                <a:highlight>
+                  <a:srgbClr val="00FFFF"/>
+                </a:highlight>
+              </a:rPr>
+              <a:t>Navigation = </a:t>
+            </a:r>
+            <a:r>
+              <a:rPr lang="en-DE" dirty="0" err="1">
+                <a:highlight>
+                  <a:srgbClr val="00FFFF"/>
+                </a:highlight>
+              </a:rPr>
+              <a:t>Wahrnehmung</a:t>
+            </a:r>
+            <a:r>
+              <a:rPr lang="en-DE" dirty="0">
+                <a:highlight>
+                  <a:srgbClr val="00FFFF"/>
+                </a:highlight>
+              </a:rPr>
+              <a:t> &amp; Interpretation der </a:t>
+            </a:r>
+            <a:r>
+              <a:rPr lang="en-DE" dirty="0" err="1">
+                <a:highlight>
+                  <a:srgbClr val="00FFFF"/>
+                </a:highlight>
+              </a:rPr>
+              <a:t>Umgebung</a:t>
+            </a:r>
+            <a:r>
+              <a:rPr lang="en-DE" dirty="0">
+                <a:highlight>
+                  <a:srgbClr val="00FFFF"/>
+                </a:highlight>
+              </a:rPr>
+              <a:t> (Localization &amp; Mapping) → </a:t>
+            </a:r>
+            <a:r>
+              <a:rPr lang="en-DE" dirty="0" err="1">
+                <a:highlight>
+                  <a:srgbClr val="00FFFF"/>
+                </a:highlight>
+              </a:rPr>
+              <a:t>Grundlage</a:t>
+            </a:r>
+            <a:r>
+              <a:rPr lang="en-DE" dirty="0">
+                <a:highlight>
+                  <a:srgbClr val="00FFFF"/>
+                </a:highlight>
+              </a:rPr>
+              <a:t> für Guidance &amp; Control</a:t>
+            </a:r>
+          </a:p>
+          <a:p>
+            <a:r>
+              <a:rPr lang="en-DE" dirty="0" err="1">
+                <a:highlight>
+                  <a:srgbClr val="00FFFF"/>
+                </a:highlight>
+              </a:rPr>
+              <a:t>Personen</a:t>
+            </a:r>
+            <a:r>
+              <a:rPr lang="en-DE" dirty="0">
+                <a:highlight>
+                  <a:srgbClr val="00FFFF"/>
+                </a:highlight>
+              </a:rPr>
+              <a:t> </a:t>
+            </a:r>
+            <a:r>
+              <a:rPr lang="en-DE" dirty="0" err="1">
+                <a:highlight>
+                  <a:srgbClr val="00FFFF"/>
+                </a:highlight>
+              </a:rPr>
+              <a:t>sind</a:t>
+            </a:r>
+            <a:r>
+              <a:rPr lang="en-DE" dirty="0">
+                <a:highlight>
+                  <a:srgbClr val="00FFFF"/>
+                </a:highlight>
+              </a:rPr>
+              <a:t> </a:t>
+            </a:r>
+            <a:r>
+              <a:rPr lang="en-DE" b="1" dirty="0" err="1">
+                <a:highlight>
+                  <a:srgbClr val="00FFFF"/>
+                </a:highlight>
+              </a:rPr>
+              <a:t>dynamische</a:t>
+            </a:r>
+            <a:r>
+              <a:rPr lang="en-DE" b="1" dirty="0">
+                <a:highlight>
+                  <a:srgbClr val="00FFFF"/>
+                </a:highlight>
+              </a:rPr>
+              <a:t> </a:t>
+            </a:r>
+            <a:r>
+              <a:rPr lang="en-DE" b="1" dirty="0" err="1">
+                <a:highlight>
+                  <a:srgbClr val="00FFFF"/>
+                </a:highlight>
+              </a:rPr>
+              <a:t>Objekte</a:t>
+            </a:r>
+            <a:r>
+              <a:rPr lang="en-DE" dirty="0">
+                <a:highlight>
+                  <a:srgbClr val="00FFFF"/>
+                </a:highlight>
+              </a:rPr>
+              <a:t>: </a:t>
+            </a:r>
+            <a:r>
+              <a:rPr lang="en-DE" dirty="0" err="1">
+                <a:highlight>
+                  <a:srgbClr val="00FFFF"/>
+                </a:highlight>
+              </a:rPr>
+              <a:t>Roboter</a:t>
+            </a:r>
+            <a:r>
+              <a:rPr lang="en-DE" dirty="0">
+                <a:highlight>
+                  <a:srgbClr val="00FFFF"/>
+                </a:highlight>
+              </a:rPr>
+              <a:t> muss nicht </a:t>
+            </a:r>
+            <a:r>
+              <a:rPr lang="en-DE" dirty="0" err="1">
+                <a:highlight>
+                  <a:srgbClr val="00FFFF"/>
+                </a:highlight>
+              </a:rPr>
+              <a:t>nur</a:t>
+            </a:r>
+            <a:r>
+              <a:rPr lang="en-DE" dirty="0">
+                <a:highlight>
+                  <a:srgbClr val="00FFFF"/>
+                </a:highlight>
+              </a:rPr>
+              <a:t> Position, </a:t>
+            </a:r>
+            <a:r>
+              <a:rPr lang="en-DE" dirty="0" err="1">
+                <a:highlight>
+                  <a:srgbClr val="00FFFF"/>
+                </a:highlight>
+              </a:rPr>
+              <a:t>sondern</a:t>
+            </a:r>
+            <a:r>
+              <a:rPr lang="en-DE" dirty="0">
+                <a:highlight>
+                  <a:srgbClr val="00FFFF"/>
+                </a:highlight>
+              </a:rPr>
+              <a:t> </a:t>
+            </a:r>
+            <a:r>
+              <a:rPr lang="en-DE" dirty="0" err="1">
+                <a:highlight>
+                  <a:srgbClr val="00FFFF"/>
+                </a:highlight>
+              </a:rPr>
+              <a:t>auch</a:t>
+            </a:r>
+            <a:r>
+              <a:rPr lang="en-DE" dirty="0">
+                <a:highlight>
+                  <a:srgbClr val="00FFFF"/>
+                </a:highlight>
+              </a:rPr>
+              <a:t> </a:t>
+            </a:r>
+            <a:r>
+              <a:rPr lang="en-DE" b="1" dirty="0" err="1">
+                <a:highlight>
+                  <a:srgbClr val="00FFFF"/>
+                </a:highlight>
+              </a:rPr>
+              <a:t>Haltung</a:t>
+            </a:r>
+            <a:r>
+              <a:rPr lang="en-DE" b="1" dirty="0">
+                <a:highlight>
+                  <a:srgbClr val="00FFFF"/>
+                </a:highlight>
+              </a:rPr>
+              <a:t> &amp; </a:t>
+            </a:r>
+            <a:r>
+              <a:rPr lang="en-DE" b="1" dirty="0" err="1">
+                <a:highlight>
+                  <a:srgbClr val="00FFFF"/>
+                </a:highlight>
+              </a:rPr>
+              <a:t>Bewegungsabsicht</a:t>
+            </a:r>
+            <a:r>
+              <a:rPr lang="en-DE" dirty="0">
+                <a:highlight>
+                  <a:srgbClr val="00FFFF"/>
+                </a:highlight>
+              </a:rPr>
+              <a:t> </a:t>
+            </a:r>
+            <a:r>
+              <a:rPr lang="en-DE" dirty="0" err="1">
+                <a:highlight>
+                  <a:srgbClr val="00FFFF"/>
+                </a:highlight>
+              </a:rPr>
+              <a:t>erfassen</a:t>
+            </a:r>
+            <a:endParaRPr lang="en-DE" dirty="0">
+              <a:highlight>
+                <a:srgbClr val="00FFFF"/>
+              </a:highlight>
+            </a:endParaRPr>
+          </a:p>
+          <a:p>
+            <a:r>
+              <a:rPr lang="en-DE" dirty="0" err="1">
+                <a:highlight>
+                  <a:srgbClr val="00FFFF"/>
+                </a:highlight>
+              </a:rPr>
+              <a:t>Keypoint-basierte</a:t>
+            </a:r>
+            <a:r>
+              <a:rPr lang="en-DE" dirty="0">
+                <a:highlight>
+                  <a:srgbClr val="00FFFF"/>
+                </a:highlight>
+              </a:rPr>
+              <a:t> </a:t>
+            </a:r>
+            <a:r>
+              <a:rPr lang="en-DE" dirty="0" err="1">
+                <a:highlight>
+                  <a:srgbClr val="00FFFF"/>
+                </a:highlight>
+              </a:rPr>
+              <a:t>Körperposen</a:t>
+            </a:r>
+            <a:r>
+              <a:rPr lang="en-DE" dirty="0">
+                <a:highlight>
+                  <a:srgbClr val="00FFFF"/>
+                </a:highlight>
+              </a:rPr>
+              <a:t> </a:t>
+            </a:r>
+            <a:r>
+              <a:rPr lang="en-DE" dirty="0" err="1">
+                <a:highlight>
+                  <a:srgbClr val="00FFFF"/>
+                </a:highlight>
+              </a:rPr>
+              <a:t>ermöglichen</a:t>
+            </a:r>
+            <a:r>
+              <a:rPr lang="en-DE" dirty="0">
+                <a:highlight>
+                  <a:srgbClr val="00FFFF"/>
+                </a:highlight>
+              </a:rPr>
+              <a:t>: </a:t>
+            </a:r>
+          </a:p>
+          <a:p>
+            <a:pPr marL="457200" indent="-457200">
+              <a:buFont typeface="Arial" panose="020B0604020202020204" pitchFamily="34" charset="0"/>
+              <a:buChar char="•"/>
+            </a:pPr>
+            <a:r>
+              <a:rPr lang="en-DE" dirty="0" err="1">
+                <a:highlight>
+                  <a:srgbClr val="00FFFF"/>
+                </a:highlight>
+              </a:rPr>
+              <a:t>vorausschauende</a:t>
+            </a:r>
+            <a:r>
+              <a:rPr lang="en-DE" dirty="0">
+                <a:highlight>
+                  <a:srgbClr val="00FFFF"/>
+                </a:highlight>
+              </a:rPr>
+              <a:t> </a:t>
+            </a:r>
+            <a:r>
+              <a:rPr lang="en-DE" dirty="0" err="1">
+                <a:highlight>
+                  <a:srgbClr val="00FFFF"/>
+                </a:highlight>
+              </a:rPr>
+              <a:t>Bahnplanung</a:t>
+            </a:r>
+            <a:r>
+              <a:rPr lang="en-DE" dirty="0">
+                <a:highlight>
+                  <a:srgbClr val="00FFFF"/>
+                </a:highlight>
+              </a:rPr>
+              <a:t> &amp; </a:t>
+            </a:r>
+            <a:r>
+              <a:rPr lang="en-DE" dirty="0" err="1">
+                <a:highlight>
+                  <a:srgbClr val="00FFFF"/>
+                </a:highlight>
+              </a:rPr>
+              <a:t>Kollisionsvermeidung</a:t>
+            </a:r>
+            <a:endParaRPr lang="en-DE" dirty="0">
+              <a:highlight>
+                <a:srgbClr val="00FFFF"/>
+              </a:highlight>
+            </a:endParaRPr>
+          </a:p>
+          <a:p>
+            <a:pPr marL="457200" indent="-457200">
+              <a:buFont typeface="Arial" panose="020B0604020202020204" pitchFamily="34" charset="0"/>
+              <a:buChar char="•"/>
+            </a:pPr>
+            <a:r>
+              <a:rPr lang="en-DE" dirty="0">
+                <a:highlight>
+                  <a:srgbClr val="00FFFF"/>
+                </a:highlight>
+              </a:rPr>
+              <a:t>Mensch-Roboter-Interaktion (</a:t>
+            </a:r>
+            <a:r>
+              <a:rPr lang="en-DE" dirty="0" err="1">
+                <a:highlight>
+                  <a:srgbClr val="00FFFF"/>
+                </a:highlight>
+              </a:rPr>
+              <a:t>Gestenerkennung</a:t>
+            </a:r>
+            <a:r>
+              <a:rPr lang="en-DE" dirty="0">
+                <a:highlight>
+                  <a:srgbClr val="00FFFF"/>
+                </a:highlight>
+              </a:rPr>
+              <a:t>, </a:t>
+            </a:r>
+            <a:r>
+              <a:rPr lang="en-DE" dirty="0" err="1">
+                <a:highlight>
+                  <a:srgbClr val="00FFFF"/>
+                </a:highlight>
+              </a:rPr>
+              <a:t>Annäherungsposition</a:t>
+            </a:r>
+            <a:r>
+              <a:rPr lang="en-DE" dirty="0">
+                <a:highlight>
+                  <a:srgbClr val="00FFFF"/>
+                </a:highlight>
+              </a:rPr>
+              <a:t>)</a:t>
+            </a:r>
+          </a:p>
+          <a:p>
+            <a:r>
+              <a:rPr lang="en-DE" dirty="0" err="1">
+                <a:highlight>
+                  <a:srgbClr val="00FFFF"/>
+                </a:highlight>
+              </a:rPr>
+              <a:t>Gelöste</a:t>
+            </a:r>
+            <a:r>
+              <a:rPr lang="en-DE" dirty="0">
+                <a:highlight>
+                  <a:srgbClr val="00FFFF"/>
+                </a:highlight>
+              </a:rPr>
+              <a:t> </a:t>
+            </a:r>
+            <a:r>
+              <a:rPr lang="en-DE" dirty="0" err="1">
+                <a:highlight>
+                  <a:srgbClr val="00FFFF"/>
+                </a:highlight>
+              </a:rPr>
+              <a:t>Teilaufgabe</a:t>
+            </a:r>
+            <a:r>
+              <a:rPr lang="en-DE" dirty="0">
+                <a:highlight>
+                  <a:srgbClr val="00FFFF"/>
+                </a:highlight>
+              </a:rPr>
+              <a:t>: </a:t>
+            </a:r>
+            <a:r>
+              <a:rPr lang="en-DE" b="1" dirty="0" err="1">
+                <a:highlight>
+                  <a:srgbClr val="00FFFF"/>
+                </a:highlight>
+              </a:rPr>
+              <a:t>Detektion</a:t>
+            </a:r>
+            <a:r>
+              <a:rPr lang="en-DE" b="1" dirty="0">
+                <a:highlight>
+                  <a:srgbClr val="00FFFF"/>
+                </a:highlight>
+              </a:rPr>
+              <a:t> von </a:t>
+            </a:r>
+            <a:r>
+              <a:rPr lang="en-DE" b="1" dirty="0" err="1">
+                <a:highlight>
+                  <a:srgbClr val="00FFFF"/>
+                </a:highlight>
+              </a:rPr>
+              <a:t>Personen</a:t>
+            </a:r>
+            <a:r>
+              <a:rPr lang="en-DE" b="1" dirty="0">
+                <a:highlight>
+                  <a:srgbClr val="00FFFF"/>
+                </a:highlight>
+              </a:rPr>
+              <a:t> + </a:t>
+            </a:r>
+            <a:r>
+              <a:rPr lang="en-DE" b="1" dirty="0" err="1">
+                <a:highlight>
+                  <a:srgbClr val="00FFFF"/>
+                </a:highlight>
+              </a:rPr>
+              <a:t>Schätzung</a:t>
+            </a:r>
+            <a:r>
+              <a:rPr lang="en-DE" b="1" dirty="0">
+                <a:highlight>
+                  <a:srgbClr val="00FFFF"/>
+                </a:highlight>
+              </a:rPr>
+              <a:t> von 17 Körper-</a:t>
+            </a:r>
+            <a:r>
+              <a:rPr lang="en-DE" b="1" dirty="0" err="1">
+                <a:highlight>
+                  <a:srgbClr val="00FFFF"/>
+                </a:highlight>
+              </a:rPr>
+              <a:t>Keypoints</a:t>
+            </a:r>
+            <a:r>
+              <a:rPr lang="en-DE" b="1" dirty="0">
+                <a:highlight>
+                  <a:srgbClr val="00FFFF"/>
+                </a:highlight>
+              </a:rPr>
+              <a:t> in 2D-Bildern</a:t>
+            </a:r>
+            <a:r>
+              <a:rPr lang="en-DE" dirty="0">
+                <a:highlight>
+                  <a:srgbClr val="00FFFF"/>
+                </a:highlight>
+              </a:rPr>
+              <a:t> </a:t>
+            </a:r>
+            <a:r>
+              <a:rPr lang="en-DE" dirty="0" err="1">
+                <a:highlight>
+                  <a:srgbClr val="00FFFF"/>
+                </a:highlight>
+              </a:rPr>
+              <a:t>mit</a:t>
+            </a:r>
+            <a:r>
+              <a:rPr lang="en-DE" dirty="0">
+                <a:highlight>
+                  <a:srgbClr val="00FFFF"/>
+                </a:highlight>
+              </a:rPr>
+              <a:t> YOLO26-Pose</a:t>
+            </a:r>
+          </a:p>
+          <a:p>
+            <a:endParaRPr lang="en-DE" b="1" dirty="0">
+              <a:highlight>
+                <a:srgbClr val="00FFFF"/>
+              </a:highlight>
+            </a:endParaRPr>
+          </a:p>
+        </p:txBody>
+      </p:sp>
+      <p:sp>
+        <p:nvSpPr>
+          <p:cNvPr id="38" name="Bildplatzhalter 37">
+            <a:extLst>
+              <a:ext uri="{FF2B5EF4-FFF2-40B4-BE49-F238E27FC236}">
+                <a16:creationId xmlns:a16="http://schemas.microsoft.com/office/drawing/2014/main" id="{8EC6961F-AACA-42A2-BB4B-DE2EB6243749}"/>
+              </a:ext>
+            </a:extLst>
+          </p:cNvPr>
+          <p:cNvSpPr>
+            <a:spLocks noGrp="1"/>
+          </p:cNvSpPr>
+          <p:nvPr>
+            <p:ph type="pic" sz="quarter" idx="47"/>
+          </p:nvPr>
+        </p:nvSpPr>
         <p:spPr/>
         <p:txBody>
           <a:bodyPr/>
           <a:lstStyle/>
           <a:p>
-            <a:endParaRPr lang="de-DE" dirty="0"/>
-          </a:p>
-        </p:txBody>
-      </p:sp>
-      <p:sp>
-        <p:nvSpPr>
-          <p:cNvPr id="33" name="Textplatzhalter 32">
-            <a:extLst>
-              <a:ext uri="{FF2B5EF4-FFF2-40B4-BE49-F238E27FC236}">
-                <a16:creationId xmlns:a16="http://schemas.microsoft.com/office/drawing/2014/main" id="{442DFBEA-B542-4185-90BE-BDEC8C715C60}"/>
-              </a:ext>
-            </a:extLst>
-          </p:cNvPr>
-          <p:cNvSpPr>
-            <a:spLocks noGrp="1"/>
-          </p:cNvSpPr>
-          <p:nvPr>
-            <p:ph type="body" sz="quarter" idx="27"/>
-          </p:nvPr>
-        </p:nvSpPr>
-        <p:spPr/>
+            <a:r>
+              <a:rPr lang="en-US" b="1" dirty="0" err="1"/>
+              <a:t>Gesamtarchitektur</a:t>
+            </a:r>
+            <a:endParaRPr lang="en-DE" b="1" dirty="0"/>
+          </a:p>
+        </p:txBody>
+      </p:sp>
+      <p:sp>
+        <p:nvSpPr>
+          <p:cNvPr id="39" name="Bildplatzhalter 38">
+            <a:extLst>
+              <a:ext uri="{FF2B5EF4-FFF2-40B4-BE49-F238E27FC236}">
+                <a16:creationId xmlns:a16="http://schemas.microsoft.com/office/drawing/2014/main" id="{9B8E2267-F344-4AC7-A939-1FC3C2E407A9}"/>
+              </a:ext>
+            </a:extLst>
+          </p:cNvPr>
+          <p:cNvSpPr>
+            <a:spLocks noGrp="1"/>
+          </p:cNvSpPr>
+          <p:nvPr>
+            <p:ph type="pic" sz="quarter" idx="48"/>
+          </p:nvPr>
+        </p:nvSpPr>
+        <p:spPr>
+          <a:xfrm>
+            <a:off x="20243799" y="12241212"/>
+            <a:ext cx="8472488" cy="14276387"/>
+          </a:xfrm>
+        </p:spPr>
         <p:txBody>
           <a:bodyPr/>
           <a:lstStyle/>
           <a:p>
             <a:r>
-              <a:rPr lang="de-DE" b="1" dirty="0"/>
-              <a:t>Analyse der Lösung</a:t>
-            </a:r>
-          </a:p>
-        </p:txBody>
-      </p:sp>
-      <p:sp>
-        <p:nvSpPr>
-          <p:cNvPr id="35" name="Bildplatzhalter 34">
-            <a:extLst>
-              <a:ext uri="{FF2B5EF4-FFF2-40B4-BE49-F238E27FC236}">
-                <a16:creationId xmlns:a16="http://schemas.microsoft.com/office/drawing/2014/main" id="{503456D7-DDF4-4275-B7AD-C952118E96B6}"/>
-              </a:ext>
-            </a:extLst>
-          </p:cNvPr>
-          <p:cNvSpPr>
-            <a:spLocks noGrp="1"/>
-          </p:cNvSpPr>
-          <p:nvPr>
-            <p:ph type="pic" sz="quarter" idx="33"/>
-          </p:nvPr>
-        </p:nvSpPr>
-        <p:spPr/>
-      </p:sp>
-      <p:sp>
-        <p:nvSpPr>
-          <p:cNvPr id="36" name="Bildplatzhalter 35">
-            <a:extLst>
-              <a:ext uri="{FF2B5EF4-FFF2-40B4-BE49-F238E27FC236}">
-                <a16:creationId xmlns:a16="http://schemas.microsoft.com/office/drawing/2014/main" id="{194BDEBF-E576-487D-A72A-2FBE11E285E6}"/>
-              </a:ext>
-            </a:extLst>
-          </p:cNvPr>
-          <p:cNvSpPr>
-            <a:spLocks noGrp="1"/>
-          </p:cNvSpPr>
-          <p:nvPr>
-            <p:ph type="pic" sz="quarter" idx="35"/>
-          </p:nvPr>
-        </p:nvSpPr>
-        <p:spPr/>
-      </p:sp>
-      <p:sp>
-        <p:nvSpPr>
-          <p:cNvPr id="37" name="Textplatzhalter 36">
-            <a:extLst>
-              <a:ext uri="{FF2B5EF4-FFF2-40B4-BE49-F238E27FC236}">
-                <a16:creationId xmlns:a16="http://schemas.microsoft.com/office/drawing/2014/main" id="{80C8F649-C829-4514-8F74-72FDE8E3F2F3}"/>
-              </a:ext>
-            </a:extLst>
-          </p:cNvPr>
-          <p:cNvSpPr>
-            <a:spLocks noGrp="1"/>
-          </p:cNvSpPr>
-          <p:nvPr>
-            <p:ph type="body" sz="quarter" idx="36"/>
-          </p:nvPr>
-        </p:nvSpPr>
-        <p:spPr/>
+              <a:rPr lang="en-DE" b="1" dirty="0"/>
+              <a:t>Training</a:t>
+            </a:r>
+          </a:p>
+          <a:p>
+            <a:r>
+              <a:rPr lang="en-DE" b="1" dirty="0" err="1"/>
+              <a:t>Datensatz</a:t>
+            </a:r>
+            <a:r>
+              <a:rPr lang="en-DE" b="1" dirty="0"/>
+              <a:t>:</a:t>
+            </a:r>
+            <a:r>
+              <a:rPr lang="en-DE" dirty="0"/>
+              <a:t> COCO-Pose (COCO </a:t>
+            </a:r>
+            <a:r>
+              <a:rPr lang="en-DE" dirty="0" err="1"/>
+              <a:t>Keypoints</a:t>
+            </a:r>
+            <a:r>
+              <a:rPr lang="en-DE" dirty="0"/>
+              <a:t> 2017), </a:t>
+            </a:r>
+            <a:r>
+              <a:rPr lang="en-DE" dirty="0" err="1"/>
+              <a:t>nur</a:t>
+            </a:r>
+            <a:r>
+              <a:rPr lang="en-DE" dirty="0"/>
+              <a:t> Klasse „Person", pro Person: Bounding Box + 17 </a:t>
+            </a:r>
+            <a:r>
+              <a:rPr lang="en-DE" dirty="0" err="1"/>
+              <a:t>Keypoints</a:t>
+            </a:r>
+            <a:endParaRPr lang="en-DE" dirty="0"/>
+          </a:p>
+          <a:p>
+            <a:r>
+              <a:rPr lang="en-DE" b="1" dirty="0"/>
+              <a:t>Label-Format (YOLO-Pose, </a:t>
+            </a:r>
+            <a:r>
+              <a:rPr lang="en-DE" b="1" dirty="0" err="1"/>
+              <a:t>normiert</a:t>
+            </a:r>
+            <a:r>
+              <a:rPr lang="en-DE" b="1" dirty="0"/>
+              <a:t>):</a:t>
+            </a:r>
+            <a:endParaRPr lang="en-DE" dirty="0"/>
+          </a:p>
+          <a:p>
+            <a:r>
+              <a:rPr lang="en-DE" dirty="0"/>
+              <a:t>class, </a:t>
+            </a:r>
+            <a:r>
+              <a:rPr lang="en-DE" dirty="0" err="1"/>
+              <a:t>x_c</a:t>
+            </a:r>
+            <a:r>
+              <a:rPr lang="en-DE" dirty="0"/>
+              <a:t>, </a:t>
+            </a:r>
+            <a:r>
+              <a:rPr lang="en-DE" dirty="0" err="1"/>
+              <a:t>y_c</a:t>
+            </a:r>
+            <a:r>
+              <a:rPr lang="en-DE" dirty="0"/>
+              <a:t>, w, h, x₁, y₁, v₁, …, x₁₇, y₁₇, v₁₇</a:t>
+            </a:r>
+          </a:p>
+          <a:p>
+            <a:r>
+              <a:rPr lang="en-DE" b="1" dirty="0" err="1"/>
+              <a:t>Gesamtverlustfunktion</a:t>
+            </a:r>
+            <a:r>
+              <a:rPr lang="en-DE" b="1" dirty="0"/>
+              <a:t>:</a:t>
+            </a:r>
+            <a:endParaRPr lang="en-DE" dirty="0"/>
+          </a:p>
+          <a:p>
+            <a:r>
+              <a:rPr lang="en-DE" dirty="0" err="1"/>
+              <a:t>L_total</a:t>
+            </a:r>
+            <a:r>
+              <a:rPr lang="en-DE" dirty="0"/>
+              <a:t> = </a:t>
+            </a:r>
+            <a:r>
+              <a:rPr lang="en-DE" dirty="0" err="1"/>
+              <a:t>λ_box·L_box</a:t>
+            </a:r>
+            <a:r>
+              <a:rPr lang="en-DE" dirty="0"/>
+              <a:t> + </a:t>
+            </a:r>
+            <a:r>
+              <a:rPr lang="en-DE" dirty="0" err="1"/>
+              <a:t>λ_cls·L_cls</a:t>
+            </a:r>
+            <a:r>
+              <a:rPr lang="en-DE" dirty="0"/>
+              <a:t> + </a:t>
+            </a:r>
+            <a:r>
+              <a:rPr lang="en-DE" dirty="0" err="1"/>
+              <a:t>λ_pose·L_pose</a:t>
+            </a:r>
+            <a:r>
+              <a:rPr lang="en-DE" dirty="0"/>
+              <a:t> + </a:t>
+            </a:r>
+            <a:r>
+              <a:rPr lang="en-DE" dirty="0" err="1"/>
+              <a:t>λ_kobj·L_kobj</a:t>
+            </a:r>
+            <a:r>
+              <a:rPr lang="en-DE" dirty="0"/>
+              <a:t> + </a:t>
+            </a:r>
+            <a:r>
+              <a:rPr lang="en-DE" dirty="0" err="1"/>
+              <a:t>λ_RLE·L_RLE</a:t>
+            </a:r>
+            <a:endParaRPr lang="en-DE" dirty="0"/>
+          </a:p>
+          <a:p>
+            <a:r>
+              <a:rPr lang="en-DE" b="1" dirty="0" err="1"/>
+              <a:t>L_pose</a:t>
+            </a:r>
+            <a:r>
+              <a:rPr lang="en-DE" b="1" dirty="0"/>
+              <a:t>:</a:t>
+            </a:r>
+            <a:r>
+              <a:rPr lang="en-DE" dirty="0"/>
+              <a:t> </a:t>
+            </a:r>
+            <a:r>
+              <a:rPr lang="en-DE" dirty="0" err="1"/>
+              <a:t>quadratische</a:t>
+            </a:r>
+            <a:r>
+              <a:rPr lang="en-DE" dirty="0"/>
+              <a:t> </a:t>
+            </a:r>
+            <a:r>
+              <a:rPr lang="en-DE" dirty="0" err="1"/>
+              <a:t>Keypoint-Distanz</a:t>
+            </a:r>
+            <a:r>
+              <a:rPr lang="en-DE" dirty="0"/>
+              <a:t>, </a:t>
+            </a:r>
+            <a:r>
+              <a:rPr lang="en-DE" dirty="0" err="1"/>
+              <a:t>skaliert</a:t>
+            </a:r>
+            <a:r>
+              <a:rPr lang="en-DE" dirty="0"/>
+              <a:t> </a:t>
+            </a:r>
+            <a:r>
+              <a:rPr lang="en-DE" dirty="0" err="1"/>
+              <a:t>nach</a:t>
+            </a:r>
+            <a:r>
+              <a:rPr lang="en-DE" dirty="0"/>
+              <a:t> </a:t>
+            </a:r>
+            <a:r>
+              <a:rPr lang="en-DE" dirty="0" err="1"/>
+              <a:t>Objektgröße</a:t>
+            </a:r>
+            <a:r>
+              <a:rPr lang="en-DE" dirty="0"/>
+              <a:t> &amp; </a:t>
+            </a:r>
+            <a:r>
+              <a:rPr lang="en-DE" dirty="0" err="1"/>
+              <a:t>Keypoint-Gewichtung</a:t>
+            </a:r>
+            <a:endParaRPr lang="en-DE" dirty="0"/>
+          </a:p>
+          <a:p>
+            <a:r>
+              <a:rPr lang="en-DE" b="1" dirty="0" err="1"/>
+              <a:t>L_kobj</a:t>
+            </a:r>
+            <a:r>
+              <a:rPr lang="en-DE" b="1" dirty="0"/>
+              <a:t>:</a:t>
+            </a:r>
+            <a:r>
+              <a:rPr lang="en-DE" dirty="0"/>
+              <a:t> </a:t>
+            </a:r>
+            <a:r>
+              <a:rPr lang="en-DE" dirty="0" err="1"/>
+              <a:t>Sichtbarkeit</a:t>
+            </a:r>
+            <a:r>
+              <a:rPr lang="en-DE" dirty="0"/>
+              <a:t> der </a:t>
+            </a:r>
+            <a:r>
+              <a:rPr lang="en-DE" dirty="0" err="1"/>
+              <a:t>Keypoints</a:t>
+            </a:r>
+            <a:endParaRPr lang="en-DE" dirty="0"/>
+          </a:p>
+          <a:p>
+            <a:r>
+              <a:rPr lang="en-DE" b="1" dirty="0"/>
+              <a:t>L_RLE (neu in YOLO26):</a:t>
+            </a:r>
+            <a:r>
+              <a:rPr lang="en-DE" dirty="0"/>
+              <a:t> Residual Log-Likelihood Estimation → </a:t>
+            </a:r>
+            <a:r>
+              <a:rPr lang="en-DE" dirty="0" err="1"/>
+              <a:t>berücksichtigt</a:t>
+            </a:r>
+            <a:r>
+              <a:rPr lang="en-DE" dirty="0"/>
+              <a:t> </a:t>
+            </a:r>
+            <a:r>
+              <a:rPr lang="en-DE" dirty="0" err="1"/>
+              <a:t>Lokalisierungs-Unsicherheit</a:t>
+            </a:r>
+            <a:endParaRPr lang="en-DE" dirty="0"/>
+          </a:p>
+          <a:p>
+            <a:r>
+              <a:rPr lang="en-DE" b="1" dirty="0"/>
+              <a:t>YOLO26-spezifisch:</a:t>
+            </a:r>
+            <a:endParaRPr lang="en-DE" dirty="0"/>
+          </a:p>
+          <a:p>
+            <a:r>
+              <a:rPr lang="en-DE" dirty="0" err="1"/>
+              <a:t>Verzicht</a:t>
+            </a:r>
+            <a:r>
+              <a:rPr lang="en-DE" dirty="0"/>
+              <a:t> auf DFL → </a:t>
+            </a:r>
+            <a:r>
+              <a:rPr lang="en-DE" dirty="0" err="1"/>
+              <a:t>vereinfachte</a:t>
+            </a:r>
+            <a:r>
+              <a:rPr lang="en-DE" dirty="0"/>
+              <a:t> Box-Regression</a:t>
+            </a:r>
+          </a:p>
+          <a:p>
+            <a:r>
+              <a:rPr lang="en-DE" b="1" dirty="0" err="1"/>
+              <a:t>ProgLoss</a:t>
+            </a:r>
+            <a:r>
+              <a:rPr lang="en-DE" b="1" dirty="0"/>
+              <a:t>:</a:t>
+            </a:r>
+            <a:r>
+              <a:rPr lang="en-DE" dirty="0"/>
+              <a:t> </a:t>
+            </a:r>
+            <a:r>
+              <a:rPr lang="en-DE" dirty="0" err="1"/>
+              <a:t>Gewichtung</a:t>
+            </a:r>
+            <a:r>
+              <a:rPr lang="en-DE" dirty="0"/>
+              <a:t> </a:t>
+            </a:r>
+            <a:r>
+              <a:rPr lang="en-DE" dirty="0" err="1"/>
+              <a:t>verschiebt</a:t>
+            </a:r>
+            <a:r>
+              <a:rPr lang="en-DE" dirty="0"/>
+              <a:t> </a:t>
+            </a:r>
+            <a:r>
+              <a:rPr lang="en-DE" dirty="0" err="1"/>
+              <a:t>sich</a:t>
+            </a:r>
+            <a:r>
+              <a:rPr lang="en-DE" dirty="0"/>
+              <a:t> </a:t>
+            </a:r>
+            <a:r>
+              <a:rPr lang="en-DE" dirty="0" err="1"/>
+              <a:t>zum</a:t>
+            </a:r>
+            <a:r>
+              <a:rPr lang="en-DE" dirty="0"/>
+              <a:t> </a:t>
+            </a:r>
+            <a:r>
+              <a:rPr lang="en-DE" dirty="0" err="1"/>
+              <a:t>Inferenzpfad</a:t>
+            </a:r>
+            <a:endParaRPr lang="en-DE" dirty="0"/>
+          </a:p>
+          <a:p>
+            <a:r>
+              <a:rPr lang="en-DE" b="1" dirty="0"/>
+              <a:t>STAL:</a:t>
+            </a:r>
+            <a:r>
+              <a:rPr lang="en-DE" dirty="0"/>
+              <a:t> </a:t>
+            </a:r>
+            <a:r>
+              <a:rPr lang="en-DE" dirty="0" err="1"/>
+              <a:t>bessere</a:t>
+            </a:r>
+            <a:r>
+              <a:rPr lang="en-DE" dirty="0"/>
+              <a:t> </a:t>
+            </a:r>
+            <a:r>
+              <a:rPr lang="en-DE" dirty="0" err="1"/>
+              <a:t>Zuordnung</a:t>
+            </a:r>
+            <a:r>
+              <a:rPr lang="en-DE" dirty="0"/>
+              <a:t> </a:t>
+            </a:r>
+            <a:r>
+              <a:rPr lang="en-DE" dirty="0" err="1"/>
+              <a:t>positiver</a:t>
+            </a:r>
+            <a:r>
+              <a:rPr lang="en-DE" dirty="0"/>
+              <a:t> Samples → </a:t>
+            </a:r>
+            <a:r>
+              <a:rPr lang="en-DE" dirty="0" err="1"/>
+              <a:t>kleine</a:t>
+            </a:r>
+            <a:r>
+              <a:rPr lang="en-DE" dirty="0"/>
+              <a:t> </a:t>
+            </a:r>
+            <a:r>
+              <a:rPr lang="en-DE" dirty="0" err="1"/>
+              <a:t>Objekte</a:t>
+            </a:r>
+            <a:endParaRPr lang="en-DE" dirty="0"/>
+          </a:p>
+          <a:p>
+            <a:r>
+              <a:rPr lang="en-DE" dirty="0" err="1"/>
+              <a:t>Optimierer</a:t>
+            </a:r>
+            <a:r>
+              <a:rPr lang="en-DE" dirty="0"/>
+              <a:t>: </a:t>
+            </a:r>
+            <a:r>
+              <a:rPr lang="en-DE" b="1" dirty="0" err="1"/>
+              <a:t>MuSGD</a:t>
+            </a:r>
+            <a:r>
+              <a:rPr lang="en-DE" dirty="0"/>
+              <a:t> (SGD + Muon)</a:t>
+            </a:r>
+          </a:p>
+          <a:p>
+            <a:endParaRPr lang="en-DE" dirty="0"/>
+          </a:p>
+        </p:txBody>
+      </p:sp>
+      <p:sp>
+        <p:nvSpPr>
+          <p:cNvPr id="40" name="Textplatzhalter 39">
+            <a:extLst>
+              <a:ext uri="{FF2B5EF4-FFF2-40B4-BE49-F238E27FC236}">
+                <a16:creationId xmlns:a16="http://schemas.microsoft.com/office/drawing/2014/main" id="{485B190A-D15B-403F-995A-1487C63CCEB7}"/>
+              </a:ext>
+            </a:extLst>
+          </p:cNvPr>
+          <p:cNvSpPr>
+            <a:spLocks noGrp="1"/>
+          </p:cNvSpPr>
+          <p:nvPr>
+            <p:ph type="body" sz="quarter" idx="49"/>
+          </p:nvPr>
+        </p:nvSpPr>
+        <p:spPr>
+          <a:xfrm>
+            <a:off x="10914063" y="20657968"/>
+            <a:ext cx="8472488" cy="11174770"/>
+          </a:xfrm>
+        </p:spPr>
         <p:txBody>
           <a:bodyPr/>
           <a:lstStyle/>
           <a:p>
             <a:r>
-              <a:rPr lang="de-DE" dirty="0"/>
-              <a:t>Abbildung 1: Unterschrift</a:t>
-            </a:r>
-          </a:p>
-        </p:txBody>
-      </p:sp>
-      <p:sp>
-        <p:nvSpPr>
-          <p:cNvPr id="38" name="Bildplatzhalter 37">
-            <a:extLst>
-              <a:ext uri="{FF2B5EF4-FFF2-40B4-BE49-F238E27FC236}">
-                <a16:creationId xmlns:a16="http://schemas.microsoft.com/office/drawing/2014/main" id="{8EC6961F-AACA-42A2-BB4B-DE2EB6243749}"/>
-              </a:ext>
-            </a:extLst>
-          </p:cNvPr>
-          <p:cNvSpPr>
-            <a:spLocks noGrp="1"/>
-          </p:cNvSpPr>
-          <p:nvPr>
-            <p:ph type="pic" sz="quarter" idx="47"/>
-          </p:nvPr>
-        </p:nvSpPr>
-        <p:spPr/>
-      </p:sp>
-      <p:sp>
-        <p:nvSpPr>
-          <p:cNvPr id="39" name="Bildplatzhalter 38">
-            <a:extLst>
-              <a:ext uri="{FF2B5EF4-FFF2-40B4-BE49-F238E27FC236}">
-                <a16:creationId xmlns:a16="http://schemas.microsoft.com/office/drawing/2014/main" id="{9B8E2267-F344-4AC7-A939-1FC3C2E407A9}"/>
-              </a:ext>
-            </a:extLst>
-          </p:cNvPr>
-          <p:cNvSpPr>
-            <a:spLocks noGrp="1"/>
-          </p:cNvSpPr>
-          <p:nvPr>
-            <p:ph type="pic" sz="quarter" idx="48"/>
-          </p:nvPr>
-        </p:nvSpPr>
-        <p:spPr/>
-      </p:sp>
-      <p:sp>
-        <p:nvSpPr>
-          <p:cNvPr id="40" name="Textplatzhalter 39">
-            <a:extLst>
-              <a:ext uri="{FF2B5EF4-FFF2-40B4-BE49-F238E27FC236}">
-                <a16:creationId xmlns:a16="http://schemas.microsoft.com/office/drawing/2014/main" id="{485B190A-D15B-403F-995A-1487C63CCEB7}"/>
-              </a:ext>
-            </a:extLst>
-          </p:cNvPr>
-          <p:cNvSpPr>
-            <a:spLocks noGrp="1"/>
-          </p:cNvSpPr>
-          <p:nvPr>
-            <p:ph type="body" sz="quarter" idx="49"/>
-          </p:nvPr>
-        </p:nvSpPr>
-        <p:spPr/>
-        <p:txBody>
-          <a:bodyPr/>
-          <a:lstStyle/>
-          <a:p>
-            <a:endParaRPr lang="de-DE" dirty="0"/>
-          </a:p>
-        </p:txBody>
-      </p:sp>
-      <p:sp>
-        <p:nvSpPr>
-          <p:cNvPr id="41" name="Textplatzhalter 40">
-            <a:extLst>
-              <a:ext uri="{FF2B5EF4-FFF2-40B4-BE49-F238E27FC236}">
-                <a16:creationId xmlns:a16="http://schemas.microsoft.com/office/drawing/2014/main" id="{393C951C-7C64-4C17-91D2-DA5E67AE35EC}"/>
-              </a:ext>
-            </a:extLst>
-          </p:cNvPr>
-          <p:cNvSpPr>
-            <a:spLocks noGrp="1"/>
-          </p:cNvSpPr>
-          <p:nvPr>
-            <p:ph type="body" sz="quarter" idx="50"/>
-          </p:nvPr>
-        </p:nvSpPr>
-        <p:spPr/>
-        <p:txBody>
-          <a:bodyPr/>
-          <a:lstStyle/>
-          <a:p>
-            <a:endParaRPr lang="de-DE"/>
+              <a:rPr lang="en-DE" b="1" dirty="0" err="1">
+                <a:highlight>
+                  <a:srgbClr val="FFFF00"/>
+                </a:highlight>
+              </a:rPr>
+              <a:t>Zentrale</a:t>
+            </a:r>
+            <a:r>
+              <a:rPr lang="en-DE" b="1" dirty="0">
+                <a:highlight>
+                  <a:srgbClr val="FFFF00"/>
+                </a:highlight>
+              </a:rPr>
+              <a:t> </a:t>
+            </a:r>
+            <a:r>
+              <a:rPr lang="en-DE" b="1" dirty="0" err="1">
+                <a:highlight>
+                  <a:srgbClr val="FFFF00"/>
+                </a:highlight>
+              </a:rPr>
+              <a:t>Bausteine</a:t>
+            </a:r>
+            <a:endParaRPr lang="vi-VN" b="1" dirty="0">
+              <a:highlight>
+                <a:srgbClr val="FFFF00"/>
+              </a:highlight>
+            </a:endParaRPr>
+          </a:p>
+          <a:p>
+            <a:r>
+              <a:rPr lang="en-DE" b="1" dirty="0">
+                <a:highlight>
+                  <a:srgbClr val="FFFF00"/>
+                </a:highlight>
+              </a:rPr>
+              <a:t>Conv-Block</a:t>
+            </a:r>
+            <a:r>
+              <a:rPr lang="en-DE" b="1" dirty="0"/>
+              <a:t>:</a:t>
+            </a:r>
+            <a:r>
+              <a:rPr lang="en-DE" dirty="0"/>
+              <a:t> Conv2d → BatchNorm2d → </a:t>
+            </a:r>
+            <a:r>
+              <a:rPr lang="en-DE" dirty="0" err="1"/>
+              <a:t>SiLU</a:t>
+            </a:r>
+            <a:endParaRPr lang="en-DE" dirty="0"/>
+          </a:p>
+          <a:p>
+            <a:r>
+              <a:rPr lang="en-DE" dirty="0" err="1"/>
+              <a:t>lernbare</a:t>
+            </a:r>
+            <a:r>
+              <a:rPr lang="en-DE" dirty="0"/>
+              <a:t> </a:t>
+            </a:r>
+            <a:r>
+              <a:rPr lang="en-DE" dirty="0" err="1"/>
+              <a:t>Filterkerne</a:t>
+            </a:r>
+            <a:r>
+              <a:rPr lang="en-DE" dirty="0"/>
+              <a:t> </a:t>
+            </a:r>
+            <a:r>
+              <a:rPr lang="en-DE" dirty="0" err="1"/>
+              <a:t>extrahieren</a:t>
+            </a:r>
+            <a:r>
+              <a:rPr lang="en-DE" dirty="0"/>
+              <a:t> </a:t>
+            </a:r>
+            <a:r>
+              <a:rPr lang="en-DE" dirty="0" err="1"/>
+              <a:t>lokale</a:t>
+            </a:r>
+            <a:r>
+              <a:rPr lang="en-DE" dirty="0"/>
+              <a:t> </a:t>
+            </a:r>
+            <a:r>
+              <a:rPr lang="en-DE" dirty="0" err="1"/>
+              <a:t>Merkmale</a:t>
+            </a:r>
+            <a:r>
+              <a:rPr lang="en-DE" dirty="0"/>
+              <a:t> (Kanten → </a:t>
+            </a:r>
+            <a:r>
+              <a:rPr lang="en-DE" dirty="0" err="1"/>
+              <a:t>abstrakte</a:t>
+            </a:r>
+            <a:r>
+              <a:rPr lang="en-DE" dirty="0"/>
+              <a:t> </a:t>
+            </a:r>
+            <a:r>
+              <a:rPr lang="en-DE" dirty="0" err="1"/>
+              <a:t>Strukturen</a:t>
+            </a:r>
+            <a:r>
+              <a:rPr lang="en-DE" dirty="0"/>
+              <a:t>)</a:t>
+            </a:r>
+          </a:p>
+          <a:p>
+            <a:r>
+              <a:rPr lang="en-DE" dirty="0"/>
+              <a:t>k=3×3, s=2, p=1 → </a:t>
+            </a:r>
+            <a:r>
+              <a:rPr lang="en-DE" dirty="0" err="1"/>
+              <a:t>halbiert</a:t>
+            </a:r>
+            <a:r>
+              <a:rPr lang="en-DE" dirty="0"/>
+              <a:t> die </a:t>
+            </a:r>
+            <a:r>
+              <a:rPr lang="en-DE" dirty="0" err="1"/>
+              <a:t>Auflösung</a:t>
+            </a:r>
+            <a:endParaRPr lang="en-US" dirty="0"/>
+          </a:p>
+          <a:p>
+            <a:endParaRPr lang="en-DE" dirty="0"/>
+          </a:p>
+          <a:p>
+            <a:r>
+              <a:rPr lang="en-DE" b="1" dirty="0">
+                <a:highlight>
+                  <a:srgbClr val="FFFF00"/>
+                </a:highlight>
+              </a:rPr>
+              <a:t>C3k2-Block</a:t>
+            </a:r>
+            <a:r>
+              <a:rPr lang="en-DE" b="1" dirty="0"/>
+              <a:t>:</a:t>
+            </a:r>
+            <a:r>
+              <a:rPr lang="en-DE" dirty="0"/>
+              <a:t> Cross Stage Partial Connections</a:t>
+            </a:r>
+          </a:p>
+          <a:p>
+            <a:r>
+              <a:rPr lang="en-DE" dirty="0"/>
+              <a:t>Split in </a:t>
+            </a:r>
+            <a:r>
+              <a:rPr lang="en-DE" dirty="0" err="1"/>
+              <a:t>Teilpfade</a:t>
+            </a:r>
+            <a:r>
+              <a:rPr lang="en-DE" dirty="0"/>
+              <a:t>: </a:t>
+            </a:r>
+            <a:r>
+              <a:rPr lang="en-DE" dirty="0" err="1"/>
+              <a:t>ein</a:t>
+            </a:r>
+            <a:r>
+              <a:rPr lang="en-DE" dirty="0"/>
+              <a:t> Teil </a:t>
+            </a:r>
+            <a:r>
+              <a:rPr lang="en-DE" dirty="0" err="1"/>
+              <a:t>direkt</a:t>
+            </a:r>
+            <a:r>
+              <a:rPr lang="en-DE" dirty="0"/>
+              <a:t>, </a:t>
+            </a:r>
+            <a:r>
+              <a:rPr lang="en-DE" dirty="0" err="1"/>
+              <a:t>ein</a:t>
+            </a:r>
+            <a:r>
+              <a:rPr lang="en-DE" dirty="0"/>
+              <a:t> Teil </a:t>
+            </a:r>
+            <a:r>
+              <a:rPr lang="en-DE" dirty="0" err="1"/>
+              <a:t>durch</a:t>
+            </a:r>
+            <a:r>
+              <a:rPr lang="en-DE" dirty="0"/>
+              <a:t> Bottleneck-</a:t>
+            </a:r>
+            <a:r>
+              <a:rPr lang="en-DE" dirty="0" err="1"/>
+              <a:t>Blöcke</a:t>
+            </a:r>
+            <a:r>
+              <a:rPr lang="en-DE" dirty="0"/>
+              <a:t> → </a:t>
+            </a:r>
+            <a:r>
+              <a:rPr lang="en-DE" dirty="0" err="1"/>
+              <a:t>Concat</a:t>
+            </a:r>
+            <a:r>
+              <a:rPr lang="en-DE" dirty="0"/>
+              <a:t> → 1×1-Faltung</a:t>
+            </a:r>
+          </a:p>
+          <a:p>
+            <a:r>
+              <a:rPr lang="en-DE" dirty="0" err="1"/>
+              <a:t>Merkmalsverfeinerung</a:t>
+            </a:r>
+            <a:r>
+              <a:rPr lang="en-DE" dirty="0"/>
+              <a:t> </a:t>
+            </a:r>
+            <a:r>
+              <a:rPr lang="en-DE" dirty="0" err="1"/>
+              <a:t>bei</a:t>
+            </a:r>
+            <a:r>
+              <a:rPr lang="en-DE" dirty="0"/>
+              <a:t> </a:t>
+            </a:r>
+            <a:r>
+              <a:rPr lang="en-DE" dirty="0" err="1"/>
+              <a:t>gleichbleibender</a:t>
+            </a:r>
+            <a:r>
+              <a:rPr lang="en-DE" dirty="0"/>
+              <a:t> </a:t>
+            </a:r>
+            <a:r>
+              <a:rPr lang="en-DE" dirty="0" err="1"/>
+              <a:t>Auflösung</a:t>
+            </a:r>
+            <a:endParaRPr lang="en-DE" dirty="0"/>
+          </a:p>
+          <a:p>
+            <a:r>
+              <a:rPr lang="en-DE" b="1" dirty="0">
+                <a:highlight>
+                  <a:srgbClr val="FFFF00"/>
+                </a:highlight>
+              </a:rPr>
+              <a:t>SPPF:</a:t>
+            </a:r>
+            <a:r>
+              <a:rPr lang="en-DE" dirty="0">
+                <a:highlight>
+                  <a:srgbClr val="FFFF00"/>
+                </a:highlight>
+              </a:rPr>
+              <a:t> </a:t>
+            </a:r>
+            <a:r>
+              <a:rPr lang="en-DE" dirty="0"/>
+              <a:t>3× </a:t>
+            </a:r>
+            <a:r>
+              <a:rPr lang="en-DE" dirty="0" err="1"/>
+              <a:t>MaxPooling</a:t>
+            </a:r>
+            <a:r>
+              <a:rPr lang="en-DE" dirty="0"/>
+              <a:t> 5×5 (s=1) </a:t>
+            </a:r>
+            <a:r>
+              <a:rPr lang="en-DE" dirty="0" err="1"/>
+              <a:t>hintereinander</a:t>
+            </a:r>
+            <a:r>
+              <a:rPr lang="en-DE" dirty="0"/>
+              <a:t> → </a:t>
+            </a:r>
+            <a:r>
+              <a:rPr lang="en-DE" dirty="0" err="1"/>
+              <a:t>effektive</a:t>
+            </a:r>
+            <a:r>
+              <a:rPr lang="en-DE" dirty="0"/>
+              <a:t> </a:t>
+            </a:r>
+            <a:r>
+              <a:rPr lang="en-DE" dirty="0" err="1"/>
+              <a:t>Kontextbereiche</a:t>
+            </a:r>
+            <a:r>
+              <a:rPr lang="en-DE" dirty="0"/>
+              <a:t> 5×5, 9×9, 13×13 → </a:t>
+            </a:r>
+            <a:r>
+              <a:rPr lang="en-DE" dirty="0" err="1"/>
+              <a:t>Concat</a:t>
+            </a:r>
+            <a:r>
+              <a:rPr lang="en-DE" dirty="0"/>
+              <a:t> + Shortcut</a:t>
+            </a:r>
+          </a:p>
+          <a:p>
+            <a:r>
+              <a:rPr lang="en-DE" b="1" dirty="0">
+                <a:highlight>
+                  <a:srgbClr val="FFFF00"/>
+                </a:highlight>
+              </a:rPr>
+              <a:t>C2PSA:</a:t>
+            </a:r>
+            <a:r>
+              <a:rPr lang="en-DE" dirty="0">
+                <a:highlight>
+                  <a:srgbClr val="FFFF00"/>
+                </a:highlight>
+              </a:rPr>
+              <a:t> </a:t>
+            </a:r>
+            <a:r>
+              <a:rPr lang="en-DE" dirty="0"/>
+              <a:t>Cross-Stage Partial </a:t>
+            </a:r>
+            <a:r>
+              <a:rPr lang="en-DE" b="1" dirty="0"/>
+              <a:t>Spatial Attention</a:t>
+            </a:r>
+            <a:endParaRPr lang="en-DE" dirty="0"/>
+          </a:p>
+          <a:p>
+            <a:r>
+              <a:rPr lang="en-DE" dirty="0"/>
+              <a:t>PSA-</a:t>
+            </a:r>
+            <a:r>
+              <a:rPr lang="en-DE" dirty="0" err="1"/>
+              <a:t>Unterblöcke</a:t>
+            </a:r>
+            <a:r>
+              <a:rPr lang="en-DE" dirty="0"/>
+              <a:t> </a:t>
+            </a:r>
+            <a:r>
+              <a:rPr lang="en-DE" dirty="0" err="1"/>
+              <a:t>mit</a:t>
+            </a:r>
+            <a:r>
+              <a:rPr lang="en-DE" dirty="0"/>
+              <a:t> Self-Attention → </a:t>
+            </a:r>
+            <a:r>
+              <a:rPr lang="en-DE" dirty="0" err="1"/>
+              <a:t>kontextabhängige</a:t>
+            </a:r>
+            <a:r>
+              <a:rPr lang="en-DE" dirty="0"/>
+              <a:t> </a:t>
+            </a:r>
+            <a:r>
+              <a:rPr lang="en-DE" dirty="0" err="1"/>
+              <a:t>Gewichtung</a:t>
+            </a:r>
+            <a:r>
+              <a:rPr lang="en-DE" dirty="0"/>
+              <a:t> </a:t>
+            </a:r>
+            <a:r>
+              <a:rPr lang="en-DE" dirty="0" err="1"/>
+              <a:t>räumlich</a:t>
+            </a:r>
+            <a:r>
+              <a:rPr lang="en-DE" dirty="0"/>
+              <a:t> </a:t>
+            </a:r>
+            <a:r>
+              <a:rPr lang="en-DE" dirty="0" err="1"/>
+              <a:t>verteilter</a:t>
+            </a:r>
+            <a:r>
+              <a:rPr lang="en-DE" dirty="0"/>
+              <a:t> </a:t>
+            </a:r>
+            <a:r>
+              <a:rPr lang="en-DE" dirty="0" err="1"/>
+              <a:t>Merkmale</a:t>
+            </a:r>
+            <a:endParaRPr lang="en-DE" dirty="0"/>
+          </a:p>
+          <a:p>
+            <a:r>
+              <a:rPr lang="en-DE" i="1" dirty="0"/>
+              <a:t>(</a:t>
+            </a:r>
+            <a:r>
+              <a:rPr lang="en-DE" i="1" dirty="0" err="1"/>
+              <a:t>Grafik</a:t>
+            </a:r>
+            <a:r>
+              <a:rPr lang="en-DE" i="1" dirty="0"/>
+              <a:t>: </a:t>
+            </a:r>
+            <a:r>
+              <a:rPr lang="en-DE" i="1" dirty="0" err="1"/>
+              <a:t>eure</a:t>
+            </a:r>
+            <a:r>
+              <a:rPr lang="en-DE" i="1" dirty="0"/>
+              <a:t> </a:t>
+            </a:r>
+            <a:r>
+              <a:rPr lang="en-DE" i="1" dirty="0" err="1"/>
+              <a:t>Merkmalskarten</a:t>
+            </a:r>
+            <a:r>
+              <a:rPr lang="en-DE" i="1" dirty="0"/>
+              <a:t>! Abb. 2 (Conv-</a:t>
+            </a:r>
+            <a:r>
+              <a:rPr lang="en-DE" i="1" dirty="0" err="1"/>
+              <a:t>Ausgabe</a:t>
+            </a:r>
+            <a:r>
+              <a:rPr lang="en-DE" i="1" dirty="0"/>
+              <a:t>) und Abb. 3 (C3k2-Ausgabe, 16 </a:t>
+            </a:r>
+            <a:r>
+              <a:rPr lang="en-DE" i="1" dirty="0" err="1"/>
+              <a:t>Kanäle</a:t>
+            </a:r>
+            <a:r>
+              <a:rPr lang="en-DE" i="1" dirty="0"/>
+              <a:t>) – </a:t>
+            </a:r>
+            <a:r>
+              <a:rPr lang="en-DE" i="1" dirty="0" err="1"/>
+              <a:t>zeigt</a:t>
+            </a:r>
+            <a:r>
+              <a:rPr lang="en-DE" i="1" dirty="0"/>
+              <a:t> </a:t>
+            </a:r>
+            <a:r>
+              <a:rPr lang="en-DE" i="1" dirty="0" err="1"/>
+              <a:t>anschaulich</a:t>
+            </a:r>
+            <a:r>
+              <a:rPr lang="en-DE" i="1" dirty="0"/>
+              <a:t>, WAS die </a:t>
+            </a:r>
+            <a:r>
+              <a:rPr lang="en-DE" i="1" dirty="0" err="1"/>
+              <a:t>Schichten</a:t>
+            </a:r>
+            <a:r>
+              <a:rPr lang="en-DE" i="1" dirty="0"/>
+              <a:t> tun)</a:t>
+            </a:r>
+            <a:endParaRPr lang="en-DE" dirty="0"/>
+          </a:p>
+          <a:p>
+            <a:endParaRPr lang="de-DE" b="1" dirty="0">
+              <a:highlight>
+                <a:srgbClr val="FFFF00"/>
+              </a:highlight>
+            </a:endParaRPr>
           </a:p>
         </p:txBody>
       </p:sp>
@@ -5266,97 +7065,76 @@
               </a:tabLst>
             </a:pPr>
             <a:r>
-              <a:rPr lang="de-DE" sz="1800" dirty="0"/>
-              <a:t>[1] 	J. Campbell, R. </a:t>
-            </a:r>
-            <a:r>
-              <a:rPr lang="de-DE" sz="1800" dirty="0" err="1"/>
-              <a:t>Sukthankar</a:t>
-            </a:r>
-            <a:r>
-              <a:rPr lang="de-DE" sz="1800" dirty="0"/>
-              <a:t>, I. </a:t>
-            </a:r>
-            <a:r>
-              <a:rPr lang="de-DE" sz="1800" dirty="0" err="1"/>
-              <a:t>Nourbakhsh</a:t>
-            </a:r>
-            <a:r>
-              <a:rPr lang="de-DE" sz="1800" dirty="0"/>
-              <a:t>, A. </a:t>
-            </a:r>
-            <a:r>
-              <a:rPr lang="de-DE" sz="1800" dirty="0" err="1"/>
-              <a:t>Pahwa</a:t>
-            </a:r>
-            <a:r>
-              <a:rPr lang="de-DE" sz="1800" dirty="0"/>
-              <a:t>:  “A Robust Visual </a:t>
-            </a:r>
-            <a:r>
-              <a:rPr lang="de-DE" sz="1800" dirty="0" err="1"/>
-              <a:t>Odometry</a:t>
-            </a:r>
-            <a:r>
-              <a:rPr lang="de-DE" sz="1800" dirty="0"/>
-              <a:t> and </a:t>
-            </a:r>
-            <a:r>
-              <a:rPr lang="de-DE" sz="1800" dirty="0" err="1"/>
-              <a:t>Precipice</a:t>
-            </a:r>
-            <a:r>
-              <a:rPr lang="de-DE" sz="1800" dirty="0"/>
-              <a:t> </a:t>
-            </a:r>
-            <a:r>
-              <a:rPr lang="de-DE" sz="1800" dirty="0" err="1"/>
-              <a:t>Detection</a:t>
-            </a:r>
-            <a:r>
-              <a:rPr lang="de-DE" sz="1800" dirty="0"/>
-              <a:t> System </a:t>
-            </a:r>
-            <a:r>
-              <a:rPr lang="de-DE" sz="1800" dirty="0" err="1"/>
-              <a:t>Using</a:t>
-            </a:r>
-            <a:r>
-              <a:rPr lang="de-DE" sz="1800" dirty="0"/>
-              <a:t> Consumer-grade </a:t>
-            </a:r>
-            <a:r>
-              <a:rPr lang="de-DE" sz="1800" dirty="0" err="1"/>
-              <a:t>Monocular</a:t>
-            </a:r>
-            <a:r>
-              <a:rPr lang="de-DE" sz="1800" dirty="0"/>
-              <a:t> Vision”. In Proceedings </a:t>
-            </a:r>
-            <a:r>
-              <a:rPr lang="de-DE" sz="1800" dirty="0" err="1"/>
-              <a:t>of</a:t>
-            </a:r>
-            <a:r>
-              <a:rPr lang="de-DE" sz="1800" dirty="0"/>
-              <a:t> </a:t>
-            </a:r>
-            <a:r>
-              <a:rPr lang="de-DE" sz="1800" dirty="0" err="1"/>
-              <a:t>the</a:t>
-            </a:r>
-            <a:r>
-              <a:rPr lang="de-DE" sz="1800" dirty="0"/>
-              <a:t> IEEE International Conference on Robotics and Automation (ICRA’05), Barcelona, Spain, April 2005 (Internet source www.example-internet-source.com/example/example.pdf, </a:t>
-            </a:r>
-            <a:r>
-              <a:rPr lang="de-DE" sz="1800" dirty="0" err="1"/>
-              <a:t>accessed</a:t>
-            </a:r>
-            <a:r>
-              <a:rPr lang="de-DE" sz="1800" dirty="0"/>
-              <a:t> on 08.02.2018)</a:t>
-            </a:r>
+              <a:rPr lang="en-DE" sz="1800" dirty="0"/>
+              <a:t>[</a:t>
+            </a:r>
+            <a:r>
+              <a:rPr lang="en-US" sz="1800" dirty="0"/>
+              <a:t>1</a:t>
+            </a:r>
+            <a:r>
+              <a:rPr lang="en-DE" sz="1800" dirty="0"/>
+              <a:t>] Glenn </a:t>
+            </a:r>
+            <a:r>
+              <a:rPr lang="en-DE" sz="1800" dirty="0" err="1"/>
+              <a:t>Jocher</a:t>
+            </a:r>
+            <a:r>
+              <a:rPr lang="en-DE" sz="1800" dirty="0"/>
+              <a:t>, Jing Qiu, </a:t>
+            </a:r>
+            <a:r>
+              <a:rPr lang="en-DE" sz="1800" dirty="0" err="1"/>
+              <a:t>Mengyu</a:t>
+            </a:r>
+            <a:r>
+              <a:rPr lang="en-DE" sz="1800" dirty="0"/>
+              <a:t> Liu, Shuai Lyu, Fatih Cagatay </a:t>
+            </a:r>
+            <a:r>
+              <a:rPr lang="en-DE" sz="1800" dirty="0" err="1"/>
+              <a:t>Akyon</a:t>
+            </a:r>
+            <a:r>
+              <a:rPr lang="en-DE" sz="1800" dirty="0"/>
+              <a:t>, Muhammet Esat </a:t>
+            </a:r>
+            <a:r>
+              <a:rPr lang="en-DE" sz="1800" dirty="0" err="1"/>
+              <a:t>Kalfaoglu</a:t>
+            </a:r>
+            <a:r>
+              <a:rPr lang="en-DE" sz="1800" dirty="0"/>
+              <a:t>: “</a:t>
+            </a:r>
+            <a:r>
+              <a:rPr lang="en-DE" sz="1800" dirty="0" err="1"/>
+              <a:t>Ultralytics</a:t>
+            </a:r>
+            <a:r>
+              <a:rPr lang="en-DE" sz="1800" dirty="0"/>
+              <a:t> YOLO26: Unified Real-Time End-to-End Vision Models”. </a:t>
+            </a:r>
+            <a:r>
+              <a:rPr lang="en-DE" sz="1800" dirty="0" err="1"/>
+              <a:t>arXiv</a:t>
+            </a:r>
+            <a:r>
+              <a:rPr lang="en-DE" sz="1800" dirty="0"/>
+              <a:t> preprint arXiv:2606.03748, June 2026 (Internet source </a:t>
+            </a:r>
+            <a:r>
+              <a:rPr lang="en-DE" sz="1800" dirty="0">
+                <a:hlinkClick r:id="rId3"/>
+              </a:rPr>
+              <a:t>https://arxiv.org/pdf/2606.03748</a:t>
+            </a:r>
+            <a:r>
+              <a:rPr lang="en-DE" sz="1800" dirty="0"/>
+              <a:t>, accessed on 11.07.2026)</a:t>
+            </a:r>
+            <a:endParaRPr lang="de-DE" sz="1800" dirty="0"/>
           </a:p>
           <a:p>
             <a:pPr marL="449263" indent="-449263">
@@ -5366,19 +7144,43 @@
             </a:pPr>
             <a:r>
               <a:rPr lang="de-DE" sz="1800" dirty="0"/>
-              <a:t>[2] 	A.D. </a:t>
+              <a:t>[X] 	J. Campbell, R. </a:t>
             </a:r>
             <a:r>
               <a:rPr lang="de-DE" sz="1800" dirty="0" err="1"/>
-              <a:t>Jepson</a:t>
+              <a:t>Sukthankar</a:t>
             </a:r>
             <a:r>
               <a:rPr lang="de-DE" sz="1800" dirty="0"/>
-              <a:t>, D.J, Heeger: “A fast </a:t>
+              <a:t>, I. </a:t>
             </a:r>
             <a:r>
               <a:rPr lang="de-DE" sz="1800" dirty="0" err="1"/>
-              <a:t>subspace</a:t>
+              <a:t>Nourbakhsh</a:t>
+            </a:r>
+            <a:r>
+              <a:rPr lang="de-DE" sz="1800" dirty="0"/>
+              <a:t>, A. </a:t>
+            </a:r>
+            <a:r>
+              <a:rPr lang="de-DE" sz="1800" dirty="0" err="1"/>
+              <a:t>Pahwa</a:t>
+            </a:r>
+            <a:r>
+              <a:rPr lang="de-DE" sz="1800" dirty="0"/>
+              <a:t>:  “A Robust Visual </a:t>
+            </a:r>
+            <a:r>
+              <a:rPr lang="de-DE" sz="1800" dirty="0" err="1"/>
+              <a:t>Odometry</a:t>
+            </a:r>
+            <a:r>
+              <a:rPr lang="de-DE" sz="1800" dirty="0"/>
+              <a:t> and </a:t>
+            </a:r>
+            <a:r>
+              <a:rPr lang="de-DE" sz="1800" dirty="0" err="1"/>
+              <a:t>Precipice</a:t>
             </a:r>
             <a:r>
               <a:rPr lang="de-DE" sz="1800" dirty="0"/>
@@ -5386,7 +7188,31 @@
             </a:r>
             <a:r>
               <a:rPr lang="de-DE" sz="1800" dirty="0" err="1"/>
-              <a:t>algorithm</a:t>
+              <a:t>Detection</a:t>
+            </a:r>
+            <a:r>
+              <a:rPr lang="de-DE" sz="1800" dirty="0"/>
+              <a:t> System </a:t>
+            </a:r>
+            <a:r>
+              <a:rPr lang="de-DE" sz="1800" dirty="0" err="1"/>
+              <a:t>Using</a:t>
+            </a:r>
+            <a:r>
+              <a:rPr lang="de-DE" sz="1800" dirty="0"/>
+              <a:t> Consumer-grade </a:t>
+            </a:r>
+            <a:r>
+              <a:rPr lang="de-DE" sz="1800" dirty="0" err="1"/>
+              <a:t>Monocular</a:t>
+            </a:r>
+            <a:r>
+              <a:rPr lang="de-DE" sz="1800" dirty="0"/>
+              <a:t> Vision”. In Proceedings </a:t>
+            </a:r>
+            <a:r>
+              <a:rPr lang="de-DE" sz="1800" dirty="0" err="1"/>
+              <a:t>of</a:t>
             </a:r>
             <a:r>
               <a:rPr lang="de-DE" sz="1800" dirty="0"/>
@@ -5394,51 +7220,19 @@
             </a:r>
             <a:r>
               <a:rPr lang="de-DE" sz="1800" dirty="0" err="1"/>
-              <a:t>for</a:t>
+              <a:t>the</a:t>
             </a:r>
             <a:r>
               <a:rPr lang="de-DE" sz="1800" dirty="0"/>
-              <a:t> </a:t>
+              <a:t> IEEE International Conference on Robotics and Automation (ICRA’05), Barcelona, Spain, April 2005 (Internet source www.example-internet-source.com/example/example.pdf, </a:t>
             </a:r>
             <a:r>
               <a:rPr lang="de-DE" sz="1800" dirty="0" err="1"/>
-              <a:t>recovering</a:t>
+              <a:t>accessed</a:t>
             </a:r>
             <a:r>
               <a:rPr lang="de-DE" sz="1800" dirty="0"/>
-              <a:t> rigid </a:t>
-            </a:r>
-            <a:r>
-              <a:rPr lang="de-DE" sz="1800" dirty="0" err="1"/>
-              <a:t>motion</a:t>
-            </a:r>
-            <a:r>
-              <a:rPr lang="de-DE" sz="1800" dirty="0"/>
-              <a:t>”. In Proceedings </a:t>
-            </a:r>
-            <a:r>
-              <a:rPr lang="de-DE" sz="1800" dirty="0" err="1"/>
-              <a:t>of</a:t>
-            </a:r>
-            <a:r>
-              <a:rPr lang="de-DE" sz="1800" dirty="0"/>
-              <a:t> </a:t>
-            </a:r>
-            <a:r>
-              <a:rPr lang="de-DE" sz="1800" dirty="0" err="1"/>
-              <a:t>the</a:t>
-            </a:r>
-            <a:r>
-              <a:rPr lang="de-DE" sz="1800" dirty="0"/>
-              <a:t> IEEE Workshop on Visual Motion, pp. 124 131, Princeton, USA, </a:t>
-            </a:r>
-            <a:r>
-              <a:rPr lang="de-DE" sz="1800" dirty="0" err="1"/>
-              <a:t>Oct</a:t>
-            </a:r>
-            <a:r>
-              <a:rPr lang="de-DE" sz="1800" dirty="0"/>
-              <a:t>. 1991</a:t>
+              <a:t> on 08.02.2018)</a:t>
             </a:r>
           </a:p>
           <a:p>
@@ -5449,7 +7243,90 @@
             </a:pPr>
             <a:r>
               <a:rPr lang="de-DE" sz="1800" dirty="0"/>
-              <a:t>[3]	Glenn </a:t>
+              <a:t>[X] 	A.D. </a:t>
+            </a:r>
+            <a:r>
+              <a:rPr lang="de-DE" sz="1800" dirty="0" err="1"/>
+              <a:t>Jepson</a:t>
+            </a:r>
+            <a:r>
+              <a:rPr lang="de-DE" sz="1800" dirty="0"/>
+              <a:t>, D.J, Heeger: “A fast </a:t>
+            </a:r>
+            <a:r>
+              <a:rPr lang="de-DE" sz="1800" dirty="0" err="1"/>
+              <a:t>subspace</a:t>
+            </a:r>
+            <a:r>
+              <a:rPr lang="de-DE" sz="1800" dirty="0"/>
+              <a:t> </a:t>
+            </a:r>
+            <a:r>
+              <a:rPr lang="de-DE" sz="1800" dirty="0" err="1"/>
+              <a:t>algorithm</a:t>
+            </a:r>
+            <a:r>
+              <a:rPr lang="de-DE" sz="1800" dirty="0"/>
+              <a:t> </a:t>
+            </a:r>
+            <a:r>
+              <a:rPr lang="de-DE" sz="1800" dirty="0" err="1"/>
+              <a:t>for</a:t>
+            </a:r>
+            <a:r>
+              <a:rPr lang="de-DE" sz="1800" dirty="0"/>
+              <a:t> </a:t>
+            </a:r>
+            <a:r>
+              <a:rPr lang="de-DE" sz="1800" dirty="0" err="1"/>
+              <a:t>recovering</a:t>
+            </a:r>
+            <a:r>
+              <a:rPr lang="de-DE" sz="1800" dirty="0"/>
+              <a:t> rigid </a:t>
+            </a:r>
+            <a:r>
+              <a:rPr lang="de-DE" sz="1800" dirty="0" err="1"/>
+              <a:t>motion</a:t>
+            </a:r>
+            <a:r>
+              <a:rPr lang="de-DE" sz="1800" dirty="0"/>
+              <a:t>”. In Proceedings </a:t>
+            </a:r>
+            <a:r>
+              <a:rPr lang="de-DE" sz="1800" dirty="0" err="1"/>
+              <a:t>of</a:t>
+            </a:r>
+            <a:r>
+              <a:rPr lang="de-DE" sz="1800" dirty="0"/>
+              <a:t> </a:t>
+            </a:r>
+            <a:r>
+              <a:rPr lang="de-DE" sz="1800" dirty="0" err="1"/>
+              <a:t>the</a:t>
+            </a:r>
+            <a:r>
+              <a:rPr lang="de-DE" sz="1800" dirty="0"/>
+              <a:t> IEEE Workshop on Visual Motion, pp. 124 131, Princeton, USA, </a:t>
+            </a:r>
+            <a:r>
+              <a:rPr lang="de-DE" sz="1800" dirty="0" err="1"/>
+              <a:t>Oct</a:t>
+            </a:r>
+            <a:r>
+              <a:rPr lang="de-DE" sz="1800" dirty="0"/>
+              <a:t>. 1991</a:t>
+            </a:r>
+          </a:p>
+          <a:p>
+            <a:pPr marL="449263" indent="-449263">
+              <a:tabLst>
+                <a:tab pos="449263" algn="l"/>
+              </a:tabLst>
+            </a:pPr>
+            <a:r>
+              <a:rPr lang="de-DE" sz="1800" dirty="0"/>
+              <a:t>[X]	Glenn </a:t>
             </a:r>
             <a:r>
               <a:rPr lang="de-DE" sz="1800" dirty="0" err="1"/>
@@ -5503,241 +7380,6 @@
               <a:rPr lang="de-DE" b="1" dirty="0"/>
               <a:t>Quellen:</a:t>
             </a:r>
-          </a:p>
-        </p:txBody>
-      </p:sp>
-      <p:sp>
-        <p:nvSpPr>
-          <p:cNvPr id="44" name="Bildplatzhalter 43">
-            <a:extLst>
-              <a:ext uri="{FF2B5EF4-FFF2-40B4-BE49-F238E27FC236}">
-                <a16:creationId xmlns:a16="http://schemas.microsoft.com/office/drawing/2014/main" id="{F97037E6-90D4-403F-A8AD-5D11E665E0B5}"/>
-              </a:ext>
-            </a:extLst>
-          </p:cNvPr>
-          <p:cNvSpPr>
-            <a:spLocks noGrp="1"/>
-          </p:cNvSpPr>
-          <p:nvPr>
-            <p:ph type="pic" sz="quarter" idx="53"/>
-          </p:nvPr>
-        </p:nvSpPr>
-        <p:spPr/>
-      </p:sp>
-      <p:sp>
-        <p:nvSpPr>
-          <p:cNvPr id="45" name="Textplatzhalter 44">
-            <a:extLst>
-              <a:ext uri="{FF2B5EF4-FFF2-40B4-BE49-F238E27FC236}">
-                <a16:creationId xmlns:a16="http://schemas.microsoft.com/office/drawing/2014/main" id="{2D5B3C53-50C4-48BB-979E-7CB1D19403F9}"/>
-              </a:ext>
-            </a:extLst>
-          </p:cNvPr>
-          <p:cNvSpPr>
-            <a:spLocks noGrp="1"/>
-          </p:cNvSpPr>
-          <p:nvPr>
-            <p:ph type="body" sz="quarter" idx="54"/>
-          </p:nvPr>
-        </p:nvSpPr>
-        <p:spPr/>
-        <p:txBody>
-          <a:bodyPr/>
-          <a:lstStyle/>
-          <a:p>
-            <a:endParaRPr lang="de-DE"/>
-          </a:p>
-        </p:txBody>
-      </p:sp>
-      <p:sp>
-        <p:nvSpPr>
-          <p:cNvPr id="46" name="Bildplatzhalter 45">
-            <a:extLst>
-              <a:ext uri="{FF2B5EF4-FFF2-40B4-BE49-F238E27FC236}">
-                <a16:creationId xmlns:a16="http://schemas.microsoft.com/office/drawing/2014/main" id="{BF18DCFC-F6F9-4D76-87C4-75D5CBABB005}"/>
-              </a:ext>
-            </a:extLst>
-          </p:cNvPr>
-          <p:cNvSpPr>
-            <a:spLocks noGrp="1"/>
-          </p:cNvSpPr>
-          <p:nvPr>
-            <p:ph type="pic" sz="quarter" idx="55"/>
-          </p:nvPr>
-        </p:nvSpPr>
-        <p:spPr/>
-      </p:sp>
-      <p:sp>
-        <p:nvSpPr>
-          <p:cNvPr id="47" name="Textplatzhalter 46">
-            <a:extLst>
-              <a:ext uri="{FF2B5EF4-FFF2-40B4-BE49-F238E27FC236}">
-                <a16:creationId xmlns:a16="http://schemas.microsoft.com/office/drawing/2014/main" id="{0AF08F98-27DB-4944-96F0-1BAC2A0A2F69}"/>
-              </a:ext>
-            </a:extLst>
-          </p:cNvPr>
-          <p:cNvSpPr>
-            <a:spLocks noGrp="1"/>
-          </p:cNvSpPr>
-          <p:nvPr>
-            <p:ph type="body" sz="quarter" idx="56"/>
-          </p:nvPr>
-        </p:nvSpPr>
-        <p:spPr/>
-        <p:txBody>
-          <a:bodyPr/>
-          <a:lstStyle/>
-          <a:p>
-            <a:endParaRPr lang="de-DE"/>
-          </a:p>
-        </p:txBody>
-      </p:sp>
-      <p:sp>
-        <p:nvSpPr>
-          <p:cNvPr id="48" name="Bildplatzhalter 47">
-            <a:extLst>
-              <a:ext uri="{FF2B5EF4-FFF2-40B4-BE49-F238E27FC236}">
-                <a16:creationId xmlns:a16="http://schemas.microsoft.com/office/drawing/2014/main" id="{09B28749-05B1-42FD-AC3F-FD6FF82EE7C3}"/>
-              </a:ext>
-            </a:extLst>
-          </p:cNvPr>
-          <p:cNvSpPr>
-            <a:spLocks noGrp="1"/>
-          </p:cNvSpPr>
-          <p:nvPr>
-            <p:ph type="pic" sz="quarter" idx="57"/>
-          </p:nvPr>
-        </p:nvSpPr>
-        <p:spPr/>
-      </p:sp>
-      <p:sp>
-        <p:nvSpPr>
-          <p:cNvPr id="49" name="Textplatzhalter 48">
-            <a:extLst>
-              <a:ext uri="{FF2B5EF4-FFF2-40B4-BE49-F238E27FC236}">
-                <a16:creationId xmlns:a16="http://schemas.microsoft.com/office/drawing/2014/main" id="{50F61951-FCC9-43B1-B866-98A072D11F9E}"/>
-              </a:ext>
-            </a:extLst>
-          </p:cNvPr>
-          <p:cNvSpPr>
-            <a:spLocks noGrp="1"/>
-          </p:cNvSpPr>
-          <p:nvPr>
-            <p:ph type="body" sz="quarter" idx="58"/>
-          </p:nvPr>
-        </p:nvSpPr>
-        <p:spPr/>
-        <p:txBody>
-          <a:bodyPr/>
-          <a:lstStyle/>
-          <a:p>
-            <a:endParaRPr lang="de-DE"/>
-          </a:p>
-        </p:txBody>
-      </p:sp>
-      <p:sp>
-        <p:nvSpPr>
-          <p:cNvPr id="50" name="Bildplatzhalter 49">
-            <a:extLst>
-              <a:ext uri="{FF2B5EF4-FFF2-40B4-BE49-F238E27FC236}">
-                <a16:creationId xmlns:a16="http://schemas.microsoft.com/office/drawing/2014/main" id="{2869E71D-54DC-4323-B33A-6C2CDD069BAE}"/>
-              </a:ext>
-            </a:extLst>
-          </p:cNvPr>
-          <p:cNvSpPr>
-            <a:spLocks noGrp="1"/>
-          </p:cNvSpPr>
-          <p:nvPr>
-            <p:ph type="pic" sz="quarter" idx="59"/>
-          </p:nvPr>
-        </p:nvSpPr>
-        <p:spPr>
-          <a:xfrm>
-            <a:off x="20240623" y="19002544"/>
-            <a:ext cx="3787776" cy="3864026"/>
-          </a:xfrm>
-        </p:spPr>
-      </p:sp>
-      <p:sp>
-        <p:nvSpPr>
-          <p:cNvPr id="51" name="Textplatzhalter 50">
-            <a:extLst>
-              <a:ext uri="{FF2B5EF4-FFF2-40B4-BE49-F238E27FC236}">
-                <a16:creationId xmlns:a16="http://schemas.microsoft.com/office/drawing/2014/main" id="{B10AC45E-BB30-4D83-A6BA-59B6BA25ACE4}"/>
-              </a:ext>
-            </a:extLst>
-          </p:cNvPr>
-          <p:cNvSpPr>
-            <a:spLocks noGrp="1"/>
-          </p:cNvSpPr>
-          <p:nvPr>
-            <p:ph type="body" sz="quarter" idx="60"/>
-          </p:nvPr>
-        </p:nvSpPr>
-        <p:spPr>
-          <a:xfrm>
-            <a:off x="20240623" y="23279372"/>
-            <a:ext cx="3787775" cy="3186112"/>
-          </a:xfrm>
-        </p:spPr>
-        <p:txBody>
-          <a:bodyPr/>
-          <a:lstStyle/>
-          <a:p>
-            <a:endParaRPr lang="de-DE"/>
-          </a:p>
-        </p:txBody>
-      </p:sp>
-      <p:sp>
-        <p:nvSpPr>
-          <p:cNvPr id="52" name="Bildplatzhalter 51">
-            <a:extLst>
-              <a:ext uri="{FF2B5EF4-FFF2-40B4-BE49-F238E27FC236}">
-                <a16:creationId xmlns:a16="http://schemas.microsoft.com/office/drawing/2014/main" id="{9C1EA296-4361-43CF-B85F-09E5D2EE4D1A}"/>
-              </a:ext>
-            </a:extLst>
-          </p:cNvPr>
-          <p:cNvSpPr>
-            <a:spLocks noGrp="1"/>
-          </p:cNvSpPr>
-          <p:nvPr>
-            <p:ph type="pic" sz="quarter" idx="61"/>
-          </p:nvPr>
-        </p:nvSpPr>
-        <p:spPr>
-          <a:xfrm>
-            <a:off x="24928511" y="19002544"/>
-            <a:ext cx="3787776" cy="3864026"/>
-          </a:xfrm>
-        </p:spPr>
-      </p:sp>
-      <p:sp>
-        <p:nvSpPr>
-          <p:cNvPr id="53" name="Textplatzhalter 52">
-            <a:extLst>
-              <a:ext uri="{FF2B5EF4-FFF2-40B4-BE49-F238E27FC236}">
-                <a16:creationId xmlns:a16="http://schemas.microsoft.com/office/drawing/2014/main" id="{3010A685-57A4-45EC-A800-EE2016B841E7}"/>
-              </a:ext>
-            </a:extLst>
-          </p:cNvPr>
-          <p:cNvSpPr>
-            <a:spLocks noGrp="1"/>
-          </p:cNvSpPr>
-          <p:nvPr>
-            <p:ph type="body" sz="quarter" idx="62"/>
-          </p:nvPr>
-        </p:nvSpPr>
-        <p:spPr>
-          <a:xfrm>
-            <a:off x="24928511" y="23279372"/>
-            <a:ext cx="3787775" cy="3186112"/>
-          </a:xfrm>
-        </p:spPr>
-        <p:txBody>
-          <a:bodyPr/>
-          <a:lstStyle/>
-          <a:p>
-            <a:endParaRPr lang="de-DE"/>
           </a:p>
         </p:txBody>
       </p:sp>
@@ -6116,10 +7758,3045 @@
           </a:p>
         </p:txBody>
       </p:sp>
+      <p:sp>
+        <p:nvSpPr>
+          <p:cNvPr id="15" name="Textplatzhalter 31">
+            <a:extLst>
+              <a:ext uri="{FF2B5EF4-FFF2-40B4-BE49-F238E27FC236}">
+                <a16:creationId xmlns:a16="http://schemas.microsoft.com/office/drawing/2014/main" id="{33E8F444-AD18-779E-1F58-BE8BFAD8A6BE}"/>
+              </a:ext>
+            </a:extLst>
+          </p:cNvPr>
+          <p:cNvSpPr txBox="1">
+            <a:spLocks/>
+          </p:cNvSpPr>
+          <p:nvPr/>
+        </p:nvSpPr>
+        <p:spPr>
+          <a:xfrm>
+            <a:off x="1527175" y="29030170"/>
+            <a:ext cx="8472488" cy="10592011"/>
+          </a:xfrm>
+          <a:prstGeom prst="rect">
+            <a:avLst/>
+          </a:prstGeom>
+        </p:spPr>
+        <p:txBody>
+          <a:bodyPr vert="horz" lIns="0" tIns="0" rIns="0" bIns="0" rtlCol="0">
+            <a:noAutofit/>
+          </a:bodyPr>
+          <a:lstStyle>
+            <a:lvl1pPr marL="0" indent="0" algn="l" defTabSz="3027487" rtl="0" eaLnBrk="1" latinLnBrk="0" hangingPunct="1">
+              <a:lnSpc>
+                <a:spcPct val="90000"/>
+              </a:lnSpc>
+              <a:spcBef>
+                <a:spcPts val="3311"/>
+              </a:spcBef>
+              <a:buFont typeface="Arial" panose="020B0604020202020204" pitchFamily="34" charset="0"/>
+              <a:buNone/>
+              <a:defRPr sz="2700" kern="1200">
+                <a:solidFill>
+                  <a:schemeClr val="tx1"/>
+                </a:solidFill>
+                <a:latin typeface="+mn-lt"/>
+                <a:ea typeface="+mn-ea"/>
+                <a:cs typeface="+mn-cs"/>
+              </a:defRPr>
+            </a:lvl1pPr>
+            <a:lvl2pPr marL="182563" indent="0" algn="l" defTabSz="3027487" rtl="0" eaLnBrk="1" latinLnBrk="0" hangingPunct="1">
+              <a:lnSpc>
+                <a:spcPct val="90000"/>
+              </a:lnSpc>
+              <a:spcBef>
+                <a:spcPts val="1655"/>
+              </a:spcBef>
+              <a:buFont typeface="Arial" panose="020B0604020202020204" pitchFamily="34" charset="0"/>
+              <a:buNone/>
+              <a:defRPr sz="2700" kern="1200">
+                <a:solidFill>
+                  <a:schemeClr val="tx1"/>
+                </a:solidFill>
+                <a:latin typeface="+mn-lt"/>
+                <a:ea typeface="+mn-ea"/>
+                <a:cs typeface="+mn-cs"/>
+              </a:defRPr>
+            </a:lvl2pPr>
+            <a:lvl3pPr marL="541338" indent="-182563" algn="l" defTabSz="3027487" rtl="0" eaLnBrk="1" latinLnBrk="0" hangingPunct="1">
+              <a:lnSpc>
+                <a:spcPct val="90000"/>
+              </a:lnSpc>
+              <a:spcBef>
+                <a:spcPts val="1655"/>
+              </a:spcBef>
+              <a:buFont typeface="Arial" panose="020B0604020202020204" pitchFamily="34" charset="0"/>
+              <a:buNone/>
+              <a:defRPr sz="2700" kern="1200">
+                <a:solidFill>
+                  <a:schemeClr val="tx1"/>
+                </a:solidFill>
+                <a:latin typeface="+mn-lt"/>
+                <a:ea typeface="+mn-ea"/>
+                <a:cs typeface="+mn-cs"/>
+              </a:defRPr>
+            </a:lvl3pPr>
+            <a:lvl4pPr marL="715963" indent="-174625" algn="l" defTabSz="3027487" rtl="0" eaLnBrk="1" latinLnBrk="0" hangingPunct="1">
+              <a:lnSpc>
+                <a:spcPct val="90000"/>
+              </a:lnSpc>
+              <a:spcBef>
+                <a:spcPts val="1655"/>
+              </a:spcBef>
+              <a:buFont typeface="Arial" panose="020B0604020202020204" pitchFamily="34" charset="0"/>
+              <a:buNone/>
+              <a:defRPr sz="2700" kern="1200">
+                <a:solidFill>
+                  <a:schemeClr val="tx1"/>
+                </a:solidFill>
+                <a:latin typeface="+mn-lt"/>
+                <a:ea typeface="+mn-ea"/>
+                <a:cs typeface="+mn-cs"/>
+              </a:defRPr>
+            </a:lvl4pPr>
+            <a:lvl5pPr marL="898525" indent="-182563" algn="l" defTabSz="3027487" rtl="0" eaLnBrk="1" latinLnBrk="0" hangingPunct="1">
+              <a:lnSpc>
+                <a:spcPct val="90000"/>
+              </a:lnSpc>
+              <a:spcBef>
+                <a:spcPts val="1655"/>
+              </a:spcBef>
+              <a:buFont typeface="Arial" panose="020B0604020202020204" pitchFamily="34" charset="0"/>
+              <a:buNone/>
+              <a:defRPr sz="2700" kern="1200">
+                <a:solidFill>
+                  <a:schemeClr val="tx1"/>
+                </a:solidFill>
+                <a:latin typeface="+mn-lt"/>
+                <a:ea typeface="+mn-ea"/>
+                <a:cs typeface="+mn-cs"/>
+              </a:defRPr>
+            </a:lvl5pPr>
+            <a:lvl6pPr marL="8325589" indent="-756872" algn="l" defTabSz="3027487" rtl="0" eaLnBrk="1" latinLnBrk="0" hangingPunct="1">
+              <a:lnSpc>
+                <a:spcPct val="90000"/>
+              </a:lnSpc>
+              <a:spcBef>
+                <a:spcPts val="1655"/>
+              </a:spcBef>
+              <a:buFont typeface="Arial" panose="020B0604020202020204" pitchFamily="34" charset="0"/>
+              <a:buChar char="•"/>
+              <a:defRPr sz="5960" kern="1200">
+                <a:solidFill>
+                  <a:schemeClr val="tx1"/>
+                </a:solidFill>
+                <a:latin typeface="+mn-lt"/>
+                <a:ea typeface="+mn-ea"/>
+                <a:cs typeface="+mn-cs"/>
+              </a:defRPr>
+            </a:lvl6pPr>
+            <a:lvl7pPr marL="9839333" indent="-756872" algn="l" defTabSz="3027487" rtl="0" eaLnBrk="1" latinLnBrk="0" hangingPunct="1">
+              <a:lnSpc>
+                <a:spcPct val="90000"/>
+              </a:lnSpc>
+              <a:spcBef>
+                <a:spcPts val="1655"/>
+              </a:spcBef>
+              <a:buFont typeface="Arial" panose="020B0604020202020204" pitchFamily="34" charset="0"/>
+              <a:buChar char="•"/>
+              <a:defRPr sz="5960" kern="1200">
+                <a:solidFill>
+                  <a:schemeClr val="tx1"/>
+                </a:solidFill>
+                <a:latin typeface="+mn-lt"/>
+                <a:ea typeface="+mn-ea"/>
+                <a:cs typeface="+mn-cs"/>
+              </a:defRPr>
+            </a:lvl7pPr>
+            <a:lvl8pPr marL="11353076" indent="-756872" algn="l" defTabSz="3027487" rtl="0" eaLnBrk="1" latinLnBrk="0" hangingPunct="1">
+              <a:lnSpc>
+                <a:spcPct val="90000"/>
+              </a:lnSpc>
+              <a:spcBef>
+                <a:spcPts val="1655"/>
+              </a:spcBef>
+              <a:buFont typeface="Arial" panose="020B0604020202020204" pitchFamily="34" charset="0"/>
+              <a:buChar char="•"/>
+              <a:defRPr sz="5960" kern="1200">
+                <a:solidFill>
+                  <a:schemeClr val="tx1"/>
+                </a:solidFill>
+                <a:latin typeface="+mn-lt"/>
+                <a:ea typeface="+mn-ea"/>
+                <a:cs typeface="+mn-cs"/>
+              </a:defRPr>
+            </a:lvl8pPr>
+            <a:lvl9pPr marL="12866820" indent="-756872" algn="l" defTabSz="3027487" rtl="0" eaLnBrk="1" latinLnBrk="0" hangingPunct="1">
+              <a:lnSpc>
+                <a:spcPct val="90000"/>
+              </a:lnSpc>
+              <a:spcBef>
+                <a:spcPts val="1655"/>
+              </a:spcBef>
+              <a:buFont typeface="Arial" panose="020B0604020202020204" pitchFamily="34" charset="0"/>
+              <a:buChar char="•"/>
+              <a:defRPr sz="5960" kern="1200">
+                <a:solidFill>
+                  <a:schemeClr val="tx1"/>
+                </a:solidFill>
+                <a:latin typeface="+mn-lt"/>
+                <a:ea typeface="+mn-ea"/>
+                <a:cs typeface="+mn-cs"/>
+              </a:defRPr>
+            </a:lvl9pPr>
+          </a:lstStyle>
+          <a:p>
+            <a:r>
+              <a:rPr lang="en-DE" b="1" dirty="0" err="1">
+                <a:highlight>
+                  <a:srgbClr val="00FFFF"/>
+                </a:highlight>
+              </a:rPr>
+              <a:t>Ausgangsdaten</a:t>
+            </a:r>
+            <a:r>
+              <a:rPr lang="en-DE" b="1" dirty="0">
+                <a:highlight>
+                  <a:srgbClr val="00FFFF"/>
+                </a:highlight>
+              </a:rPr>
+              <a:t> des </a:t>
+            </a:r>
+            <a:r>
+              <a:rPr lang="en-DE" b="1" dirty="0" err="1">
+                <a:highlight>
+                  <a:srgbClr val="00FFFF"/>
+                </a:highlight>
+              </a:rPr>
+              <a:t>Netzes</a:t>
+            </a:r>
+            <a:r>
+              <a:rPr lang="en-DE" b="1" dirty="0">
+                <a:highlight>
+                  <a:srgbClr val="00FFFF"/>
+                </a:highlight>
+              </a:rPr>
+              <a:t> [F3]</a:t>
+            </a:r>
+            <a:endParaRPr lang="en-US" b="1" dirty="0">
+              <a:highlight>
+                <a:srgbClr val="00FFFF"/>
+              </a:highlight>
+            </a:endParaRPr>
+          </a:p>
+          <a:p>
+            <a:pPr algn="ctr"/>
+            <a:r>
+              <a:rPr lang="en-DE" b="1" dirty="0">
+                <a:highlight>
+                  <a:srgbClr val="00FFFF"/>
+                </a:highlight>
+              </a:rPr>
+              <a:t>float32 [300, 57]</a:t>
+            </a:r>
+            <a:endParaRPr lang="en-US" b="1" dirty="0">
+              <a:highlight>
+                <a:srgbClr val="00FFFF"/>
+              </a:highlight>
+            </a:endParaRPr>
+          </a:p>
+          <a:p>
+            <a:r>
+              <a:rPr lang="en-US" b="1" dirty="0" err="1">
+                <a:highlight>
+                  <a:srgbClr val="00FFFF"/>
+                </a:highlight>
+              </a:rPr>
+              <a:t>Nachbearbeitung</a:t>
+            </a:r>
+            <a:r>
+              <a:rPr lang="en-US" b="1" dirty="0">
+                <a:highlight>
+                  <a:srgbClr val="00FFFF"/>
+                </a:highlight>
+              </a:rPr>
+              <a:t> </a:t>
+            </a:r>
+            <a:r>
+              <a:rPr lang="en-DE" b="1" dirty="0">
+                <a:highlight>
+                  <a:srgbClr val="00FFFF"/>
+                </a:highlight>
+              </a:rPr>
+              <a:t>[F</a:t>
+            </a:r>
+            <a:r>
+              <a:rPr lang="en-US" b="1" dirty="0">
+                <a:highlight>
+                  <a:srgbClr val="00FFFF"/>
+                </a:highlight>
+              </a:rPr>
+              <a:t>4</a:t>
+            </a:r>
+            <a:r>
+              <a:rPr lang="en-DE" b="1" dirty="0">
+                <a:highlight>
+                  <a:srgbClr val="00FFFF"/>
+                </a:highlight>
+              </a:rPr>
+              <a:t>]</a:t>
+            </a:r>
+            <a:endParaRPr lang="en-US" b="1" dirty="0">
+              <a:highlight>
+                <a:srgbClr val="00FFFF"/>
+              </a:highlight>
+            </a:endParaRPr>
+          </a:p>
+          <a:p>
+            <a:r>
+              <a:rPr lang="en-DE" b="1" dirty="0" err="1">
+                <a:highlight>
+                  <a:srgbClr val="00FFFF"/>
+                </a:highlight>
+              </a:rPr>
+              <a:t>Ausgangsdaten</a:t>
+            </a:r>
+            <a:r>
+              <a:rPr lang="en-DE" b="1" dirty="0">
+                <a:highlight>
+                  <a:srgbClr val="00FFFF"/>
+                </a:highlight>
+              </a:rPr>
+              <a:t> der </a:t>
+            </a:r>
+            <a:r>
+              <a:rPr lang="en-DE" b="1" dirty="0" err="1">
+                <a:highlight>
+                  <a:srgbClr val="00FFFF"/>
+                </a:highlight>
+              </a:rPr>
+              <a:t>Nachbearbeitung</a:t>
+            </a:r>
+            <a:r>
+              <a:rPr lang="en-DE" b="1" dirty="0">
+                <a:highlight>
+                  <a:srgbClr val="00FFFF"/>
+                </a:highlight>
+              </a:rPr>
+              <a:t>:</a:t>
+            </a:r>
+            <a:endParaRPr lang="en-DE" dirty="0">
+              <a:highlight>
+                <a:srgbClr val="00FFFF"/>
+              </a:highlight>
+            </a:endParaRPr>
+          </a:p>
+          <a:p>
+            <a:r>
+              <a:rPr lang="en-DE" b="1" dirty="0" err="1">
+                <a:highlight>
+                  <a:srgbClr val="00FFFF"/>
+                </a:highlight>
+              </a:rPr>
+              <a:t>Konfidenz-Filterung</a:t>
+            </a:r>
+            <a:r>
+              <a:rPr lang="en-DE" b="1" dirty="0">
+                <a:highlight>
+                  <a:srgbClr val="00FFFF"/>
+                </a:highlight>
+              </a:rPr>
+              <a:t>:</a:t>
+            </a:r>
+            <a:r>
+              <a:rPr lang="en-DE" dirty="0">
+                <a:highlight>
+                  <a:srgbClr val="00FFFF"/>
+                </a:highlight>
+              </a:rPr>
+              <a:t> </a:t>
+            </a:r>
+            <a:endParaRPr lang="en-US" dirty="0">
+              <a:highlight>
+                <a:srgbClr val="00FFFF"/>
+              </a:highlight>
+            </a:endParaRPr>
+          </a:p>
+          <a:p>
+            <a:r>
+              <a:rPr lang="en-DE" dirty="0">
+                <a:highlight>
+                  <a:srgbClr val="00FFFF"/>
+                </a:highlight>
+              </a:rPr>
+              <a:t>→ </a:t>
+            </a:r>
+            <a:r>
+              <a:rPr lang="en-DE" dirty="0" err="1">
+                <a:highlight>
+                  <a:srgbClr val="00FFFF"/>
+                </a:highlight>
+              </a:rPr>
+              <a:t>Detektionen</a:t>
+            </a:r>
+            <a:r>
+              <a:rPr lang="en-DE" dirty="0">
+                <a:highlight>
+                  <a:srgbClr val="00FFFF"/>
+                </a:highlight>
+              </a:rPr>
+              <a:t> </a:t>
+            </a:r>
+            <a:r>
+              <a:rPr lang="en-DE" dirty="0" err="1">
+                <a:highlight>
+                  <a:srgbClr val="00FFFF"/>
+                </a:highlight>
+              </a:rPr>
+              <a:t>unter</a:t>
+            </a:r>
+            <a:r>
+              <a:rPr lang="en-DE" dirty="0">
+                <a:highlight>
+                  <a:srgbClr val="00FFFF"/>
+                </a:highlight>
+              </a:rPr>
+              <a:t> </a:t>
+            </a:r>
+            <a:r>
+              <a:rPr lang="en-DE" dirty="0" err="1">
+                <a:highlight>
+                  <a:srgbClr val="00FFFF"/>
+                </a:highlight>
+              </a:rPr>
+              <a:t>Schwellwert</a:t>
+            </a:r>
+            <a:r>
+              <a:rPr lang="en-DE" dirty="0">
+                <a:highlight>
+                  <a:srgbClr val="00FFFF"/>
+                </a:highlight>
+              </a:rPr>
+              <a:t> </a:t>
+            </a:r>
+            <a:r>
+              <a:rPr lang="en-DE" dirty="0" err="1">
+                <a:highlight>
+                  <a:srgbClr val="00FFFF"/>
+                </a:highlight>
+              </a:rPr>
+              <a:t>werden</a:t>
+            </a:r>
+            <a:r>
+              <a:rPr lang="en-DE" dirty="0">
+                <a:highlight>
+                  <a:srgbClr val="00FFFF"/>
+                </a:highlight>
+              </a:rPr>
+              <a:t> </a:t>
+            </a:r>
+            <a:r>
+              <a:rPr lang="en-DE" dirty="0" err="1">
+                <a:highlight>
+                  <a:srgbClr val="00FFFF"/>
+                </a:highlight>
+              </a:rPr>
+              <a:t>verworfen</a:t>
+            </a:r>
+            <a:r>
+              <a:rPr lang="en-DE" dirty="0">
+                <a:highlight>
+                  <a:srgbClr val="00FFFF"/>
+                </a:highlight>
+              </a:rPr>
+              <a:t> </a:t>
+            </a:r>
+            <a:endParaRPr lang="en-US" dirty="0">
+              <a:highlight>
+                <a:srgbClr val="00FFFF"/>
+              </a:highlight>
+            </a:endParaRPr>
+          </a:p>
+          <a:p>
+            <a:r>
+              <a:rPr lang="en-DE" dirty="0">
+                <a:highlight>
+                  <a:srgbClr val="00FFFF"/>
+                </a:highlight>
+              </a:rPr>
+              <a:t>→ [300, 57] → </a:t>
+            </a:r>
+            <a:r>
+              <a:rPr lang="en-DE" b="1" dirty="0">
+                <a:highlight>
+                  <a:srgbClr val="00FFFF"/>
+                </a:highlight>
+              </a:rPr>
+              <a:t>[P, 57]</a:t>
+            </a:r>
+            <a:r>
+              <a:rPr lang="en-US" b="1" dirty="0">
+                <a:highlight>
+                  <a:srgbClr val="00FFFF"/>
+                </a:highlight>
+              </a:rPr>
+              <a:t> (</a:t>
+            </a:r>
+            <a:r>
+              <a:rPr lang="en-DE" dirty="0">
+                <a:highlight>
+                  <a:srgbClr val="00FFFF"/>
+                </a:highlight>
+              </a:rPr>
+              <a:t>P = </a:t>
+            </a:r>
+            <a:r>
+              <a:rPr lang="en-DE" dirty="0" err="1">
+                <a:highlight>
+                  <a:srgbClr val="00FFFF"/>
+                </a:highlight>
+              </a:rPr>
+              <a:t>tatsächlich</a:t>
+            </a:r>
+            <a:r>
+              <a:rPr lang="en-DE" dirty="0">
+                <a:highlight>
+                  <a:srgbClr val="00FFFF"/>
+                </a:highlight>
+              </a:rPr>
+              <a:t> </a:t>
+            </a:r>
+            <a:r>
+              <a:rPr lang="en-DE" dirty="0" err="1">
+                <a:highlight>
+                  <a:srgbClr val="00FFFF"/>
+                </a:highlight>
+              </a:rPr>
+              <a:t>erkannte</a:t>
+            </a:r>
+            <a:r>
+              <a:rPr lang="en-DE" dirty="0">
+                <a:highlight>
+                  <a:srgbClr val="00FFFF"/>
+                </a:highlight>
+              </a:rPr>
+              <a:t> </a:t>
+            </a:r>
+            <a:r>
+              <a:rPr lang="en-DE" dirty="0" err="1">
+                <a:highlight>
+                  <a:srgbClr val="00FFFF"/>
+                </a:highlight>
+              </a:rPr>
+              <a:t>Personen</a:t>
+            </a:r>
+            <a:r>
+              <a:rPr lang="en-US" dirty="0">
+                <a:highlight>
+                  <a:srgbClr val="00FFFF"/>
+                </a:highlight>
+              </a:rPr>
+              <a:t>)</a:t>
+            </a:r>
+            <a:endParaRPr lang="en-DE" dirty="0">
+              <a:highlight>
+                <a:srgbClr val="00FFFF"/>
+              </a:highlight>
+            </a:endParaRPr>
+          </a:p>
+          <a:p>
+            <a:r>
+              <a:rPr lang="en-DE" b="1" dirty="0" err="1">
+                <a:highlight>
+                  <a:srgbClr val="00FFFF"/>
+                </a:highlight>
+              </a:rPr>
+              <a:t>Rückskalierung</a:t>
+            </a:r>
+            <a:r>
+              <a:rPr lang="en-DE" b="1" dirty="0">
+                <a:highlight>
+                  <a:srgbClr val="00FFFF"/>
+                </a:highlight>
+              </a:rPr>
+              <a:t>:</a:t>
+            </a:r>
+            <a:r>
+              <a:rPr lang="en-DE" dirty="0">
+                <a:highlight>
+                  <a:srgbClr val="00FFFF"/>
+                </a:highlight>
+              </a:rPr>
+              <a:t> Box- &amp; </a:t>
+            </a:r>
+            <a:r>
+              <a:rPr lang="en-DE" dirty="0" err="1">
+                <a:highlight>
+                  <a:srgbClr val="00FFFF"/>
+                </a:highlight>
+              </a:rPr>
+              <a:t>Keypoint-Koordinaten</a:t>
+            </a:r>
+            <a:r>
+              <a:rPr lang="en-DE" dirty="0">
+                <a:highlight>
+                  <a:srgbClr val="00FFFF"/>
+                </a:highlight>
+              </a:rPr>
+              <a:t> von 640×640 </a:t>
+            </a:r>
+            <a:r>
+              <a:rPr lang="en-DE" dirty="0" err="1">
+                <a:highlight>
+                  <a:srgbClr val="00FFFF"/>
+                </a:highlight>
+              </a:rPr>
+              <a:t>zurück</a:t>
+            </a:r>
+            <a:r>
+              <a:rPr lang="en-DE" dirty="0">
+                <a:highlight>
+                  <a:srgbClr val="00FFFF"/>
+                </a:highlight>
+              </a:rPr>
+              <a:t> auf die </a:t>
+            </a:r>
+            <a:r>
+              <a:rPr lang="en-DE" dirty="0" err="1">
+                <a:highlight>
+                  <a:srgbClr val="00FFFF"/>
+                </a:highlight>
+              </a:rPr>
+              <a:t>Originalauflösung</a:t>
+            </a:r>
+            <a:endParaRPr lang="en-DE" dirty="0">
+              <a:highlight>
+                <a:srgbClr val="00FFFF"/>
+              </a:highlight>
+            </a:endParaRPr>
+          </a:p>
+          <a:p>
+            <a:r>
+              <a:rPr lang="en-DE" b="1" dirty="0" err="1">
+                <a:highlight>
+                  <a:srgbClr val="00FFFF"/>
+                </a:highlight>
+              </a:rPr>
+              <a:t>Besonderheit</a:t>
+            </a:r>
+            <a:r>
+              <a:rPr lang="en-DE" b="1" dirty="0">
+                <a:highlight>
+                  <a:srgbClr val="00FFFF"/>
+                </a:highlight>
+              </a:rPr>
+              <a:t> YOLO26: </a:t>
+            </a:r>
+            <a:r>
+              <a:rPr lang="en-DE" b="1" dirty="0" err="1">
+                <a:highlight>
+                  <a:srgbClr val="00FFFF"/>
+                </a:highlight>
+              </a:rPr>
+              <a:t>keine</a:t>
+            </a:r>
+            <a:r>
+              <a:rPr lang="en-DE" b="1" dirty="0">
+                <a:highlight>
+                  <a:srgbClr val="00FFFF"/>
+                </a:highlight>
+              </a:rPr>
+              <a:t> NMS!</a:t>
+            </a:r>
+            <a:endParaRPr lang="en-DE" dirty="0">
+              <a:highlight>
+                <a:srgbClr val="00FFFF"/>
+              </a:highlight>
+            </a:endParaRPr>
+          </a:p>
+          <a:p>
+            <a:r>
+              <a:rPr lang="en-DE" dirty="0" err="1">
+                <a:highlight>
+                  <a:srgbClr val="00FFFF"/>
+                </a:highlight>
+              </a:rPr>
+              <a:t>Unterdrückung</a:t>
+            </a:r>
+            <a:r>
+              <a:rPr lang="en-DE" dirty="0">
+                <a:highlight>
+                  <a:srgbClr val="00FFFF"/>
+                </a:highlight>
+              </a:rPr>
+              <a:t> </a:t>
+            </a:r>
+            <a:r>
+              <a:rPr lang="en-DE" dirty="0" err="1">
+                <a:highlight>
+                  <a:srgbClr val="00FFFF"/>
+                </a:highlight>
+              </a:rPr>
+              <a:t>redundanter</a:t>
+            </a:r>
+            <a:r>
+              <a:rPr lang="en-DE" dirty="0">
+                <a:highlight>
+                  <a:srgbClr val="00FFFF"/>
+                </a:highlight>
+              </a:rPr>
+              <a:t> </a:t>
+            </a:r>
+            <a:r>
+              <a:rPr lang="en-DE" dirty="0" err="1">
+                <a:highlight>
+                  <a:srgbClr val="00FFFF"/>
+                </a:highlight>
+              </a:rPr>
+              <a:t>Detektionen</a:t>
+            </a:r>
+            <a:r>
+              <a:rPr lang="en-DE" dirty="0">
+                <a:highlight>
+                  <a:srgbClr val="00FFFF"/>
+                </a:highlight>
+              </a:rPr>
+              <a:t> </a:t>
+            </a:r>
+            <a:r>
+              <a:rPr lang="en-DE" dirty="0" err="1">
+                <a:highlight>
+                  <a:srgbClr val="00FFFF"/>
+                </a:highlight>
+              </a:rPr>
+              <a:t>wird</a:t>
+            </a:r>
+            <a:r>
+              <a:rPr lang="en-DE" dirty="0">
+                <a:highlight>
+                  <a:srgbClr val="00FFFF"/>
+                </a:highlight>
+              </a:rPr>
+              <a:t> </a:t>
+            </a:r>
+            <a:r>
+              <a:rPr lang="en-DE" dirty="0" err="1">
+                <a:highlight>
+                  <a:srgbClr val="00FFFF"/>
+                </a:highlight>
+              </a:rPr>
+              <a:t>bereits</a:t>
+            </a:r>
+            <a:r>
+              <a:rPr lang="en-DE" dirty="0">
+                <a:highlight>
+                  <a:srgbClr val="00FFFF"/>
+                </a:highlight>
+              </a:rPr>
+              <a:t> </a:t>
+            </a:r>
+            <a:r>
+              <a:rPr lang="en-DE" b="1" dirty="0" err="1">
+                <a:highlight>
+                  <a:srgbClr val="00FFFF"/>
+                </a:highlight>
+              </a:rPr>
+              <a:t>im</a:t>
+            </a:r>
+            <a:r>
+              <a:rPr lang="en-DE" b="1" dirty="0">
+                <a:highlight>
+                  <a:srgbClr val="00FFFF"/>
+                </a:highlight>
+              </a:rPr>
+              <a:t> Training</a:t>
+            </a:r>
+            <a:r>
+              <a:rPr lang="en-DE" dirty="0">
+                <a:highlight>
+                  <a:srgbClr val="00FFFF"/>
+                </a:highlight>
+              </a:rPr>
+              <a:t> </a:t>
+            </a:r>
+            <a:r>
+              <a:rPr lang="en-DE" dirty="0" err="1">
+                <a:highlight>
+                  <a:srgbClr val="00FFFF"/>
+                </a:highlight>
+              </a:rPr>
+              <a:t>gelernt</a:t>
+            </a:r>
+            <a:r>
+              <a:rPr lang="en-DE" dirty="0">
+                <a:highlight>
+                  <a:srgbClr val="00FFFF"/>
+                </a:highlight>
+              </a:rPr>
+              <a:t> → native End-to-End-</a:t>
+            </a:r>
+            <a:r>
+              <a:rPr lang="en-DE" dirty="0" err="1">
+                <a:highlight>
+                  <a:srgbClr val="00FFFF"/>
+                </a:highlight>
+              </a:rPr>
+              <a:t>Inferenz</a:t>
+            </a:r>
+            <a:endParaRPr lang="en-DE" dirty="0">
+              <a:highlight>
+                <a:srgbClr val="00FFFF"/>
+              </a:highlight>
+            </a:endParaRPr>
+          </a:p>
+          <a:p>
+            <a:r>
+              <a:rPr lang="en-DE" dirty="0">
+                <a:highlight>
+                  <a:srgbClr val="00FFFF"/>
+                </a:highlight>
+              </a:rPr>
+              <a:t>Optional: Dual-Head-</a:t>
+            </a:r>
+            <a:r>
+              <a:rPr lang="en-DE" dirty="0" err="1">
+                <a:highlight>
+                  <a:srgbClr val="00FFFF"/>
+                </a:highlight>
+              </a:rPr>
+              <a:t>Architektur</a:t>
+            </a:r>
+            <a:r>
+              <a:rPr lang="en-DE" dirty="0">
+                <a:highlight>
+                  <a:srgbClr val="00FFFF"/>
+                </a:highlight>
+              </a:rPr>
+              <a:t> </a:t>
+            </a:r>
+            <a:r>
+              <a:rPr lang="en-DE" dirty="0" err="1">
+                <a:highlight>
+                  <a:srgbClr val="00FFFF"/>
+                </a:highlight>
+              </a:rPr>
+              <a:t>erlaubt</a:t>
+            </a:r>
+            <a:r>
+              <a:rPr lang="en-DE" dirty="0">
+                <a:highlight>
+                  <a:srgbClr val="00FFFF"/>
+                </a:highlight>
+              </a:rPr>
+              <a:t> </a:t>
+            </a:r>
+            <a:r>
+              <a:rPr lang="en-DE" dirty="0" err="1">
+                <a:highlight>
+                  <a:srgbClr val="00FFFF"/>
+                </a:highlight>
+              </a:rPr>
+              <a:t>Umschalten</a:t>
+            </a:r>
+            <a:r>
+              <a:rPr lang="en-DE" dirty="0">
+                <a:highlight>
+                  <a:srgbClr val="00FFFF"/>
+                </a:highlight>
+              </a:rPr>
+              <a:t> auf One-to-Many-Head </a:t>
+            </a:r>
+            <a:r>
+              <a:rPr lang="en-DE" dirty="0" err="1">
+                <a:highlight>
+                  <a:srgbClr val="00FFFF"/>
+                </a:highlight>
+              </a:rPr>
+              <a:t>mit</a:t>
+            </a:r>
+            <a:r>
+              <a:rPr lang="en-DE" dirty="0">
+                <a:highlight>
+                  <a:srgbClr val="00FFFF"/>
+                </a:highlight>
+              </a:rPr>
+              <a:t> NMS (</a:t>
+            </a:r>
+            <a:r>
+              <a:rPr lang="en-DE" dirty="0" err="1">
+                <a:highlight>
+                  <a:srgbClr val="00FFFF"/>
+                </a:highlight>
+              </a:rPr>
+              <a:t>etwas</a:t>
+            </a:r>
+            <a:r>
+              <a:rPr lang="en-DE" dirty="0">
+                <a:highlight>
+                  <a:srgbClr val="00FFFF"/>
+                </a:highlight>
+              </a:rPr>
+              <a:t> </a:t>
+            </a:r>
+            <a:r>
+              <a:rPr lang="en-DE" dirty="0" err="1">
+                <a:highlight>
+                  <a:srgbClr val="00FFFF"/>
+                </a:highlight>
+              </a:rPr>
+              <a:t>genauer</a:t>
+            </a:r>
+            <a:r>
+              <a:rPr lang="en-DE" dirty="0">
+                <a:highlight>
+                  <a:srgbClr val="00FFFF"/>
+                </a:highlight>
+              </a:rPr>
+              <a:t>, </a:t>
+            </a:r>
+            <a:r>
+              <a:rPr lang="en-DE" dirty="0" err="1">
+                <a:highlight>
+                  <a:srgbClr val="00FFFF"/>
+                </a:highlight>
+              </a:rPr>
+              <a:t>aber</a:t>
+            </a:r>
+            <a:r>
+              <a:rPr lang="en-DE" dirty="0">
+                <a:highlight>
+                  <a:srgbClr val="00FFFF"/>
+                </a:highlight>
+              </a:rPr>
+              <a:t> </a:t>
+            </a:r>
+            <a:r>
+              <a:rPr lang="en-DE" dirty="0" err="1">
+                <a:highlight>
+                  <a:srgbClr val="00FFFF"/>
+                </a:highlight>
+              </a:rPr>
+              <a:t>langsamer</a:t>
+            </a:r>
+            <a:r>
+              <a:rPr lang="en-DE" dirty="0">
+                <a:highlight>
+                  <a:srgbClr val="00FFFF"/>
+                </a:highlight>
+              </a:rPr>
+              <a:t>)</a:t>
+            </a:r>
+          </a:p>
+          <a:p>
+            <a:pPr algn="ctr"/>
+            <a:endParaRPr lang="en-DE" dirty="0">
+              <a:highlight>
+                <a:srgbClr val="00FFFF"/>
+              </a:highlight>
+            </a:endParaRPr>
+          </a:p>
+        </p:txBody>
+      </p:sp>
+      <p:sp>
+        <p:nvSpPr>
+          <p:cNvPr id="18" name="Bildplatzhalter 37">
+            <a:extLst>
+              <a:ext uri="{FF2B5EF4-FFF2-40B4-BE49-F238E27FC236}">
+                <a16:creationId xmlns:a16="http://schemas.microsoft.com/office/drawing/2014/main" id="{19A5857A-EDD3-A98A-9DDC-E180423057FB}"/>
+              </a:ext>
+            </a:extLst>
+          </p:cNvPr>
+          <p:cNvSpPr txBox="1">
+            <a:spLocks/>
+          </p:cNvSpPr>
+          <p:nvPr/>
+        </p:nvSpPr>
+        <p:spPr>
+          <a:xfrm>
+            <a:off x="10899775" y="31295920"/>
+            <a:ext cx="8472488" cy="5840412"/>
+          </a:xfrm>
+          <a:prstGeom prst="rect">
+            <a:avLst/>
+          </a:prstGeom>
+        </p:spPr>
+        <p:txBody>
+          <a:bodyPr vert="horz" lIns="0" tIns="0" rIns="0" bIns="0" rtlCol="0">
+            <a:noAutofit/>
+          </a:bodyPr>
+          <a:lstStyle>
+            <a:lvl1pPr marL="0" indent="0" algn="l" defTabSz="3027487" rtl="0" eaLnBrk="1" latinLnBrk="0" hangingPunct="1">
+              <a:lnSpc>
+                <a:spcPct val="90000"/>
+              </a:lnSpc>
+              <a:spcBef>
+                <a:spcPts val="3311"/>
+              </a:spcBef>
+              <a:buFont typeface="Arial" panose="020B0604020202020204" pitchFamily="34" charset="0"/>
+              <a:buNone/>
+              <a:defRPr sz="2700" kern="1200">
+                <a:solidFill>
+                  <a:schemeClr val="tx1"/>
+                </a:solidFill>
+                <a:latin typeface="+mn-lt"/>
+                <a:ea typeface="+mn-ea"/>
+                <a:cs typeface="+mn-cs"/>
+              </a:defRPr>
+            </a:lvl1pPr>
+            <a:lvl2pPr marL="182563" indent="0" algn="l" defTabSz="3027487" rtl="0" eaLnBrk="1" latinLnBrk="0" hangingPunct="1">
+              <a:lnSpc>
+                <a:spcPct val="90000"/>
+              </a:lnSpc>
+              <a:spcBef>
+                <a:spcPts val="1655"/>
+              </a:spcBef>
+              <a:buFont typeface="Arial" panose="020B0604020202020204" pitchFamily="34" charset="0"/>
+              <a:buNone/>
+              <a:defRPr sz="2700" kern="1200">
+                <a:solidFill>
+                  <a:schemeClr val="tx1"/>
+                </a:solidFill>
+                <a:latin typeface="+mn-lt"/>
+                <a:ea typeface="+mn-ea"/>
+                <a:cs typeface="+mn-cs"/>
+              </a:defRPr>
+            </a:lvl2pPr>
+            <a:lvl3pPr marL="541338" indent="-182563" algn="l" defTabSz="3027487" rtl="0" eaLnBrk="1" latinLnBrk="0" hangingPunct="1">
+              <a:lnSpc>
+                <a:spcPct val="90000"/>
+              </a:lnSpc>
+              <a:spcBef>
+                <a:spcPts val="1655"/>
+              </a:spcBef>
+              <a:buFont typeface="Arial" panose="020B0604020202020204" pitchFamily="34" charset="0"/>
+              <a:buNone/>
+              <a:defRPr sz="2700" kern="1200">
+                <a:solidFill>
+                  <a:schemeClr val="tx1"/>
+                </a:solidFill>
+                <a:latin typeface="+mn-lt"/>
+                <a:ea typeface="+mn-ea"/>
+                <a:cs typeface="+mn-cs"/>
+              </a:defRPr>
+            </a:lvl3pPr>
+            <a:lvl4pPr marL="715963" indent="-174625" algn="l" defTabSz="3027487" rtl="0" eaLnBrk="1" latinLnBrk="0" hangingPunct="1">
+              <a:lnSpc>
+                <a:spcPct val="90000"/>
+              </a:lnSpc>
+              <a:spcBef>
+                <a:spcPts val="1655"/>
+              </a:spcBef>
+              <a:buFont typeface="Arial" panose="020B0604020202020204" pitchFamily="34" charset="0"/>
+              <a:buNone/>
+              <a:defRPr sz="2700" kern="1200">
+                <a:solidFill>
+                  <a:schemeClr val="tx1"/>
+                </a:solidFill>
+                <a:latin typeface="+mn-lt"/>
+                <a:ea typeface="+mn-ea"/>
+                <a:cs typeface="+mn-cs"/>
+              </a:defRPr>
+            </a:lvl4pPr>
+            <a:lvl5pPr marL="898525" indent="-182563" algn="l" defTabSz="3027487" rtl="0" eaLnBrk="1" latinLnBrk="0" hangingPunct="1">
+              <a:lnSpc>
+                <a:spcPct val="90000"/>
+              </a:lnSpc>
+              <a:spcBef>
+                <a:spcPts val="1655"/>
+              </a:spcBef>
+              <a:buFont typeface="Arial" panose="020B0604020202020204" pitchFamily="34" charset="0"/>
+              <a:buNone/>
+              <a:defRPr sz="2700" kern="1200">
+                <a:solidFill>
+                  <a:schemeClr val="tx1"/>
+                </a:solidFill>
+                <a:latin typeface="+mn-lt"/>
+                <a:ea typeface="+mn-ea"/>
+                <a:cs typeface="+mn-cs"/>
+              </a:defRPr>
+            </a:lvl5pPr>
+            <a:lvl6pPr marL="8325589" indent="-756872" algn="l" defTabSz="3027487" rtl="0" eaLnBrk="1" latinLnBrk="0" hangingPunct="1">
+              <a:lnSpc>
+                <a:spcPct val="90000"/>
+              </a:lnSpc>
+              <a:spcBef>
+                <a:spcPts val="1655"/>
+              </a:spcBef>
+              <a:buFont typeface="Arial" panose="020B0604020202020204" pitchFamily="34" charset="0"/>
+              <a:buChar char="•"/>
+              <a:defRPr sz="5960" kern="1200">
+                <a:solidFill>
+                  <a:schemeClr val="tx1"/>
+                </a:solidFill>
+                <a:latin typeface="+mn-lt"/>
+                <a:ea typeface="+mn-ea"/>
+                <a:cs typeface="+mn-cs"/>
+              </a:defRPr>
+            </a:lvl6pPr>
+            <a:lvl7pPr marL="9839333" indent="-756872" algn="l" defTabSz="3027487" rtl="0" eaLnBrk="1" latinLnBrk="0" hangingPunct="1">
+              <a:lnSpc>
+                <a:spcPct val="90000"/>
+              </a:lnSpc>
+              <a:spcBef>
+                <a:spcPts val="1655"/>
+              </a:spcBef>
+              <a:buFont typeface="Arial" panose="020B0604020202020204" pitchFamily="34" charset="0"/>
+              <a:buChar char="•"/>
+              <a:defRPr sz="5960" kern="1200">
+                <a:solidFill>
+                  <a:schemeClr val="tx1"/>
+                </a:solidFill>
+                <a:latin typeface="+mn-lt"/>
+                <a:ea typeface="+mn-ea"/>
+                <a:cs typeface="+mn-cs"/>
+              </a:defRPr>
+            </a:lvl7pPr>
+            <a:lvl8pPr marL="11353076" indent="-756872" algn="l" defTabSz="3027487" rtl="0" eaLnBrk="1" latinLnBrk="0" hangingPunct="1">
+              <a:lnSpc>
+                <a:spcPct val="90000"/>
+              </a:lnSpc>
+              <a:spcBef>
+                <a:spcPts val="1655"/>
+              </a:spcBef>
+              <a:buFont typeface="Arial" panose="020B0604020202020204" pitchFamily="34" charset="0"/>
+              <a:buChar char="•"/>
+              <a:defRPr sz="5960" kern="1200">
+                <a:solidFill>
+                  <a:schemeClr val="tx1"/>
+                </a:solidFill>
+                <a:latin typeface="+mn-lt"/>
+                <a:ea typeface="+mn-ea"/>
+                <a:cs typeface="+mn-cs"/>
+              </a:defRPr>
+            </a:lvl8pPr>
+            <a:lvl9pPr marL="12866820" indent="-756872" algn="l" defTabSz="3027487" rtl="0" eaLnBrk="1" latinLnBrk="0" hangingPunct="1">
+              <a:lnSpc>
+                <a:spcPct val="90000"/>
+              </a:lnSpc>
+              <a:spcBef>
+                <a:spcPts val="1655"/>
+              </a:spcBef>
+              <a:buFont typeface="Arial" panose="020B0604020202020204" pitchFamily="34" charset="0"/>
+              <a:buChar char="•"/>
+              <a:defRPr sz="5960" kern="1200">
+                <a:solidFill>
+                  <a:schemeClr val="tx1"/>
+                </a:solidFill>
+                <a:latin typeface="+mn-lt"/>
+                <a:ea typeface="+mn-ea"/>
+                <a:cs typeface="+mn-cs"/>
+              </a:defRPr>
+            </a:lvl9pPr>
+          </a:lstStyle>
+          <a:p>
+            <a:endParaRPr lang="en-DE" dirty="0"/>
+          </a:p>
+        </p:txBody>
+      </p:sp>
+      <p:sp>
+        <p:nvSpPr>
+          <p:cNvPr id="21" name="Bildplatzhalter 38">
+            <a:extLst>
+              <a:ext uri="{FF2B5EF4-FFF2-40B4-BE49-F238E27FC236}">
+                <a16:creationId xmlns:a16="http://schemas.microsoft.com/office/drawing/2014/main" id="{02D928B8-C20B-3B79-D384-4CCD70DC709B}"/>
+              </a:ext>
+            </a:extLst>
+          </p:cNvPr>
+          <p:cNvSpPr txBox="1">
+            <a:spLocks/>
+          </p:cNvSpPr>
+          <p:nvPr/>
+        </p:nvSpPr>
+        <p:spPr>
+          <a:xfrm>
+            <a:off x="20243799" y="27196076"/>
+            <a:ext cx="8472488" cy="14276387"/>
+          </a:xfrm>
+          <a:prstGeom prst="rect">
+            <a:avLst/>
+          </a:prstGeom>
+        </p:spPr>
+        <p:txBody>
+          <a:bodyPr vert="horz" lIns="0" tIns="0" rIns="0" bIns="0" rtlCol="0">
+            <a:noAutofit/>
+          </a:bodyPr>
+          <a:lstStyle>
+            <a:lvl1pPr marL="0" indent="0" algn="l" defTabSz="3027487" rtl="0" eaLnBrk="1" latinLnBrk="0" hangingPunct="1">
+              <a:lnSpc>
+                <a:spcPct val="90000"/>
+              </a:lnSpc>
+              <a:spcBef>
+                <a:spcPts val="3311"/>
+              </a:spcBef>
+              <a:buFont typeface="Arial" panose="020B0604020202020204" pitchFamily="34" charset="0"/>
+              <a:buNone/>
+              <a:defRPr sz="2700" kern="1200">
+                <a:solidFill>
+                  <a:schemeClr val="tx1"/>
+                </a:solidFill>
+                <a:latin typeface="+mn-lt"/>
+                <a:ea typeface="+mn-ea"/>
+                <a:cs typeface="+mn-cs"/>
+              </a:defRPr>
+            </a:lvl1pPr>
+            <a:lvl2pPr marL="182563" indent="0" algn="l" defTabSz="3027487" rtl="0" eaLnBrk="1" latinLnBrk="0" hangingPunct="1">
+              <a:lnSpc>
+                <a:spcPct val="90000"/>
+              </a:lnSpc>
+              <a:spcBef>
+                <a:spcPts val="1655"/>
+              </a:spcBef>
+              <a:buFont typeface="Arial" panose="020B0604020202020204" pitchFamily="34" charset="0"/>
+              <a:buNone/>
+              <a:defRPr sz="2700" kern="1200">
+                <a:solidFill>
+                  <a:schemeClr val="tx1"/>
+                </a:solidFill>
+                <a:latin typeface="+mn-lt"/>
+                <a:ea typeface="+mn-ea"/>
+                <a:cs typeface="+mn-cs"/>
+              </a:defRPr>
+            </a:lvl2pPr>
+            <a:lvl3pPr marL="541338" indent="-182563" algn="l" defTabSz="3027487" rtl="0" eaLnBrk="1" latinLnBrk="0" hangingPunct="1">
+              <a:lnSpc>
+                <a:spcPct val="90000"/>
+              </a:lnSpc>
+              <a:spcBef>
+                <a:spcPts val="1655"/>
+              </a:spcBef>
+              <a:buFont typeface="Arial" panose="020B0604020202020204" pitchFamily="34" charset="0"/>
+              <a:buNone/>
+              <a:defRPr sz="2700" kern="1200">
+                <a:solidFill>
+                  <a:schemeClr val="tx1"/>
+                </a:solidFill>
+                <a:latin typeface="+mn-lt"/>
+                <a:ea typeface="+mn-ea"/>
+                <a:cs typeface="+mn-cs"/>
+              </a:defRPr>
+            </a:lvl3pPr>
+            <a:lvl4pPr marL="715963" indent="-174625" algn="l" defTabSz="3027487" rtl="0" eaLnBrk="1" latinLnBrk="0" hangingPunct="1">
+              <a:lnSpc>
+                <a:spcPct val="90000"/>
+              </a:lnSpc>
+              <a:spcBef>
+                <a:spcPts val="1655"/>
+              </a:spcBef>
+              <a:buFont typeface="Arial" panose="020B0604020202020204" pitchFamily="34" charset="0"/>
+              <a:buNone/>
+              <a:defRPr sz="2700" kern="1200">
+                <a:solidFill>
+                  <a:schemeClr val="tx1"/>
+                </a:solidFill>
+                <a:latin typeface="+mn-lt"/>
+                <a:ea typeface="+mn-ea"/>
+                <a:cs typeface="+mn-cs"/>
+              </a:defRPr>
+            </a:lvl4pPr>
+            <a:lvl5pPr marL="898525" indent="-182563" algn="l" defTabSz="3027487" rtl="0" eaLnBrk="1" latinLnBrk="0" hangingPunct="1">
+              <a:lnSpc>
+                <a:spcPct val="90000"/>
+              </a:lnSpc>
+              <a:spcBef>
+                <a:spcPts val="1655"/>
+              </a:spcBef>
+              <a:buFont typeface="Arial" panose="020B0604020202020204" pitchFamily="34" charset="0"/>
+              <a:buNone/>
+              <a:defRPr sz="2700" kern="1200">
+                <a:solidFill>
+                  <a:schemeClr val="tx1"/>
+                </a:solidFill>
+                <a:latin typeface="+mn-lt"/>
+                <a:ea typeface="+mn-ea"/>
+                <a:cs typeface="+mn-cs"/>
+              </a:defRPr>
+            </a:lvl5pPr>
+            <a:lvl6pPr marL="8325589" indent="-756872" algn="l" defTabSz="3027487" rtl="0" eaLnBrk="1" latinLnBrk="0" hangingPunct="1">
+              <a:lnSpc>
+                <a:spcPct val="90000"/>
+              </a:lnSpc>
+              <a:spcBef>
+                <a:spcPts val="1655"/>
+              </a:spcBef>
+              <a:buFont typeface="Arial" panose="020B0604020202020204" pitchFamily="34" charset="0"/>
+              <a:buChar char="•"/>
+              <a:defRPr sz="5960" kern="1200">
+                <a:solidFill>
+                  <a:schemeClr val="tx1"/>
+                </a:solidFill>
+                <a:latin typeface="+mn-lt"/>
+                <a:ea typeface="+mn-ea"/>
+                <a:cs typeface="+mn-cs"/>
+              </a:defRPr>
+            </a:lvl6pPr>
+            <a:lvl7pPr marL="9839333" indent="-756872" algn="l" defTabSz="3027487" rtl="0" eaLnBrk="1" latinLnBrk="0" hangingPunct="1">
+              <a:lnSpc>
+                <a:spcPct val="90000"/>
+              </a:lnSpc>
+              <a:spcBef>
+                <a:spcPts val="1655"/>
+              </a:spcBef>
+              <a:buFont typeface="Arial" panose="020B0604020202020204" pitchFamily="34" charset="0"/>
+              <a:buChar char="•"/>
+              <a:defRPr sz="5960" kern="1200">
+                <a:solidFill>
+                  <a:schemeClr val="tx1"/>
+                </a:solidFill>
+                <a:latin typeface="+mn-lt"/>
+                <a:ea typeface="+mn-ea"/>
+                <a:cs typeface="+mn-cs"/>
+              </a:defRPr>
+            </a:lvl7pPr>
+            <a:lvl8pPr marL="11353076" indent="-756872" algn="l" defTabSz="3027487" rtl="0" eaLnBrk="1" latinLnBrk="0" hangingPunct="1">
+              <a:lnSpc>
+                <a:spcPct val="90000"/>
+              </a:lnSpc>
+              <a:spcBef>
+                <a:spcPts val="1655"/>
+              </a:spcBef>
+              <a:buFont typeface="Arial" panose="020B0604020202020204" pitchFamily="34" charset="0"/>
+              <a:buChar char="•"/>
+              <a:defRPr sz="5960" kern="1200">
+                <a:solidFill>
+                  <a:schemeClr val="tx1"/>
+                </a:solidFill>
+                <a:latin typeface="+mn-lt"/>
+                <a:ea typeface="+mn-ea"/>
+                <a:cs typeface="+mn-cs"/>
+              </a:defRPr>
+            </a:lvl8pPr>
+            <a:lvl9pPr marL="12866820" indent="-756872" algn="l" defTabSz="3027487" rtl="0" eaLnBrk="1" latinLnBrk="0" hangingPunct="1">
+              <a:lnSpc>
+                <a:spcPct val="90000"/>
+              </a:lnSpc>
+              <a:spcBef>
+                <a:spcPts val="1655"/>
+              </a:spcBef>
+              <a:buFont typeface="Arial" panose="020B0604020202020204" pitchFamily="34" charset="0"/>
+              <a:buChar char="•"/>
+              <a:defRPr sz="5960" kern="1200">
+                <a:solidFill>
+                  <a:schemeClr val="tx1"/>
+                </a:solidFill>
+                <a:latin typeface="+mn-lt"/>
+                <a:ea typeface="+mn-ea"/>
+                <a:cs typeface="+mn-cs"/>
+              </a:defRPr>
+            </a:lvl9pPr>
+          </a:lstStyle>
+          <a:p>
+            <a:endParaRPr lang="en-DE" dirty="0"/>
+          </a:p>
+        </p:txBody>
+      </p:sp>
+      <p:sp>
+        <p:nvSpPr>
+          <p:cNvPr id="29" name="Bildplatzhalter 38">
+            <a:extLst>
+              <a:ext uri="{FF2B5EF4-FFF2-40B4-BE49-F238E27FC236}">
+                <a16:creationId xmlns:a16="http://schemas.microsoft.com/office/drawing/2014/main" id="{E5186F94-89CF-21ED-8B1E-7217F93CB58F}"/>
+              </a:ext>
+            </a:extLst>
+          </p:cNvPr>
+          <p:cNvSpPr txBox="1">
+            <a:spLocks/>
+          </p:cNvSpPr>
+          <p:nvPr/>
+        </p:nvSpPr>
+        <p:spPr>
+          <a:xfrm>
+            <a:off x="20213637" y="27196076"/>
+            <a:ext cx="8472488" cy="14276387"/>
+          </a:xfrm>
+          <a:prstGeom prst="rect">
+            <a:avLst/>
+          </a:prstGeom>
+        </p:spPr>
+        <p:txBody>
+          <a:bodyPr vert="horz" lIns="0" tIns="0" rIns="0" bIns="0" rtlCol="0">
+            <a:noAutofit/>
+          </a:bodyPr>
+          <a:lstStyle>
+            <a:lvl1pPr marL="0" indent="0" algn="l" defTabSz="3027487" rtl="0" eaLnBrk="1" latinLnBrk="0" hangingPunct="1">
+              <a:lnSpc>
+                <a:spcPct val="90000"/>
+              </a:lnSpc>
+              <a:spcBef>
+                <a:spcPts val="3311"/>
+              </a:spcBef>
+              <a:buFont typeface="Arial" panose="020B0604020202020204" pitchFamily="34" charset="0"/>
+              <a:buNone/>
+              <a:defRPr sz="2700" kern="1200">
+                <a:solidFill>
+                  <a:schemeClr val="tx1"/>
+                </a:solidFill>
+                <a:latin typeface="+mn-lt"/>
+                <a:ea typeface="+mn-ea"/>
+                <a:cs typeface="+mn-cs"/>
+              </a:defRPr>
+            </a:lvl1pPr>
+            <a:lvl2pPr marL="182563" indent="0" algn="l" defTabSz="3027487" rtl="0" eaLnBrk="1" latinLnBrk="0" hangingPunct="1">
+              <a:lnSpc>
+                <a:spcPct val="90000"/>
+              </a:lnSpc>
+              <a:spcBef>
+                <a:spcPts val="1655"/>
+              </a:spcBef>
+              <a:buFont typeface="Arial" panose="020B0604020202020204" pitchFamily="34" charset="0"/>
+              <a:buNone/>
+              <a:defRPr sz="2700" kern="1200">
+                <a:solidFill>
+                  <a:schemeClr val="tx1"/>
+                </a:solidFill>
+                <a:latin typeface="+mn-lt"/>
+                <a:ea typeface="+mn-ea"/>
+                <a:cs typeface="+mn-cs"/>
+              </a:defRPr>
+            </a:lvl2pPr>
+            <a:lvl3pPr marL="541338" indent="-182563" algn="l" defTabSz="3027487" rtl="0" eaLnBrk="1" latinLnBrk="0" hangingPunct="1">
+              <a:lnSpc>
+                <a:spcPct val="90000"/>
+              </a:lnSpc>
+              <a:spcBef>
+                <a:spcPts val="1655"/>
+              </a:spcBef>
+              <a:buFont typeface="Arial" panose="020B0604020202020204" pitchFamily="34" charset="0"/>
+              <a:buNone/>
+              <a:defRPr sz="2700" kern="1200">
+                <a:solidFill>
+                  <a:schemeClr val="tx1"/>
+                </a:solidFill>
+                <a:latin typeface="+mn-lt"/>
+                <a:ea typeface="+mn-ea"/>
+                <a:cs typeface="+mn-cs"/>
+              </a:defRPr>
+            </a:lvl3pPr>
+            <a:lvl4pPr marL="715963" indent="-174625" algn="l" defTabSz="3027487" rtl="0" eaLnBrk="1" latinLnBrk="0" hangingPunct="1">
+              <a:lnSpc>
+                <a:spcPct val="90000"/>
+              </a:lnSpc>
+              <a:spcBef>
+                <a:spcPts val="1655"/>
+              </a:spcBef>
+              <a:buFont typeface="Arial" panose="020B0604020202020204" pitchFamily="34" charset="0"/>
+              <a:buNone/>
+              <a:defRPr sz="2700" kern="1200">
+                <a:solidFill>
+                  <a:schemeClr val="tx1"/>
+                </a:solidFill>
+                <a:latin typeface="+mn-lt"/>
+                <a:ea typeface="+mn-ea"/>
+                <a:cs typeface="+mn-cs"/>
+              </a:defRPr>
+            </a:lvl4pPr>
+            <a:lvl5pPr marL="898525" indent="-182563" algn="l" defTabSz="3027487" rtl="0" eaLnBrk="1" latinLnBrk="0" hangingPunct="1">
+              <a:lnSpc>
+                <a:spcPct val="90000"/>
+              </a:lnSpc>
+              <a:spcBef>
+                <a:spcPts val="1655"/>
+              </a:spcBef>
+              <a:buFont typeface="Arial" panose="020B0604020202020204" pitchFamily="34" charset="0"/>
+              <a:buNone/>
+              <a:defRPr sz="2700" kern="1200">
+                <a:solidFill>
+                  <a:schemeClr val="tx1"/>
+                </a:solidFill>
+                <a:latin typeface="+mn-lt"/>
+                <a:ea typeface="+mn-ea"/>
+                <a:cs typeface="+mn-cs"/>
+              </a:defRPr>
+            </a:lvl5pPr>
+            <a:lvl6pPr marL="8325589" indent="-756872" algn="l" defTabSz="3027487" rtl="0" eaLnBrk="1" latinLnBrk="0" hangingPunct="1">
+              <a:lnSpc>
+                <a:spcPct val="90000"/>
+              </a:lnSpc>
+              <a:spcBef>
+                <a:spcPts val="1655"/>
+              </a:spcBef>
+              <a:buFont typeface="Arial" panose="020B0604020202020204" pitchFamily="34" charset="0"/>
+              <a:buChar char="•"/>
+              <a:defRPr sz="5960" kern="1200">
+                <a:solidFill>
+                  <a:schemeClr val="tx1"/>
+                </a:solidFill>
+                <a:latin typeface="+mn-lt"/>
+                <a:ea typeface="+mn-ea"/>
+                <a:cs typeface="+mn-cs"/>
+              </a:defRPr>
+            </a:lvl6pPr>
+            <a:lvl7pPr marL="9839333" indent="-756872" algn="l" defTabSz="3027487" rtl="0" eaLnBrk="1" latinLnBrk="0" hangingPunct="1">
+              <a:lnSpc>
+                <a:spcPct val="90000"/>
+              </a:lnSpc>
+              <a:spcBef>
+                <a:spcPts val="1655"/>
+              </a:spcBef>
+              <a:buFont typeface="Arial" panose="020B0604020202020204" pitchFamily="34" charset="0"/>
+              <a:buChar char="•"/>
+              <a:defRPr sz="5960" kern="1200">
+                <a:solidFill>
+                  <a:schemeClr val="tx1"/>
+                </a:solidFill>
+                <a:latin typeface="+mn-lt"/>
+                <a:ea typeface="+mn-ea"/>
+                <a:cs typeface="+mn-cs"/>
+              </a:defRPr>
+            </a:lvl7pPr>
+            <a:lvl8pPr marL="11353076" indent="-756872" algn="l" defTabSz="3027487" rtl="0" eaLnBrk="1" latinLnBrk="0" hangingPunct="1">
+              <a:lnSpc>
+                <a:spcPct val="90000"/>
+              </a:lnSpc>
+              <a:spcBef>
+                <a:spcPts val="1655"/>
+              </a:spcBef>
+              <a:buFont typeface="Arial" panose="020B0604020202020204" pitchFamily="34" charset="0"/>
+              <a:buChar char="•"/>
+              <a:defRPr sz="5960" kern="1200">
+                <a:solidFill>
+                  <a:schemeClr val="tx1"/>
+                </a:solidFill>
+                <a:latin typeface="+mn-lt"/>
+                <a:ea typeface="+mn-ea"/>
+                <a:cs typeface="+mn-cs"/>
+              </a:defRPr>
+            </a:lvl8pPr>
+            <a:lvl9pPr marL="12866820" indent="-756872" algn="l" defTabSz="3027487" rtl="0" eaLnBrk="1" latinLnBrk="0" hangingPunct="1">
+              <a:lnSpc>
+                <a:spcPct val="90000"/>
+              </a:lnSpc>
+              <a:spcBef>
+                <a:spcPts val="1655"/>
+              </a:spcBef>
+              <a:buFont typeface="Arial" panose="020B0604020202020204" pitchFamily="34" charset="0"/>
+              <a:buChar char="•"/>
+              <a:defRPr sz="5960" kern="1200">
+                <a:solidFill>
+                  <a:schemeClr val="tx1"/>
+                </a:solidFill>
+                <a:latin typeface="+mn-lt"/>
+                <a:ea typeface="+mn-ea"/>
+                <a:cs typeface="+mn-cs"/>
+              </a:defRPr>
+            </a:lvl9pPr>
+          </a:lstStyle>
+          <a:p>
+            <a:r>
+              <a:rPr lang="en-US" dirty="0"/>
+              <a:t>TEST SETUP + ERGEBNIS</a:t>
+            </a:r>
+            <a:endParaRPr lang="en-DE" dirty="0"/>
+          </a:p>
+        </p:txBody>
+      </p:sp>
+      <p:pic>
+        <p:nvPicPr>
+          <p:cNvPr id="56" name="Picture 55">
+            <a:extLst>
+              <a:ext uri="{FF2B5EF4-FFF2-40B4-BE49-F238E27FC236}">
+                <a16:creationId xmlns:a16="http://schemas.microsoft.com/office/drawing/2014/main" id="{A8F4F965-FF64-568B-0B37-051C571F1921}"/>
+              </a:ext>
+            </a:extLst>
+          </p:cNvPr>
+          <p:cNvPicPr>
+            <a:picLocks noChangeAspect="1"/>
+          </p:cNvPicPr>
+          <p:nvPr/>
+        </p:nvPicPr>
+        <p:blipFill>
+          <a:blip r:embed="rId4"/>
+          <a:stretch>
+            <a:fillRect/>
+          </a:stretch>
+        </p:blipFill>
+        <p:spPr>
+          <a:xfrm>
+            <a:off x="10455025" y="12737220"/>
+            <a:ext cx="9365161" cy="6941430"/>
+          </a:xfrm>
+          <a:prstGeom prst="rect">
+            <a:avLst/>
+          </a:prstGeom>
+        </p:spPr>
+      </p:pic>
+      <p:sp>
+        <p:nvSpPr>
+          <p:cNvPr id="57" name="Textplatzhalter 36">
+            <a:extLst>
+              <a:ext uri="{FF2B5EF4-FFF2-40B4-BE49-F238E27FC236}">
+                <a16:creationId xmlns:a16="http://schemas.microsoft.com/office/drawing/2014/main" id="{E44467A9-1B6C-6203-B0BF-4C077882670B}"/>
+              </a:ext>
+            </a:extLst>
+          </p:cNvPr>
+          <p:cNvSpPr txBox="1">
+            <a:spLocks/>
+          </p:cNvSpPr>
+          <p:nvPr/>
+        </p:nvSpPr>
+        <p:spPr>
+          <a:xfrm>
+            <a:off x="11839348" y="19859079"/>
+            <a:ext cx="6653666" cy="331805"/>
+          </a:xfrm>
+          <a:prstGeom prst="rect">
+            <a:avLst/>
+          </a:prstGeom>
+        </p:spPr>
+        <p:txBody>
+          <a:bodyPr vert="horz" lIns="0" tIns="0" rIns="0" bIns="0" rtlCol="0">
+            <a:noAutofit/>
+          </a:bodyPr>
+          <a:lstStyle>
+            <a:lvl1pPr marL="0" indent="0" algn="l" defTabSz="3027487" rtl="0" eaLnBrk="1" latinLnBrk="0" hangingPunct="1">
+              <a:lnSpc>
+                <a:spcPct val="90000"/>
+              </a:lnSpc>
+              <a:spcBef>
+                <a:spcPts val="3311"/>
+              </a:spcBef>
+              <a:buFont typeface="Arial" panose="020B0604020202020204" pitchFamily="34" charset="0"/>
+              <a:buNone/>
+              <a:defRPr sz="1600" kern="1200">
+                <a:solidFill>
+                  <a:schemeClr val="tx2"/>
+                </a:solidFill>
+                <a:latin typeface="Noto Serif" panose="02020502060505020204" pitchFamily="18" charset="0"/>
+                <a:ea typeface="Noto Serif" panose="02020502060505020204" pitchFamily="18" charset="0"/>
+                <a:cs typeface="Noto Serif" panose="02020502060505020204" pitchFamily="18" charset="0"/>
+              </a:defRPr>
+            </a:lvl1pPr>
+            <a:lvl2pPr marL="182563" indent="0" algn="l" defTabSz="3027487" rtl="0" eaLnBrk="1" latinLnBrk="0" hangingPunct="1">
+              <a:lnSpc>
+                <a:spcPct val="90000"/>
+              </a:lnSpc>
+              <a:spcBef>
+                <a:spcPts val="1655"/>
+              </a:spcBef>
+              <a:buFont typeface="Arial" panose="020B0604020202020204" pitchFamily="34" charset="0"/>
+              <a:buNone/>
+              <a:defRPr sz="2700" kern="1200">
+                <a:solidFill>
+                  <a:schemeClr val="tx1"/>
+                </a:solidFill>
+                <a:latin typeface="+mn-lt"/>
+                <a:ea typeface="+mn-ea"/>
+                <a:cs typeface="+mn-cs"/>
+              </a:defRPr>
+            </a:lvl2pPr>
+            <a:lvl3pPr marL="541338" indent="-182563" algn="l" defTabSz="3027487" rtl="0" eaLnBrk="1" latinLnBrk="0" hangingPunct="1">
+              <a:lnSpc>
+                <a:spcPct val="90000"/>
+              </a:lnSpc>
+              <a:spcBef>
+                <a:spcPts val="1655"/>
+              </a:spcBef>
+              <a:buFont typeface="Arial" panose="020B0604020202020204" pitchFamily="34" charset="0"/>
+              <a:buNone/>
+              <a:defRPr sz="2700" kern="1200">
+                <a:solidFill>
+                  <a:schemeClr val="tx1"/>
+                </a:solidFill>
+                <a:latin typeface="+mn-lt"/>
+                <a:ea typeface="+mn-ea"/>
+                <a:cs typeface="+mn-cs"/>
+              </a:defRPr>
+            </a:lvl3pPr>
+            <a:lvl4pPr marL="715963" indent="-174625" algn="l" defTabSz="3027487" rtl="0" eaLnBrk="1" latinLnBrk="0" hangingPunct="1">
+              <a:lnSpc>
+                <a:spcPct val="90000"/>
+              </a:lnSpc>
+              <a:spcBef>
+                <a:spcPts val="1655"/>
+              </a:spcBef>
+              <a:buFont typeface="Arial" panose="020B0604020202020204" pitchFamily="34" charset="0"/>
+              <a:buNone/>
+              <a:defRPr sz="2700" kern="1200">
+                <a:solidFill>
+                  <a:schemeClr val="tx1"/>
+                </a:solidFill>
+                <a:latin typeface="+mn-lt"/>
+                <a:ea typeface="+mn-ea"/>
+                <a:cs typeface="+mn-cs"/>
+              </a:defRPr>
+            </a:lvl4pPr>
+            <a:lvl5pPr marL="898525" indent="-182563" algn="l" defTabSz="3027487" rtl="0" eaLnBrk="1" latinLnBrk="0" hangingPunct="1">
+              <a:lnSpc>
+                <a:spcPct val="90000"/>
+              </a:lnSpc>
+              <a:spcBef>
+                <a:spcPts val="1655"/>
+              </a:spcBef>
+              <a:buFont typeface="Arial" panose="020B0604020202020204" pitchFamily="34" charset="0"/>
+              <a:buNone/>
+              <a:defRPr sz="2700" kern="1200">
+                <a:solidFill>
+                  <a:schemeClr val="tx1"/>
+                </a:solidFill>
+                <a:latin typeface="+mn-lt"/>
+                <a:ea typeface="+mn-ea"/>
+                <a:cs typeface="+mn-cs"/>
+              </a:defRPr>
+            </a:lvl5pPr>
+            <a:lvl6pPr marL="8325589" indent="-756872" algn="l" defTabSz="3027487" rtl="0" eaLnBrk="1" latinLnBrk="0" hangingPunct="1">
+              <a:lnSpc>
+                <a:spcPct val="90000"/>
+              </a:lnSpc>
+              <a:spcBef>
+                <a:spcPts val="1655"/>
+              </a:spcBef>
+              <a:buFont typeface="Arial" panose="020B0604020202020204" pitchFamily="34" charset="0"/>
+              <a:buChar char="•"/>
+              <a:defRPr sz="5960" kern="1200">
+                <a:solidFill>
+                  <a:schemeClr val="tx1"/>
+                </a:solidFill>
+                <a:latin typeface="+mn-lt"/>
+                <a:ea typeface="+mn-ea"/>
+                <a:cs typeface="+mn-cs"/>
+              </a:defRPr>
+            </a:lvl6pPr>
+            <a:lvl7pPr marL="9839333" indent="-756872" algn="l" defTabSz="3027487" rtl="0" eaLnBrk="1" latinLnBrk="0" hangingPunct="1">
+              <a:lnSpc>
+                <a:spcPct val="90000"/>
+              </a:lnSpc>
+              <a:spcBef>
+                <a:spcPts val="1655"/>
+              </a:spcBef>
+              <a:buFont typeface="Arial" panose="020B0604020202020204" pitchFamily="34" charset="0"/>
+              <a:buChar char="•"/>
+              <a:defRPr sz="5960" kern="1200">
+                <a:solidFill>
+                  <a:schemeClr val="tx1"/>
+                </a:solidFill>
+                <a:latin typeface="+mn-lt"/>
+                <a:ea typeface="+mn-ea"/>
+                <a:cs typeface="+mn-cs"/>
+              </a:defRPr>
+            </a:lvl7pPr>
+            <a:lvl8pPr marL="11353076" indent="-756872" algn="l" defTabSz="3027487" rtl="0" eaLnBrk="1" latinLnBrk="0" hangingPunct="1">
+              <a:lnSpc>
+                <a:spcPct val="90000"/>
+              </a:lnSpc>
+              <a:spcBef>
+                <a:spcPts val="1655"/>
+              </a:spcBef>
+              <a:buFont typeface="Arial" panose="020B0604020202020204" pitchFamily="34" charset="0"/>
+              <a:buChar char="•"/>
+              <a:defRPr sz="5960" kern="1200">
+                <a:solidFill>
+                  <a:schemeClr val="tx1"/>
+                </a:solidFill>
+                <a:latin typeface="+mn-lt"/>
+                <a:ea typeface="+mn-ea"/>
+                <a:cs typeface="+mn-cs"/>
+              </a:defRPr>
+            </a:lvl8pPr>
+            <a:lvl9pPr marL="12866820" indent="-756872" algn="l" defTabSz="3027487" rtl="0" eaLnBrk="1" latinLnBrk="0" hangingPunct="1">
+              <a:lnSpc>
+                <a:spcPct val="90000"/>
+              </a:lnSpc>
+              <a:spcBef>
+                <a:spcPts val="1655"/>
+              </a:spcBef>
+              <a:buFont typeface="Arial" panose="020B0604020202020204" pitchFamily="34" charset="0"/>
+              <a:buChar char="•"/>
+              <a:defRPr sz="5960" kern="1200">
+                <a:solidFill>
+                  <a:schemeClr val="tx1"/>
+                </a:solidFill>
+                <a:latin typeface="+mn-lt"/>
+                <a:ea typeface="+mn-ea"/>
+                <a:cs typeface="+mn-cs"/>
+              </a:defRPr>
+            </a:lvl9pPr>
+          </a:lstStyle>
+          <a:p>
+            <a:r>
+              <a:rPr lang="de-DE" dirty="0"/>
+              <a:t>Abbildung 1: YOLO26 Architekturdiagramm. Quelle: [1]</a:t>
+            </a:r>
+          </a:p>
+        </p:txBody>
+      </p:sp>
     </p:spTree>
     <p:extLst>
       <p:ext uri="{BB962C8B-B14F-4D97-AF65-F5344CB8AC3E}">
         <p14:creationId xmlns:p14="http://schemas.microsoft.com/office/powerpoint/2010/main" val="3331628853"/>
+      </p:ext>
+    </p:extLst>
+  </p:cSld>
+  <p:clrMapOvr>
+    <a:masterClrMapping/>
+  </p:clrMapOvr>
+  <p:extLst>
+    <p:ext uri="{6950BFC3-D8DA-4A85-94F7-54DA5524770B}">
+      <p188:commentRel xmlns:p188="http://schemas.microsoft.com/office/powerpoint/2018/8/main" r:id="rId2"/>
+    </p:ext>
+  </p:extLst>
+</p:sld>
+</file>
+
+<file path=ppt/slides/slide2.xml><?xml version="1.0" encoding="utf-8"?>
+<p:sld xmlns:a="http://schemas.openxmlformats.org/drawingml/2006/main" xmlns:r="http://schemas.openxmlformats.org/officeDocument/2006/relationships" xmlns:p="http://schemas.openxmlformats.org/presentationml/2006/main">
+  <p:cSld>
+    <p:spTree>
+      <p:nvGrpSpPr>
+        <p:cNvPr id="1" name="">
+          <a:extLst>
+            <a:ext uri="{FF2B5EF4-FFF2-40B4-BE49-F238E27FC236}">
+              <a16:creationId xmlns:a16="http://schemas.microsoft.com/office/drawing/2014/main" id="{0E30FDA9-E486-0A1F-D463-E0FD4F740BB8}"/>
+            </a:ext>
+          </a:extLst>
+        </p:cNvPr>
+        <p:cNvGrpSpPr/>
+        <p:nvPr/>
+      </p:nvGrpSpPr>
+      <p:grpSpPr>
+        <a:xfrm>
+          <a:off x="0" y="0"/>
+          <a:ext cx="0" cy="0"/>
+          <a:chOff x="0" y="0"/>
+          <a:chExt cx="0" cy="0"/>
+        </a:xfrm>
+      </p:grpSpPr>
+      <p:sp>
+        <p:nvSpPr>
+          <p:cNvPr id="30" name="Titel 29">
+            <a:extLst>
+              <a:ext uri="{FF2B5EF4-FFF2-40B4-BE49-F238E27FC236}">
+                <a16:creationId xmlns:a16="http://schemas.microsoft.com/office/drawing/2014/main" id="{A2DBACA1-1972-3A98-B3BA-4346A9FE763B}"/>
+              </a:ext>
+            </a:extLst>
+          </p:cNvPr>
+          <p:cNvSpPr>
+            <a:spLocks noGrp="1"/>
+          </p:cNvSpPr>
+          <p:nvPr>
+            <p:ph type="ctrTitle"/>
+          </p:nvPr>
+        </p:nvSpPr>
+        <p:spPr/>
+        <p:txBody>
+          <a:bodyPr/>
+          <a:lstStyle/>
+          <a:p>
+            <a:r>
+              <a:rPr lang="de-DE" dirty="0"/>
+              <a:t>Oberseminar Automatisierungstechnik SS2026</a:t>
+            </a:r>
+          </a:p>
+        </p:txBody>
+      </p:sp>
+      <p:sp>
+        <p:nvSpPr>
+          <p:cNvPr id="31" name="Untertitel 30">
+            <a:extLst>
+              <a:ext uri="{FF2B5EF4-FFF2-40B4-BE49-F238E27FC236}">
+                <a16:creationId xmlns:a16="http://schemas.microsoft.com/office/drawing/2014/main" id="{E6217FAB-D7C8-68CC-D9B6-0CCF95D2FB1A}"/>
+              </a:ext>
+            </a:extLst>
+          </p:cNvPr>
+          <p:cNvSpPr>
+            <a:spLocks noGrp="1"/>
+          </p:cNvSpPr>
+          <p:nvPr>
+            <p:ph type="subTitle" idx="1"/>
+          </p:nvPr>
+        </p:nvSpPr>
+        <p:spPr/>
+        <p:txBody>
+          <a:bodyPr/>
+          <a:lstStyle/>
+          <a:p>
+            <a:r>
+              <a:rPr lang="en-DE" sz="6600" dirty="0"/>
+              <a:t>YOLO26: </a:t>
+            </a:r>
+            <a:r>
+              <a:rPr lang="en-DE" sz="6600" dirty="0" err="1"/>
+              <a:t>Bestimmung</a:t>
+            </a:r>
+            <a:r>
+              <a:rPr lang="en-DE" sz="6600" dirty="0"/>
+              <a:t> von </a:t>
+            </a:r>
+            <a:r>
+              <a:rPr lang="en-DE" sz="6600" dirty="0" err="1"/>
+              <a:t>Objekt</a:t>
+            </a:r>
+            <a:r>
+              <a:rPr lang="en-DE" sz="6600" dirty="0"/>
+              <a:t>-Posen in </a:t>
+            </a:r>
+            <a:r>
+              <a:rPr lang="en-DE" sz="6600" dirty="0" err="1"/>
+              <a:t>Bildern</a:t>
+            </a:r>
+            <a:endParaRPr lang="en-US" sz="6600" dirty="0"/>
+          </a:p>
+          <a:p>
+            <a:r>
+              <a:rPr lang="de-DE" dirty="0"/>
+              <a:t>Nguyen, Duc Hai; Loewe, Richard</a:t>
+            </a:r>
+          </a:p>
+        </p:txBody>
+      </p:sp>
+      <p:sp>
+        <p:nvSpPr>
+          <p:cNvPr id="32" name="Textplatzhalter 31">
+            <a:extLst>
+              <a:ext uri="{FF2B5EF4-FFF2-40B4-BE49-F238E27FC236}">
+                <a16:creationId xmlns:a16="http://schemas.microsoft.com/office/drawing/2014/main" id="{F12F59D6-F5D0-9FC4-9EBC-81A061F8A082}"/>
+              </a:ext>
+            </a:extLst>
+          </p:cNvPr>
+          <p:cNvSpPr>
+            <a:spLocks noGrp="1"/>
+          </p:cNvSpPr>
+          <p:nvPr>
+            <p:ph type="body" sz="quarter" idx="26"/>
+          </p:nvPr>
+        </p:nvSpPr>
+        <p:spPr/>
+        <p:txBody>
+          <a:bodyPr/>
+          <a:lstStyle/>
+          <a:p>
+            <a:endParaRPr lang="de-DE" dirty="0"/>
+          </a:p>
+        </p:txBody>
+      </p:sp>
+      <p:sp>
+        <p:nvSpPr>
+          <p:cNvPr id="33" name="Textplatzhalter 32">
+            <a:extLst>
+              <a:ext uri="{FF2B5EF4-FFF2-40B4-BE49-F238E27FC236}">
+                <a16:creationId xmlns:a16="http://schemas.microsoft.com/office/drawing/2014/main" id="{BBFF3CF0-52A2-300F-DE53-600D24B241D1}"/>
+              </a:ext>
+            </a:extLst>
+          </p:cNvPr>
+          <p:cNvSpPr>
+            <a:spLocks noGrp="1"/>
+          </p:cNvSpPr>
+          <p:nvPr>
+            <p:ph type="body" sz="quarter" idx="27"/>
+          </p:nvPr>
+        </p:nvSpPr>
+        <p:spPr/>
+        <p:txBody>
+          <a:bodyPr/>
+          <a:lstStyle/>
+          <a:p>
+            <a:r>
+              <a:rPr lang="de-DE" b="1" dirty="0"/>
+              <a:t>Analyse der Lösung</a:t>
+            </a:r>
+          </a:p>
+        </p:txBody>
+      </p:sp>
+      <p:sp>
+        <p:nvSpPr>
+          <p:cNvPr id="35" name="Bildplatzhalter 34">
+            <a:extLst>
+              <a:ext uri="{FF2B5EF4-FFF2-40B4-BE49-F238E27FC236}">
+                <a16:creationId xmlns:a16="http://schemas.microsoft.com/office/drawing/2014/main" id="{BE2CCB5B-6DDE-FD22-1B16-A74898E7CD50}"/>
+              </a:ext>
+            </a:extLst>
+          </p:cNvPr>
+          <p:cNvSpPr>
+            <a:spLocks noGrp="1"/>
+          </p:cNvSpPr>
+          <p:nvPr>
+            <p:ph type="pic" sz="quarter" idx="33"/>
+          </p:nvPr>
+        </p:nvSpPr>
+        <p:spPr/>
+        <p:txBody>
+          <a:bodyPr/>
+          <a:lstStyle/>
+          <a:p>
+            <a:r>
+              <a:rPr lang="en-US" sz="3500" b="1" dirty="0"/>
+              <a:t>Motivation</a:t>
+            </a:r>
+            <a:endParaRPr lang="en-DE" sz="3500" b="1" dirty="0"/>
+          </a:p>
+        </p:txBody>
+      </p:sp>
+      <p:sp>
+        <p:nvSpPr>
+          <p:cNvPr id="36" name="Bildplatzhalter 35">
+            <a:extLst>
+              <a:ext uri="{FF2B5EF4-FFF2-40B4-BE49-F238E27FC236}">
+                <a16:creationId xmlns:a16="http://schemas.microsoft.com/office/drawing/2014/main" id="{0AD536CD-F5E6-E900-75FE-63FDF3C2C4EF}"/>
+              </a:ext>
+            </a:extLst>
+          </p:cNvPr>
+          <p:cNvSpPr>
+            <a:spLocks noGrp="1"/>
+          </p:cNvSpPr>
+          <p:nvPr>
+            <p:ph type="pic" sz="quarter" idx="35"/>
+          </p:nvPr>
+        </p:nvSpPr>
+        <p:spPr/>
+        <p:txBody>
+          <a:bodyPr/>
+          <a:lstStyle/>
+          <a:p>
+            <a:endParaRPr lang="en-DE"/>
+          </a:p>
+        </p:txBody>
+      </p:sp>
+      <p:sp>
+        <p:nvSpPr>
+          <p:cNvPr id="37" name="Textplatzhalter 36">
+            <a:extLst>
+              <a:ext uri="{FF2B5EF4-FFF2-40B4-BE49-F238E27FC236}">
+                <a16:creationId xmlns:a16="http://schemas.microsoft.com/office/drawing/2014/main" id="{3E8277BD-56B6-19F4-8D4E-9A3A5B530DC3}"/>
+              </a:ext>
+            </a:extLst>
+          </p:cNvPr>
+          <p:cNvSpPr>
+            <a:spLocks noGrp="1"/>
+          </p:cNvSpPr>
+          <p:nvPr>
+            <p:ph type="body" sz="quarter" idx="36"/>
+          </p:nvPr>
+        </p:nvSpPr>
+        <p:spPr/>
+        <p:txBody>
+          <a:bodyPr/>
+          <a:lstStyle/>
+          <a:p>
+            <a:r>
+              <a:rPr lang="de-DE" dirty="0"/>
+              <a:t>Abbildung 1: Unterschrift</a:t>
+            </a:r>
+          </a:p>
+        </p:txBody>
+      </p:sp>
+      <p:sp>
+        <p:nvSpPr>
+          <p:cNvPr id="38" name="Bildplatzhalter 37">
+            <a:extLst>
+              <a:ext uri="{FF2B5EF4-FFF2-40B4-BE49-F238E27FC236}">
+                <a16:creationId xmlns:a16="http://schemas.microsoft.com/office/drawing/2014/main" id="{C756F743-D240-A52F-E615-E6B4F293BDDE}"/>
+              </a:ext>
+            </a:extLst>
+          </p:cNvPr>
+          <p:cNvSpPr>
+            <a:spLocks noGrp="1"/>
+          </p:cNvSpPr>
+          <p:nvPr>
+            <p:ph type="pic" sz="quarter" idx="47"/>
+          </p:nvPr>
+        </p:nvSpPr>
+        <p:spPr/>
+        <p:txBody>
+          <a:bodyPr/>
+          <a:lstStyle/>
+          <a:p>
+            <a:endParaRPr lang="en-DE"/>
+          </a:p>
+        </p:txBody>
+      </p:sp>
+      <p:sp>
+        <p:nvSpPr>
+          <p:cNvPr id="39" name="Bildplatzhalter 38">
+            <a:extLst>
+              <a:ext uri="{FF2B5EF4-FFF2-40B4-BE49-F238E27FC236}">
+                <a16:creationId xmlns:a16="http://schemas.microsoft.com/office/drawing/2014/main" id="{DBE0D85F-D346-23CD-CFED-7EB787AF8613}"/>
+              </a:ext>
+            </a:extLst>
+          </p:cNvPr>
+          <p:cNvSpPr>
+            <a:spLocks noGrp="1"/>
+          </p:cNvSpPr>
+          <p:nvPr>
+            <p:ph type="pic" sz="quarter" idx="48"/>
+          </p:nvPr>
+        </p:nvSpPr>
+        <p:spPr/>
+        <p:txBody>
+          <a:bodyPr/>
+          <a:lstStyle/>
+          <a:p>
+            <a:endParaRPr lang="en-DE"/>
+          </a:p>
+        </p:txBody>
+      </p:sp>
+      <p:sp>
+        <p:nvSpPr>
+          <p:cNvPr id="40" name="Textplatzhalter 39">
+            <a:extLst>
+              <a:ext uri="{FF2B5EF4-FFF2-40B4-BE49-F238E27FC236}">
+                <a16:creationId xmlns:a16="http://schemas.microsoft.com/office/drawing/2014/main" id="{75B1B10C-CFC3-D66A-3E25-58B4EF4D9C1C}"/>
+              </a:ext>
+            </a:extLst>
+          </p:cNvPr>
+          <p:cNvSpPr>
+            <a:spLocks noGrp="1"/>
+          </p:cNvSpPr>
+          <p:nvPr>
+            <p:ph type="body" sz="quarter" idx="49"/>
+          </p:nvPr>
+        </p:nvSpPr>
+        <p:spPr/>
+        <p:txBody>
+          <a:bodyPr/>
+          <a:lstStyle/>
+          <a:p>
+            <a:endParaRPr lang="de-DE" dirty="0"/>
+          </a:p>
+        </p:txBody>
+      </p:sp>
+      <p:sp>
+        <p:nvSpPr>
+          <p:cNvPr id="41" name="Textplatzhalter 40">
+            <a:extLst>
+              <a:ext uri="{FF2B5EF4-FFF2-40B4-BE49-F238E27FC236}">
+                <a16:creationId xmlns:a16="http://schemas.microsoft.com/office/drawing/2014/main" id="{3FDC165E-2654-FA4B-11BC-7088E69B3D17}"/>
+              </a:ext>
+            </a:extLst>
+          </p:cNvPr>
+          <p:cNvSpPr>
+            <a:spLocks noGrp="1"/>
+          </p:cNvSpPr>
+          <p:nvPr>
+            <p:ph type="body" sz="quarter" idx="50"/>
+          </p:nvPr>
+        </p:nvSpPr>
+        <p:spPr/>
+        <p:txBody>
+          <a:bodyPr/>
+          <a:lstStyle/>
+          <a:p>
+            <a:endParaRPr lang="de-DE" dirty="0"/>
+          </a:p>
+        </p:txBody>
+      </p:sp>
+      <p:sp>
+        <p:nvSpPr>
+          <p:cNvPr id="42" name="Textplatzhalter 41">
+            <a:extLst>
+              <a:ext uri="{FF2B5EF4-FFF2-40B4-BE49-F238E27FC236}">
+                <a16:creationId xmlns:a16="http://schemas.microsoft.com/office/drawing/2014/main" id="{6287328F-C9F2-2182-D3E9-AC6AA59AFB32}"/>
+              </a:ext>
+            </a:extLst>
+          </p:cNvPr>
+          <p:cNvSpPr>
+            <a:spLocks noGrp="1"/>
+          </p:cNvSpPr>
+          <p:nvPr>
+            <p:ph type="body" sz="quarter" idx="51"/>
+          </p:nvPr>
+        </p:nvSpPr>
+        <p:spPr>
+          <a:xfrm>
+            <a:off x="20272375" y="34173727"/>
+            <a:ext cx="8472488" cy="4837778"/>
+          </a:xfrm>
+        </p:spPr>
+        <p:txBody>
+          <a:bodyPr/>
+          <a:lstStyle/>
+          <a:p>
+            <a:pPr marL="449263" indent="-449263">
+              <a:tabLst>
+                <a:tab pos="449263" algn="l"/>
+              </a:tabLst>
+            </a:pPr>
+            <a:r>
+              <a:rPr lang="de-DE" sz="1800" dirty="0"/>
+              <a:t>[1] 	J. Campbell, R. </a:t>
+            </a:r>
+            <a:r>
+              <a:rPr lang="de-DE" sz="1800" dirty="0" err="1"/>
+              <a:t>Sukthankar</a:t>
+            </a:r>
+            <a:r>
+              <a:rPr lang="de-DE" sz="1800" dirty="0"/>
+              <a:t>, I. </a:t>
+            </a:r>
+            <a:r>
+              <a:rPr lang="de-DE" sz="1800" dirty="0" err="1"/>
+              <a:t>Nourbakhsh</a:t>
+            </a:r>
+            <a:r>
+              <a:rPr lang="de-DE" sz="1800" dirty="0"/>
+              <a:t>, A. </a:t>
+            </a:r>
+            <a:r>
+              <a:rPr lang="de-DE" sz="1800" dirty="0" err="1"/>
+              <a:t>Pahwa</a:t>
+            </a:r>
+            <a:r>
+              <a:rPr lang="de-DE" sz="1800" dirty="0"/>
+              <a:t>:  “A Robust Visual </a:t>
+            </a:r>
+            <a:r>
+              <a:rPr lang="de-DE" sz="1800" dirty="0" err="1"/>
+              <a:t>Odometry</a:t>
+            </a:r>
+            <a:r>
+              <a:rPr lang="de-DE" sz="1800" dirty="0"/>
+              <a:t> and </a:t>
+            </a:r>
+            <a:r>
+              <a:rPr lang="de-DE" sz="1800" dirty="0" err="1"/>
+              <a:t>Precipice</a:t>
+            </a:r>
+            <a:r>
+              <a:rPr lang="de-DE" sz="1800" dirty="0"/>
+              <a:t> </a:t>
+            </a:r>
+            <a:r>
+              <a:rPr lang="de-DE" sz="1800" dirty="0" err="1"/>
+              <a:t>Detection</a:t>
+            </a:r>
+            <a:r>
+              <a:rPr lang="de-DE" sz="1800" dirty="0"/>
+              <a:t> System </a:t>
+            </a:r>
+            <a:r>
+              <a:rPr lang="de-DE" sz="1800" dirty="0" err="1"/>
+              <a:t>Using</a:t>
+            </a:r>
+            <a:r>
+              <a:rPr lang="de-DE" sz="1800" dirty="0"/>
+              <a:t> Consumer-grade </a:t>
+            </a:r>
+            <a:r>
+              <a:rPr lang="de-DE" sz="1800" dirty="0" err="1"/>
+              <a:t>Monocular</a:t>
+            </a:r>
+            <a:r>
+              <a:rPr lang="de-DE" sz="1800" dirty="0"/>
+              <a:t> Vision”. In Proceedings </a:t>
+            </a:r>
+            <a:r>
+              <a:rPr lang="de-DE" sz="1800" dirty="0" err="1"/>
+              <a:t>of</a:t>
+            </a:r>
+            <a:r>
+              <a:rPr lang="de-DE" sz="1800" dirty="0"/>
+              <a:t> </a:t>
+            </a:r>
+            <a:r>
+              <a:rPr lang="de-DE" sz="1800" dirty="0" err="1"/>
+              <a:t>the</a:t>
+            </a:r>
+            <a:r>
+              <a:rPr lang="de-DE" sz="1800" dirty="0"/>
+              <a:t> IEEE International Conference on Robotics and Automation (ICRA’05), Barcelona, Spain, April 2005 (Internet source www.example-internet-source.com/example/example.pdf, </a:t>
+            </a:r>
+            <a:r>
+              <a:rPr lang="de-DE" sz="1800" dirty="0" err="1"/>
+              <a:t>accessed</a:t>
+            </a:r>
+            <a:r>
+              <a:rPr lang="de-DE" sz="1800" dirty="0"/>
+              <a:t> on 08.02.2018)</a:t>
+            </a:r>
+          </a:p>
+          <a:p>
+            <a:pPr marL="449263" indent="-449263">
+              <a:tabLst>
+                <a:tab pos="449263" algn="l"/>
+              </a:tabLst>
+            </a:pPr>
+            <a:r>
+              <a:rPr lang="de-DE" sz="1800" dirty="0"/>
+              <a:t>[2] 	A.D. </a:t>
+            </a:r>
+            <a:r>
+              <a:rPr lang="de-DE" sz="1800" dirty="0" err="1"/>
+              <a:t>Jepson</a:t>
+            </a:r>
+            <a:r>
+              <a:rPr lang="de-DE" sz="1800" dirty="0"/>
+              <a:t>, D.J, Heeger: “A fast </a:t>
+            </a:r>
+            <a:r>
+              <a:rPr lang="de-DE" sz="1800" dirty="0" err="1"/>
+              <a:t>subspace</a:t>
+            </a:r>
+            <a:r>
+              <a:rPr lang="de-DE" sz="1800" dirty="0"/>
+              <a:t> </a:t>
+            </a:r>
+            <a:r>
+              <a:rPr lang="de-DE" sz="1800" dirty="0" err="1"/>
+              <a:t>algorithm</a:t>
+            </a:r>
+            <a:r>
+              <a:rPr lang="de-DE" sz="1800" dirty="0"/>
+              <a:t> </a:t>
+            </a:r>
+            <a:r>
+              <a:rPr lang="de-DE" sz="1800" dirty="0" err="1"/>
+              <a:t>for</a:t>
+            </a:r>
+            <a:r>
+              <a:rPr lang="de-DE" sz="1800" dirty="0"/>
+              <a:t> </a:t>
+            </a:r>
+            <a:r>
+              <a:rPr lang="de-DE" sz="1800" dirty="0" err="1"/>
+              <a:t>recovering</a:t>
+            </a:r>
+            <a:r>
+              <a:rPr lang="de-DE" sz="1800" dirty="0"/>
+              <a:t> rigid </a:t>
+            </a:r>
+            <a:r>
+              <a:rPr lang="de-DE" sz="1800" dirty="0" err="1"/>
+              <a:t>motion</a:t>
+            </a:r>
+            <a:r>
+              <a:rPr lang="de-DE" sz="1800" dirty="0"/>
+              <a:t>”. In Proceedings </a:t>
+            </a:r>
+            <a:r>
+              <a:rPr lang="de-DE" sz="1800" dirty="0" err="1"/>
+              <a:t>of</a:t>
+            </a:r>
+            <a:r>
+              <a:rPr lang="de-DE" sz="1800" dirty="0"/>
+              <a:t> </a:t>
+            </a:r>
+            <a:r>
+              <a:rPr lang="de-DE" sz="1800" dirty="0" err="1"/>
+              <a:t>the</a:t>
+            </a:r>
+            <a:r>
+              <a:rPr lang="de-DE" sz="1800" dirty="0"/>
+              <a:t> IEEE Workshop on Visual Motion, pp. 124 131, Princeton, USA, </a:t>
+            </a:r>
+            <a:r>
+              <a:rPr lang="de-DE" sz="1800" dirty="0" err="1"/>
+              <a:t>Oct</a:t>
+            </a:r>
+            <a:r>
+              <a:rPr lang="de-DE" sz="1800" dirty="0"/>
+              <a:t>. 1991</a:t>
+            </a:r>
+          </a:p>
+          <a:p>
+            <a:pPr marL="449263" indent="-449263">
+              <a:tabLst>
+                <a:tab pos="449263" algn="l"/>
+              </a:tabLst>
+            </a:pPr>
+            <a:r>
+              <a:rPr lang="de-DE" sz="1800" dirty="0"/>
+              <a:t>[3]	Glenn </a:t>
+            </a:r>
+            <a:r>
+              <a:rPr lang="de-DE" sz="1800" dirty="0" err="1"/>
+              <a:t>Jocher</a:t>
+            </a:r>
+            <a:r>
+              <a:rPr lang="de-DE" sz="1800" dirty="0"/>
+              <a:t>, Jing Qiu: </a:t>
+            </a:r>
+            <a:r>
+              <a:rPr lang="de-DE" sz="1800" dirty="0" err="1"/>
+              <a:t>Ultralytics</a:t>
+            </a:r>
+            <a:r>
+              <a:rPr lang="de-DE" sz="1800" dirty="0"/>
+              <a:t> YOLO11, 11.0.0, 2024, https://github.com/ultralytics/ultralytics, AGPL-3.0. </a:t>
+            </a:r>
+          </a:p>
+          <a:p>
+            <a:endParaRPr lang="de-DE" sz="1800" dirty="0"/>
+          </a:p>
+        </p:txBody>
+      </p:sp>
+      <p:sp>
+        <p:nvSpPr>
+          <p:cNvPr id="43" name="Textplatzhalter 42">
+            <a:extLst>
+              <a:ext uri="{FF2B5EF4-FFF2-40B4-BE49-F238E27FC236}">
+                <a16:creationId xmlns:a16="http://schemas.microsoft.com/office/drawing/2014/main" id="{70BA0B74-47D1-D172-53DF-CC593671E5CC}"/>
+              </a:ext>
+            </a:extLst>
+          </p:cNvPr>
+          <p:cNvSpPr>
+            <a:spLocks noGrp="1"/>
+          </p:cNvSpPr>
+          <p:nvPr>
+            <p:ph type="body" sz="quarter" idx="52"/>
+          </p:nvPr>
+        </p:nvSpPr>
+        <p:spPr>
+          <a:xfrm>
+            <a:off x="20272375" y="33103292"/>
+            <a:ext cx="8472488" cy="1070435"/>
+          </a:xfrm>
+        </p:spPr>
+        <p:txBody>
+          <a:bodyPr/>
+          <a:lstStyle/>
+          <a:p>
+            <a:r>
+              <a:rPr lang="de-DE" b="1" dirty="0"/>
+              <a:t>Quellen:</a:t>
+            </a:r>
+          </a:p>
+        </p:txBody>
+      </p:sp>
+      <p:sp>
+        <p:nvSpPr>
+          <p:cNvPr id="44" name="Bildplatzhalter 43">
+            <a:extLst>
+              <a:ext uri="{FF2B5EF4-FFF2-40B4-BE49-F238E27FC236}">
+                <a16:creationId xmlns:a16="http://schemas.microsoft.com/office/drawing/2014/main" id="{229C97B0-141B-DD99-5B05-B483DDBFCABB}"/>
+              </a:ext>
+            </a:extLst>
+          </p:cNvPr>
+          <p:cNvSpPr>
+            <a:spLocks noGrp="1"/>
+          </p:cNvSpPr>
+          <p:nvPr>
+            <p:ph type="pic" sz="quarter" idx="53"/>
+          </p:nvPr>
+        </p:nvSpPr>
+        <p:spPr/>
+        <p:txBody>
+          <a:bodyPr/>
+          <a:lstStyle/>
+          <a:p>
+            <a:endParaRPr lang="en-DE"/>
+          </a:p>
+        </p:txBody>
+      </p:sp>
+      <p:sp>
+        <p:nvSpPr>
+          <p:cNvPr id="45" name="Textplatzhalter 44">
+            <a:extLst>
+              <a:ext uri="{FF2B5EF4-FFF2-40B4-BE49-F238E27FC236}">
+                <a16:creationId xmlns:a16="http://schemas.microsoft.com/office/drawing/2014/main" id="{32458E98-BEA1-63EB-2C85-E720D5847E44}"/>
+              </a:ext>
+            </a:extLst>
+          </p:cNvPr>
+          <p:cNvSpPr>
+            <a:spLocks noGrp="1"/>
+          </p:cNvSpPr>
+          <p:nvPr>
+            <p:ph type="body" sz="quarter" idx="54"/>
+          </p:nvPr>
+        </p:nvSpPr>
+        <p:spPr/>
+        <p:txBody>
+          <a:bodyPr/>
+          <a:lstStyle/>
+          <a:p>
+            <a:endParaRPr lang="de-DE" dirty="0"/>
+          </a:p>
+        </p:txBody>
+      </p:sp>
+      <p:sp>
+        <p:nvSpPr>
+          <p:cNvPr id="46" name="Bildplatzhalter 45">
+            <a:extLst>
+              <a:ext uri="{FF2B5EF4-FFF2-40B4-BE49-F238E27FC236}">
+                <a16:creationId xmlns:a16="http://schemas.microsoft.com/office/drawing/2014/main" id="{B37515B2-E14D-F4C5-DC48-101540B08D13}"/>
+              </a:ext>
+            </a:extLst>
+          </p:cNvPr>
+          <p:cNvSpPr>
+            <a:spLocks noGrp="1"/>
+          </p:cNvSpPr>
+          <p:nvPr>
+            <p:ph type="pic" sz="quarter" idx="55"/>
+          </p:nvPr>
+        </p:nvSpPr>
+        <p:spPr/>
+        <p:txBody>
+          <a:bodyPr/>
+          <a:lstStyle/>
+          <a:p>
+            <a:endParaRPr lang="en-DE"/>
+          </a:p>
+        </p:txBody>
+      </p:sp>
+      <p:sp>
+        <p:nvSpPr>
+          <p:cNvPr id="47" name="Textplatzhalter 46">
+            <a:extLst>
+              <a:ext uri="{FF2B5EF4-FFF2-40B4-BE49-F238E27FC236}">
+                <a16:creationId xmlns:a16="http://schemas.microsoft.com/office/drawing/2014/main" id="{4458CE0F-3F1C-AE75-99CD-30CDE68837F1}"/>
+              </a:ext>
+            </a:extLst>
+          </p:cNvPr>
+          <p:cNvSpPr>
+            <a:spLocks noGrp="1"/>
+          </p:cNvSpPr>
+          <p:nvPr>
+            <p:ph type="body" sz="quarter" idx="56"/>
+          </p:nvPr>
+        </p:nvSpPr>
+        <p:spPr/>
+        <p:txBody>
+          <a:bodyPr/>
+          <a:lstStyle/>
+          <a:p>
+            <a:endParaRPr lang="de-DE" dirty="0"/>
+          </a:p>
+        </p:txBody>
+      </p:sp>
+      <p:sp>
+        <p:nvSpPr>
+          <p:cNvPr id="48" name="Bildplatzhalter 47">
+            <a:extLst>
+              <a:ext uri="{FF2B5EF4-FFF2-40B4-BE49-F238E27FC236}">
+                <a16:creationId xmlns:a16="http://schemas.microsoft.com/office/drawing/2014/main" id="{81DA87FD-393B-245B-806E-22EC2FA57876}"/>
+              </a:ext>
+            </a:extLst>
+          </p:cNvPr>
+          <p:cNvSpPr>
+            <a:spLocks noGrp="1"/>
+          </p:cNvSpPr>
+          <p:nvPr>
+            <p:ph type="pic" sz="quarter" idx="57"/>
+          </p:nvPr>
+        </p:nvSpPr>
+        <p:spPr/>
+        <p:txBody>
+          <a:bodyPr/>
+          <a:lstStyle/>
+          <a:p>
+            <a:endParaRPr lang="en-DE"/>
+          </a:p>
+        </p:txBody>
+      </p:sp>
+      <p:sp>
+        <p:nvSpPr>
+          <p:cNvPr id="49" name="Textplatzhalter 48">
+            <a:extLst>
+              <a:ext uri="{FF2B5EF4-FFF2-40B4-BE49-F238E27FC236}">
+                <a16:creationId xmlns:a16="http://schemas.microsoft.com/office/drawing/2014/main" id="{78F28AA0-F762-9A7B-1809-6ECBFDD00107}"/>
+              </a:ext>
+            </a:extLst>
+          </p:cNvPr>
+          <p:cNvSpPr>
+            <a:spLocks noGrp="1"/>
+          </p:cNvSpPr>
+          <p:nvPr>
+            <p:ph type="body" sz="quarter" idx="58"/>
+          </p:nvPr>
+        </p:nvSpPr>
+        <p:spPr/>
+        <p:txBody>
+          <a:bodyPr/>
+          <a:lstStyle/>
+          <a:p>
+            <a:endParaRPr lang="de-DE" dirty="0"/>
+          </a:p>
+        </p:txBody>
+      </p:sp>
+      <p:sp>
+        <p:nvSpPr>
+          <p:cNvPr id="50" name="Bildplatzhalter 49">
+            <a:extLst>
+              <a:ext uri="{FF2B5EF4-FFF2-40B4-BE49-F238E27FC236}">
+                <a16:creationId xmlns:a16="http://schemas.microsoft.com/office/drawing/2014/main" id="{CF4E7AEB-212D-098C-4C21-DC619C123790}"/>
+              </a:ext>
+            </a:extLst>
+          </p:cNvPr>
+          <p:cNvSpPr>
+            <a:spLocks noGrp="1"/>
+          </p:cNvSpPr>
+          <p:nvPr>
+            <p:ph type="pic" sz="quarter" idx="59"/>
+          </p:nvPr>
+        </p:nvSpPr>
+        <p:spPr>
+          <a:xfrm>
+            <a:off x="20240623" y="19002544"/>
+            <a:ext cx="3787776" cy="3864026"/>
+          </a:xfrm>
+        </p:spPr>
+        <p:txBody>
+          <a:bodyPr/>
+          <a:lstStyle/>
+          <a:p>
+            <a:endParaRPr lang="en-DE"/>
+          </a:p>
+        </p:txBody>
+      </p:sp>
+      <p:sp>
+        <p:nvSpPr>
+          <p:cNvPr id="51" name="Textplatzhalter 50">
+            <a:extLst>
+              <a:ext uri="{FF2B5EF4-FFF2-40B4-BE49-F238E27FC236}">
+                <a16:creationId xmlns:a16="http://schemas.microsoft.com/office/drawing/2014/main" id="{05FE8E9D-4B29-39BB-BF75-CECE20F54F4F}"/>
+              </a:ext>
+            </a:extLst>
+          </p:cNvPr>
+          <p:cNvSpPr>
+            <a:spLocks noGrp="1"/>
+          </p:cNvSpPr>
+          <p:nvPr>
+            <p:ph type="body" sz="quarter" idx="60"/>
+          </p:nvPr>
+        </p:nvSpPr>
+        <p:spPr>
+          <a:xfrm>
+            <a:off x="20240623" y="23279372"/>
+            <a:ext cx="3787775" cy="3186112"/>
+          </a:xfrm>
+        </p:spPr>
+        <p:txBody>
+          <a:bodyPr/>
+          <a:lstStyle/>
+          <a:p>
+            <a:endParaRPr lang="de-DE"/>
+          </a:p>
+        </p:txBody>
+      </p:sp>
+      <p:sp>
+        <p:nvSpPr>
+          <p:cNvPr id="52" name="Bildplatzhalter 51">
+            <a:extLst>
+              <a:ext uri="{FF2B5EF4-FFF2-40B4-BE49-F238E27FC236}">
+                <a16:creationId xmlns:a16="http://schemas.microsoft.com/office/drawing/2014/main" id="{96434ECE-E6CB-0517-4B76-168F319BE300}"/>
+              </a:ext>
+            </a:extLst>
+          </p:cNvPr>
+          <p:cNvSpPr>
+            <a:spLocks noGrp="1"/>
+          </p:cNvSpPr>
+          <p:nvPr>
+            <p:ph type="pic" sz="quarter" idx="61"/>
+          </p:nvPr>
+        </p:nvSpPr>
+        <p:spPr>
+          <a:xfrm>
+            <a:off x="24928511" y="19002544"/>
+            <a:ext cx="3787776" cy="3864026"/>
+          </a:xfrm>
+        </p:spPr>
+        <p:txBody>
+          <a:bodyPr/>
+          <a:lstStyle/>
+          <a:p>
+            <a:endParaRPr lang="en-DE"/>
+          </a:p>
+        </p:txBody>
+      </p:sp>
+      <p:sp>
+        <p:nvSpPr>
+          <p:cNvPr id="53" name="Textplatzhalter 52">
+            <a:extLst>
+              <a:ext uri="{FF2B5EF4-FFF2-40B4-BE49-F238E27FC236}">
+                <a16:creationId xmlns:a16="http://schemas.microsoft.com/office/drawing/2014/main" id="{B9E8F3C6-C42C-A357-DB7C-B0461DCB01B8}"/>
+              </a:ext>
+            </a:extLst>
+          </p:cNvPr>
+          <p:cNvSpPr>
+            <a:spLocks noGrp="1"/>
+          </p:cNvSpPr>
+          <p:nvPr>
+            <p:ph type="body" sz="quarter" idx="62"/>
+          </p:nvPr>
+        </p:nvSpPr>
+        <p:spPr>
+          <a:xfrm>
+            <a:off x="24928511" y="23279372"/>
+            <a:ext cx="3787775" cy="3186112"/>
+          </a:xfrm>
+        </p:spPr>
+        <p:txBody>
+          <a:bodyPr/>
+          <a:lstStyle/>
+          <a:p>
+            <a:endParaRPr lang="de-DE"/>
+          </a:p>
+        </p:txBody>
+      </p:sp>
+      <p:sp>
+        <p:nvSpPr>
+          <p:cNvPr id="2" name="Textfeld 1">
+            <a:extLst>
+              <a:ext uri="{FF2B5EF4-FFF2-40B4-BE49-F238E27FC236}">
+                <a16:creationId xmlns:a16="http://schemas.microsoft.com/office/drawing/2014/main" id="{825B8D95-3B2F-D00B-3BC4-A9C8F6047C94}"/>
+              </a:ext>
+            </a:extLst>
+          </p:cNvPr>
+          <p:cNvSpPr txBox="1"/>
+          <p:nvPr/>
+        </p:nvSpPr>
+        <p:spPr>
+          <a:xfrm>
+            <a:off x="11201400" y="325898"/>
+            <a:ext cx="18812489" cy="5693866"/>
+          </a:xfrm>
+          <a:prstGeom prst="rect">
+            <a:avLst/>
+          </a:prstGeom>
+          <a:solidFill>
+            <a:srgbClr val="FFFF00"/>
+          </a:solidFill>
+        </p:spPr>
+        <p:txBody>
+          <a:bodyPr wrap="square" rtlCol="0">
+            <a:spAutoFit/>
+          </a:bodyPr>
+          <a:lstStyle/>
+          <a:p>
+            <a:r>
+              <a:rPr lang="de-DE" sz="4000" dirty="0"/>
+              <a:t>Hinweise (am Ende zu entfernen!):</a:t>
+            </a:r>
+          </a:p>
+          <a:p>
+            <a:pPr marL="571500" indent="-571500">
+              <a:buFont typeface="Arial" panose="020B0604020202020204" pitchFamily="34" charset="0"/>
+              <a:buChar char="•"/>
+            </a:pPr>
+            <a:r>
+              <a:rPr lang="de-DE" sz="3600" dirty="0"/>
+              <a:t>Positionen vom Logo und der zwei Titeltextblöcke </a:t>
+            </a:r>
+            <a:r>
+              <a:rPr lang="de-DE" sz="3600" b="1" dirty="0"/>
+              <a:t>nicht verändern</a:t>
+            </a:r>
+            <a:r>
+              <a:rPr lang="de-DE" sz="3600" dirty="0"/>
+              <a:t>!</a:t>
+            </a:r>
+          </a:p>
+          <a:p>
+            <a:pPr marL="571500" indent="-571500">
+              <a:buFont typeface="Arial" panose="020B0604020202020204" pitchFamily="34" charset="0"/>
+              <a:buChar char="•"/>
+            </a:pPr>
+            <a:r>
+              <a:rPr lang="de-DE" sz="3600" dirty="0"/>
+              <a:t>Untere Grenze der drei Spalten ist anzupassen um unteren Platz zu nutzen. Die obere Grenze und die horizontale Lage der Spalten </a:t>
+            </a:r>
+            <a:r>
+              <a:rPr lang="de-DE" sz="3600" b="1" dirty="0"/>
+              <a:t>nicht verändern</a:t>
+            </a:r>
+            <a:r>
+              <a:rPr lang="de-DE" sz="3600" dirty="0"/>
+              <a:t>.</a:t>
+            </a:r>
+          </a:p>
+          <a:p>
+            <a:pPr marL="571500" indent="-571500">
+              <a:buFont typeface="Arial" panose="020B0604020202020204" pitchFamily="34" charset="0"/>
+              <a:buChar char="•"/>
+            </a:pPr>
+            <a:r>
+              <a:rPr lang="de-DE" sz="3600" dirty="0"/>
+              <a:t>Jedes Bild muss unterschrieben werden, siehe Beispiel unten.</a:t>
+            </a:r>
+          </a:p>
+          <a:p>
+            <a:pPr marL="571500" indent="-571500">
+              <a:buFont typeface="Arial" panose="020B0604020202020204" pitchFamily="34" charset="0"/>
+              <a:buChar char="•"/>
+            </a:pPr>
+            <a:r>
+              <a:rPr lang="de-DE" sz="3600" dirty="0"/>
+              <a:t>Schriftart, -größe, -farbe der Blöcke </a:t>
+            </a:r>
+            <a:r>
+              <a:rPr lang="de-DE" sz="3600" b="1" dirty="0"/>
+              <a:t>nicht verändern</a:t>
+            </a:r>
+            <a:r>
+              <a:rPr lang="de-DE" sz="3600" dirty="0"/>
+              <a:t>!</a:t>
+            </a:r>
+          </a:p>
+          <a:p>
+            <a:pPr marL="571500" indent="-571500">
+              <a:buFont typeface="Arial" panose="020B0604020202020204" pitchFamily="34" charset="0"/>
+              <a:buChar char="•"/>
+            </a:pPr>
+            <a:r>
+              <a:rPr lang="de-DE" sz="3600" dirty="0"/>
+              <a:t>Breite der Blöcke </a:t>
+            </a:r>
+            <a:r>
+              <a:rPr lang="de-DE" sz="3600" b="1" dirty="0"/>
+              <a:t>nicht verändern</a:t>
+            </a:r>
+            <a:r>
+              <a:rPr lang="de-DE" sz="3600" dirty="0"/>
+              <a:t>!</a:t>
+            </a:r>
+          </a:p>
+          <a:p>
+            <a:pPr marL="571500" indent="-571500">
+              <a:buFont typeface="Arial" panose="020B0604020202020204" pitchFamily="34" charset="0"/>
+              <a:buChar char="•"/>
+            </a:pPr>
+            <a:r>
+              <a:rPr lang="de-DE" sz="3600" dirty="0"/>
+              <a:t>Sonst können Sie die Blöcke sinnvoll verschieben, kopieren, umsortieren, vertikal ausdehnen, löschen und selbstverständlich ausfüllen.</a:t>
+            </a:r>
+          </a:p>
+          <a:p>
+            <a:pPr marL="571500" indent="-571500">
+              <a:buFont typeface="Arial" panose="020B0604020202020204" pitchFamily="34" charset="0"/>
+              <a:buChar char="•"/>
+            </a:pPr>
+            <a:r>
+              <a:rPr lang="de-DE" sz="3600" dirty="0"/>
+              <a:t>Verwendete Quellen bitte zum Schluss angeben! </a:t>
+            </a:r>
+          </a:p>
+        </p:txBody>
+      </p:sp>
+      <p:sp>
+        <p:nvSpPr>
+          <p:cNvPr id="3" name="Textplatzhalter 31">
+            <a:extLst>
+              <a:ext uri="{FF2B5EF4-FFF2-40B4-BE49-F238E27FC236}">
+                <a16:creationId xmlns:a16="http://schemas.microsoft.com/office/drawing/2014/main" id="{EDFD0CBA-1D97-6234-A3FA-7DAA094A004F}"/>
+              </a:ext>
+            </a:extLst>
+          </p:cNvPr>
+          <p:cNvSpPr txBox="1">
+            <a:spLocks/>
+          </p:cNvSpPr>
+          <p:nvPr/>
+        </p:nvSpPr>
+        <p:spPr>
+          <a:xfrm>
+            <a:off x="1527176" y="39622182"/>
+            <a:ext cx="8472488" cy="2395924"/>
+          </a:xfrm>
+          <a:prstGeom prst="rect">
+            <a:avLst/>
+          </a:prstGeom>
+        </p:spPr>
+        <p:txBody>
+          <a:bodyPr vert="horz" lIns="0" tIns="0" rIns="0" bIns="0" rtlCol="0">
+            <a:noAutofit/>
+          </a:bodyPr>
+          <a:lstStyle>
+            <a:lvl1pPr marL="0" indent="0" algn="l" defTabSz="3027487" rtl="0" eaLnBrk="1" latinLnBrk="0" hangingPunct="1">
+              <a:lnSpc>
+                <a:spcPct val="90000"/>
+              </a:lnSpc>
+              <a:spcBef>
+                <a:spcPts val="3311"/>
+              </a:spcBef>
+              <a:buFont typeface="Arial" panose="020B0604020202020204" pitchFamily="34" charset="0"/>
+              <a:buNone/>
+              <a:defRPr sz="2700" kern="1200">
+                <a:solidFill>
+                  <a:schemeClr val="tx1"/>
+                </a:solidFill>
+                <a:latin typeface="+mn-lt"/>
+                <a:ea typeface="+mn-ea"/>
+                <a:cs typeface="+mn-cs"/>
+              </a:defRPr>
+            </a:lvl1pPr>
+            <a:lvl2pPr marL="182563" indent="0" algn="l" defTabSz="3027487" rtl="0" eaLnBrk="1" latinLnBrk="0" hangingPunct="1">
+              <a:lnSpc>
+                <a:spcPct val="90000"/>
+              </a:lnSpc>
+              <a:spcBef>
+                <a:spcPts val="1655"/>
+              </a:spcBef>
+              <a:buFont typeface="Arial" panose="020B0604020202020204" pitchFamily="34" charset="0"/>
+              <a:buNone/>
+              <a:defRPr sz="2700" kern="1200">
+                <a:solidFill>
+                  <a:schemeClr val="tx1"/>
+                </a:solidFill>
+                <a:latin typeface="+mn-lt"/>
+                <a:ea typeface="+mn-ea"/>
+                <a:cs typeface="+mn-cs"/>
+              </a:defRPr>
+            </a:lvl2pPr>
+            <a:lvl3pPr marL="541338" indent="-182563" algn="l" defTabSz="3027487" rtl="0" eaLnBrk="1" latinLnBrk="0" hangingPunct="1">
+              <a:lnSpc>
+                <a:spcPct val="90000"/>
+              </a:lnSpc>
+              <a:spcBef>
+                <a:spcPts val="1655"/>
+              </a:spcBef>
+              <a:buFont typeface="Arial" panose="020B0604020202020204" pitchFamily="34" charset="0"/>
+              <a:buNone/>
+              <a:defRPr sz="2700" kern="1200">
+                <a:solidFill>
+                  <a:schemeClr val="tx1"/>
+                </a:solidFill>
+                <a:latin typeface="+mn-lt"/>
+                <a:ea typeface="+mn-ea"/>
+                <a:cs typeface="+mn-cs"/>
+              </a:defRPr>
+            </a:lvl3pPr>
+            <a:lvl4pPr marL="715963" indent="-174625" algn="l" defTabSz="3027487" rtl="0" eaLnBrk="1" latinLnBrk="0" hangingPunct="1">
+              <a:lnSpc>
+                <a:spcPct val="90000"/>
+              </a:lnSpc>
+              <a:spcBef>
+                <a:spcPts val="1655"/>
+              </a:spcBef>
+              <a:buFont typeface="Arial" panose="020B0604020202020204" pitchFamily="34" charset="0"/>
+              <a:buNone/>
+              <a:defRPr sz="2700" kern="1200">
+                <a:solidFill>
+                  <a:schemeClr val="tx1"/>
+                </a:solidFill>
+                <a:latin typeface="+mn-lt"/>
+                <a:ea typeface="+mn-ea"/>
+                <a:cs typeface="+mn-cs"/>
+              </a:defRPr>
+            </a:lvl4pPr>
+            <a:lvl5pPr marL="898525" indent="-182563" algn="l" defTabSz="3027487" rtl="0" eaLnBrk="1" latinLnBrk="0" hangingPunct="1">
+              <a:lnSpc>
+                <a:spcPct val="90000"/>
+              </a:lnSpc>
+              <a:spcBef>
+                <a:spcPts val="1655"/>
+              </a:spcBef>
+              <a:buFont typeface="Arial" panose="020B0604020202020204" pitchFamily="34" charset="0"/>
+              <a:buNone/>
+              <a:defRPr sz="2700" kern="1200">
+                <a:solidFill>
+                  <a:schemeClr val="tx1"/>
+                </a:solidFill>
+                <a:latin typeface="+mn-lt"/>
+                <a:ea typeface="+mn-ea"/>
+                <a:cs typeface="+mn-cs"/>
+              </a:defRPr>
+            </a:lvl5pPr>
+            <a:lvl6pPr marL="8325589" indent="-756872" algn="l" defTabSz="3027487" rtl="0" eaLnBrk="1" latinLnBrk="0" hangingPunct="1">
+              <a:lnSpc>
+                <a:spcPct val="90000"/>
+              </a:lnSpc>
+              <a:spcBef>
+                <a:spcPts val="1655"/>
+              </a:spcBef>
+              <a:buFont typeface="Arial" panose="020B0604020202020204" pitchFamily="34" charset="0"/>
+              <a:buChar char="•"/>
+              <a:defRPr sz="5960" kern="1200">
+                <a:solidFill>
+                  <a:schemeClr val="tx1"/>
+                </a:solidFill>
+                <a:latin typeface="+mn-lt"/>
+                <a:ea typeface="+mn-ea"/>
+                <a:cs typeface="+mn-cs"/>
+              </a:defRPr>
+            </a:lvl6pPr>
+            <a:lvl7pPr marL="9839333" indent="-756872" algn="l" defTabSz="3027487" rtl="0" eaLnBrk="1" latinLnBrk="0" hangingPunct="1">
+              <a:lnSpc>
+                <a:spcPct val="90000"/>
+              </a:lnSpc>
+              <a:spcBef>
+                <a:spcPts val="1655"/>
+              </a:spcBef>
+              <a:buFont typeface="Arial" panose="020B0604020202020204" pitchFamily="34" charset="0"/>
+              <a:buChar char="•"/>
+              <a:defRPr sz="5960" kern="1200">
+                <a:solidFill>
+                  <a:schemeClr val="tx1"/>
+                </a:solidFill>
+                <a:latin typeface="+mn-lt"/>
+                <a:ea typeface="+mn-ea"/>
+                <a:cs typeface="+mn-cs"/>
+              </a:defRPr>
+            </a:lvl7pPr>
+            <a:lvl8pPr marL="11353076" indent="-756872" algn="l" defTabSz="3027487" rtl="0" eaLnBrk="1" latinLnBrk="0" hangingPunct="1">
+              <a:lnSpc>
+                <a:spcPct val="90000"/>
+              </a:lnSpc>
+              <a:spcBef>
+                <a:spcPts val="1655"/>
+              </a:spcBef>
+              <a:buFont typeface="Arial" panose="020B0604020202020204" pitchFamily="34" charset="0"/>
+              <a:buChar char="•"/>
+              <a:defRPr sz="5960" kern="1200">
+                <a:solidFill>
+                  <a:schemeClr val="tx1"/>
+                </a:solidFill>
+                <a:latin typeface="+mn-lt"/>
+                <a:ea typeface="+mn-ea"/>
+                <a:cs typeface="+mn-cs"/>
+              </a:defRPr>
+            </a:lvl8pPr>
+            <a:lvl9pPr marL="12866820" indent="-756872" algn="l" defTabSz="3027487" rtl="0" eaLnBrk="1" latinLnBrk="0" hangingPunct="1">
+              <a:lnSpc>
+                <a:spcPct val="90000"/>
+              </a:lnSpc>
+              <a:spcBef>
+                <a:spcPts val="1655"/>
+              </a:spcBef>
+              <a:buFont typeface="Arial" panose="020B0604020202020204" pitchFamily="34" charset="0"/>
+              <a:buChar char="•"/>
+              <a:defRPr sz="5960" kern="1200">
+                <a:solidFill>
+                  <a:schemeClr val="tx1"/>
+                </a:solidFill>
+                <a:latin typeface="+mn-lt"/>
+                <a:ea typeface="+mn-ea"/>
+                <a:cs typeface="+mn-cs"/>
+              </a:defRPr>
+            </a:lvl9pPr>
+          </a:lstStyle>
+          <a:p>
+            <a:r>
+              <a:rPr lang="de-DE" sz="4900" dirty="0">
+                <a:solidFill>
+                  <a:srgbClr val="00008C"/>
+                </a:solidFill>
+                <a:latin typeface="Noto Sans Medium" panose="020B0502040504020204"/>
+              </a:rPr>
+              <a:t>Professur für Automatisierungstechnik</a:t>
+            </a:r>
+            <a:br>
+              <a:rPr lang="de-DE" sz="4900" dirty="0">
+                <a:solidFill>
+                  <a:srgbClr val="00008C"/>
+                </a:solidFill>
+                <a:latin typeface="Noto Sans Medium" panose="020B0502040504020204"/>
+              </a:rPr>
+            </a:br>
+            <a:r>
+              <a:rPr lang="de-DE" sz="4900" dirty="0">
+                <a:solidFill>
+                  <a:srgbClr val="00008C"/>
+                </a:solidFill>
+                <a:latin typeface="Noto Sans Medium" panose="020B0502040504020204"/>
+              </a:rPr>
+              <a:t>Prof. Dr. techn. Klaus </a:t>
+            </a:r>
+            <a:r>
+              <a:rPr lang="de-DE" sz="4900" dirty="0" err="1">
+                <a:solidFill>
+                  <a:srgbClr val="00008C"/>
+                </a:solidFill>
+                <a:latin typeface="Noto Sans Medium" panose="020B0502040504020204"/>
+              </a:rPr>
+              <a:t>Janschek</a:t>
+            </a:r>
+            <a:endParaRPr lang="de-DE" sz="4900" dirty="0">
+              <a:solidFill>
+                <a:srgbClr val="00008C"/>
+              </a:solidFill>
+              <a:latin typeface="Noto Sans Medium" panose="020B0502040504020204"/>
+            </a:endParaRPr>
+          </a:p>
+        </p:txBody>
+      </p:sp>
+    </p:spTree>
+    <p:extLst>
+      <p:ext uri="{BB962C8B-B14F-4D97-AF65-F5344CB8AC3E}">
+        <p14:creationId xmlns:p14="http://schemas.microsoft.com/office/powerpoint/2010/main" val="919528827"/>
       </p:ext>
     </p:extLst>
   </p:cSld>
